--- a/[예제 015] FDC 이상감지 시스템/FDC_이상감지_23종_상세설명.pptx
+++ b/[예제 015] FDC 이상감지 시스템/FDC_이상감지_23종_상세설명.pptx
@@ -30,6 +30,8 @@
     <p:sldId id="278" r:id="rId29"/>
     <p:sldId id="279" r:id="rId30"/>
     <p:sldId id="280" r:id="rId31"/>
+    <p:sldId id="281" r:id="rId32"/>
+    <p:sldId id="282" r:id="rId33"/>
   </p:sldIdLst>
   <p:sldSz cx="12188952" cy="6858000" type="screen4x3"/>
   <p:notesSz cx="6858000" cy="9144000"/>
@@ -22389,6 +22391,7232 @@
           <a:lstStyle/>
           <a:p>
             <a:pPr algn="ctr"/>
+          </a:p>
+        </p:txBody>
+      </p:sp>
+    </p:spTree>
+  </p:cSld>
+  <p:clrMapOvr>
+    <a:masterClrMapping/>
+  </p:clrMapOvr>
+</p:sld>
+</file>
+
+<file path=ppt/slides/slide26.xml><?xml version="1.0" encoding="utf-8"?>
+<p:sld xmlns:a="http://schemas.openxmlformats.org/drawingml/2006/main" xmlns:p="http://schemas.openxmlformats.org/presentationml/2006/main" xmlns:r="http://schemas.openxmlformats.org/officeDocument/2006/relationships">
+  <p:cSld>
+    <p:spTree>
+      <p:nvGrpSpPr>
+        <p:cNvPr id="1" name=""/>
+        <p:cNvGrpSpPr/>
+        <p:nvPr/>
+      </p:nvGrpSpPr>
+      <p:grpSpPr/>
+      <p:sp>
+        <p:nvSpPr>
+          <p:cNvPr id="2" name="Rectangle 1"/>
+          <p:cNvSpPr/>
+          <p:nvPr/>
+        </p:nvSpPr>
+        <p:spPr>
+          <a:xfrm>
+            <a:off x="0" y="0"/>
+            <a:ext cx="12188952" cy="6858000"/>
+          </a:xfrm>
+          <a:prstGeom prst="rect">
+            <a:avLst/>
+          </a:prstGeom>
+          <a:solidFill>
+            <a:srgbClr val="0D1117"/>
+          </a:solidFill>
+          <a:ln>
+            <a:noFill/>
+          </a:ln>
+          <a:effectLst/>
+        </p:spPr>
+        <p:style>
+          <a:lnRef idx="1">
+            <a:schemeClr val="accent1"/>
+          </a:lnRef>
+          <a:fillRef idx="3">
+            <a:schemeClr val="accent1"/>
+          </a:fillRef>
+          <a:effectRef idx="2">
+            <a:schemeClr val="accent1"/>
+          </a:effectRef>
+          <a:fontRef idx="minor">
+            <a:schemeClr val="lt1"/>
+          </a:fontRef>
+        </p:style>
+        <p:txBody>
+          <a:bodyPr rtlCol="0" anchor="ctr"/>
+          <a:lstStyle/>
+          <a:p>
+            <a:pPr algn="ctr"/>
+          </a:p>
+        </p:txBody>
+      </p:sp>
+      <p:sp>
+        <p:nvSpPr>
+          <p:cNvPr id="3" name="Rectangle 2"/>
+          <p:cNvSpPr/>
+          <p:nvPr/>
+        </p:nvSpPr>
+        <p:spPr>
+          <a:xfrm>
+            <a:off x="0" y="0"/>
+            <a:ext cx="12188952" cy="73152"/>
+          </a:xfrm>
+          <a:prstGeom prst="rect">
+            <a:avLst/>
+          </a:prstGeom>
+          <a:solidFill>
+            <a:srgbClr val="E3B341"/>
+          </a:solidFill>
+          <a:ln>
+            <a:noFill/>
+          </a:ln>
+          <a:effectLst/>
+        </p:spPr>
+        <p:style>
+          <a:lnRef idx="1">
+            <a:schemeClr val="accent1"/>
+          </a:lnRef>
+          <a:fillRef idx="3">
+            <a:schemeClr val="accent1"/>
+          </a:fillRef>
+          <a:effectRef idx="2">
+            <a:schemeClr val="accent1"/>
+          </a:effectRef>
+          <a:fontRef idx="minor">
+            <a:schemeClr val="lt1"/>
+          </a:fontRef>
+        </p:style>
+        <p:txBody>
+          <a:bodyPr rtlCol="0" anchor="ctr"/>
+          <a:lstStyle/>
+          <a:p>
+            <a:pPr algn="ctr"/>
+          </a:p>
+        </p:txBody>
+      </p:sp>
+      <p:sp>
+        <p:nvSpPr>
+          <p:cNvPr id="4" name="Rectangle 3"/>
+          <p:cNvSpPr/>
+          <p:nvPr/>
+        </p:nvSpPr>
+        <p:spPr>
+          <a:xfrm>
+            <a:off x="0" y="0"/>
+            <a:ext cx="12188952" cy="1097280"/>
+          </a:xfrm>
+          <a:prstGeom prst="rect">
+            <a:avLst/>
+          </a:prstGeom>
+          <a:solidFill>
+            <a:srgbClr val="21262D"/>
+          </a:solidFill>
+          <a:ln>
+            <a:noFill/>
+          </a:ln>
+          <a:effectLst/>
+        </p:spPr>
+        <p:style>
+          <a:lnRef idx="1">
+            <a:schemeClr val="accent1"/>
+          </a:lnRef>
+          <a:fillRef idx="3">
+            <a:schemeClr val="accent1"/>
+          </a:fillRef>
+          <a:effectRef idx="2">
+            <a:schemeClr val="accent1"/>
+          </a:effectRef>
+          <a:fontRef idx="minor">
+            <a:schemeClr val="lt1"/>
+          </a:fontRef>
+        </p:style>
+        <p:txBody>
+          <a:bodyPr rtlCol="0" anchor="ctr"/>
+          <a:lstStyle/>
+          <a:p>
+            <a:pPr algn="ctr"/>
+          </a:p>
+        </p:txBody>
+      </p:sp>
+      <p:sp>
+        <p:nvSpPr>
+          <p:cNvPr id="5" name="Rectangle 4"/>
+          <p:cNvSpPr/>
+          <p:nvPr/>
+        </p:nvSpPr>
+        <p:spPr>
+          <a:xfrm>
+            <a:off x="0" y="1051560"/>
+            <a:ext cx="12188952" cy="45720"/>
+          </a:xfrm>
+          <a:prstGeom prst="rect">
+            <a:avLst/>
+          </a:prstGeom>
+          <a:solidFill>
+            <a:srgbClr val="E3B341"/>
+          </a:solidFill>
+          <a:ln>
+            <a:noFill/>
+          </a:ln>
+          <a:effectLst/>
+        </p:spPr>
+        <p:style>
+          <a:lnRef idx="1">
+            <a:schemeClr val="accent1"/>
+          </a:lnRef>
+          <a:fillRef idx="3">
+            <a:schemeClr val="accent1"/>
+          </a:fillRef>
+          <a:effectRef idx="2">
+            <a:schemeClr val="accent1"/>
+          </a:effectRef>
+          <a:fontRef idx="minor">
+            <a:schemeClr val="lt1"/>
+          </a:fontRef>
+        </p:style>
+        <p:txBody>
+          <a:bodyPr rtlCol="0" anchor="ctr"/>
+          <a:lstStyle/>
+          <a:p>
+            <a:pPr algn="ctr"/>
+          </a:p>
+        </p:txBody>
+      </p:sp>
+      <p:sp>
+        <p:nvSpPr>
+          <p:cNvPr id="6" name="TextBox 5"/>
+          <p:cNvSpPr txBox="1"/>
+          <p:nvPr/>
+        </p:nvSpPr>
+        <p:spPr>
+          <a:xfrm>
+            <a:off x="274320" y="182880"/>
+            <a:ext cx="10972800" cy="594360"/>
+          </a:xfrm>
+          <a:prstGeom prst="rect">
+            <a:avLst/>
+          </a:prstGeom>
+          <a:noFill/>
+        </p:spPr>
+        <p:txBody>
+          <a:bodyPr wrap="square">
+            <a:spAutoFit/>
+          </a:bodyPr>
+          <a:lstStyle/>
+          <a:p>
+            <a:pPr algn="l"/>
+            <a:r>
+              <a:rPr sz="2600" b="1">
+                <a:solidFill>
+                  <a:srgbClr val="FFFFFF"/>
+                </a:solidFill>
+              </a:rPr>
+              <a:t>✨  임계값 추천 기능 — 동작 원리</a:t>
+            </a:r>
+          </a:p>
+        </p:txBody>
+      </p:sp>
+      <p:sp>
+        <p:nvSpPr>
+          <p:cNvPr id="7" name="TextBox 6"/>
+          <p:cNvSpPr txBox="1"/>
+          <p:nvPr/>
+        </p:nvSpPr>
+        <p:spPr>
+          <a:xfrm>
+            <a:off x="274320" y="749808"/>
+            <a:ext cx="11430000" cy="292608"/>
+          </a:xfrm>
+          <a:prstGeom prst="rect">
+            <a:avLst/>
+          </a:prstGeom>
+          <a:noFill/>
+        </p:spPr>
+        <p:txBody>
+          <a:bodyPr wrap="square">
+            <a:spAutoFit/>
+          </a:bodyPr>
+          <a:lstStyle/>
+          <a:p>
+            <a:pPr algn="l"/>
+            <a:r>
+              <a:rPr sz="1200" b="0">
+                <a:solidFill>
+                  <a:srgbClr val="8B949E"/>
+                </a:solidFill>
+              </a:rPr>
+              <a:t>✨ 추천 버튼 클릭 시 현재 데이터 분포를 분석하여 선택된 방식에 맞는 최적 임계값을 자동 계산합니다</a:t>
+            </a:r>
+          </a:p>
+        </p:txBody>
+      </p:sp>
+      <p:sp>
+        <p:nvSpPr>
+          <p:cNvPr id="8" name="Rectangle 7"/>
+          <p:cNvSpPr/>
+          <p:nvPr/>
+        </p:nvSpPr>
+        <p:spPr>
+          <a:xfrm>
+            <a:off x="228600" y="1234440"/>
+            <a:ext cx="3657600" cy="2606040"/>
+          </a:xfrm>
+          <a:prstGeom prst="rect">
+            <a:avLst/>
+          </a:prstGeom>
+          <a:solidFill>
+            <a:srgbClr val="0D1933"/>
+          </a:solidFill>
+          <a:ln w="19050">
+            <a:solidFill>
+              <a:srgbClr val="58A6FF"/>
+            </a:solidFill>
+          </a:ln>
+          <a:effectLst/>
+        </p:spPr>
+        <p:style>
+          <a:lnRef idx="1">
+            <a:schemeClr val="accent1"/>
+          </a:lnRef>
+          <a:fillRef idx="3">
+            <a:schemeClr val="accent1"/>
+          </a:fillRef>
+          <a:effectRef idx="2">
+            <a:schemeClr val="accent1"/>
+          </a:effectRef>
+          <a:fontRef idx="minor">
+            <a:schemeClr val="lt1"/>
+          </a:fontRef>
+        </p:style>
+        <p:txBody>
+          <a:bodyPr rtlCol="0" anchor="ctr"/>
+          <a:lstStyle/>
+          <a:p>
+            <a:pPr algn="ctr"/>
+          </a:p>
+        </p:txBody>
+      </p:sp>
+      <p:sp>
+        <p:nvSpPr>
+          <p:cNvPr id="9" name="TextBox 8"/>
+          <p:cNvSpPr txBox="1"/>
+          <p:nvPr/>
+        </p:nvSpPr>
+        <p:spPr>
+          <a:xfrm>
+            <a:off x="347472" y="1298448"/>
+            <a:ext cx="1097280" cy="347472"/>
+          </a:xfrm>
+          <a:prstGeom prst="rect">
+            <a:avLst/>
+          </a:prstGeom>
+          <a:noFill/>
+        </p:spPr>
+        <p:txBody>
+          <a:bodyPr wrap="square">
+            <a:spAutoFit/>
+          </a:bodyPr>
+          <a:lstStyle/>
+          <a:p>
+            <a:pPr algn="l"/>
+            <a:r>
+              <a:rPr sz="1100" b="1">
+                <a:solidFill>
+                  <a:srgbClr val="E3B341"/>
+                </a:solidFill>
+              </a:rPr>
+              <a:t>STEP 1</a:t>
+            </a:r>
+          </a:p>
+        </p:txBody>
+      </p:sp>
+      <p:sp>
+        <p:nvSpPr>
+          <p:cNvPr id="10" name="TextBox 9"/>
+          <p:cNvSpPr txBox="1"/>
+          <p:nvPr/>
+        </p:nvSpPr>
+        <p:spPr>
+          <a:xfrm>
+            <a:off x="347472" y="1627632"/>
+            <a:ext cx="3383280" cy="365760"/>
+          </a:xfrm>
+          <a:prstGeom prst="rect">
+            <a:avLst/>
+          </a:prstGeom>
+          <a:noFill/>
+        </p:spPr>
+        <p:txBody>
+          <a:bodyPr wrap="square">
+            <a:spAutoFit/>
+          </a:bodyPr>
+          <a:lstStyle/>
+          <a:p>
+            <a:pPr algn="l"/>
+            <a:r>
+              <a:rPr sz="1400" b="1">
+                <a:solidFill>
+                  <a:srgbClr val="58A6FF"/>
+                </a:solidFill>
+              </a:rPr>
+              <a:t>데이터 기초 통계 계산</a:t>
+            </a:r>
+          </a:p>
+        </p:txBody>
+      </p:sp>
+      <p:sp>
+        <p:nvSpPr>
+          <p:cNvPr id="11" name="Rectangle 10"/>
+          <p:cNvSpPr/>
+          <p:nvPr/>
+        </p:nvSpPr>
+        <p:spPr>
+          <a:xfrm>
+            <a:off x="347472" y="2057400"/>
+            <a:ext cx="3383280" cy="402336"/>
+          </a:xfrm>
+          <a:prstGeom prst="rect">
+            <a:avLst/>
+          </a:prstGeom>
+          <a:solidFill>
+            <a:srgbClr val="161B22"/>
+          </a:solidFill>
+          <a:ln>
+            <a:noFill/>
+          </a:ln>
+          <a:effectLst/>
+        </p:spPr>
+        <p:style>
+          <a:lnRef idx="1">
+            <a:schemeClr val="accent1"/>
+          </a:lnRef>
+          <a:fillRef idx="3">
+            <a:schemeClr val="accent1"/>
+          </a:fillRef>
+          <a:effectRef idx="2">
+            <a:schemeClr val="accent1"/>
+          </a:effectRef>
+          <a:fontRef idx="minor">
+            <a:schemeClr val="lt1"/>
+          </a:fontRef>
+        </p:style>
+        <p:txBody>
+          <a:bodyPr rtlCol="0" anchor="ctr"/>
+          <a:lstStyle/>
+          <a:p>
+            <a:pPr algn="ctr"/>
+          </a:p>
+        </p:txBody>
+      </p:sp>
+      <p:sp>
+        <p:nvSpPr>
+          <p:cNvPr id="12" name="TextBox 11"/>
+          <p:cNvSpPr txBox="1"/>
+          <p:nvPr/>
+        </p:nvSpPr>
+        <p:spPr>
+          <a:xfrm>
+            <a:off x="457200" y="2103120"/>
+            <a:ext cx="1188720" cy="320040"/>
+          </a:xfrm>
+          <a:prstGeom prst="rect">
+            <a:avLst/>
+          </a:prstGeom>
+          <a:noFill/>
+        </p:spPr>
+        <p:txBody>
+          <a:bodyPr wrap="square">
+            <a:spAutoFit/>
+          </a:bodyPr>
+          <a:lstStyle/>
+          <a:p>
+            <a:pPr algn="l"/>
+            <a:r>
+              <a:rPr sz="1100" b="1">
+                <a:solidFill>
+                  <a:srgbClr val="58A6FF"/>
+                </a:solidFill>
+              </a:rPr>
+              <a:t>평균 (μ)</a:t>
+            </a:r>
+          </a:p>
+        </p:txBody>
+      </p:sp>
+      <p:sp>
+        <p:nvSpPr>
+          <p:cNvPr id="13" name="TextBox 12"/>
+          <p:cNvSpPr txBox="1"/>
+          <p:nvPr/>
+        </p:nvSpPr>
+        <p:spPr>
+          <a:xfrm>
+            <a:off x="1691640" y="2103120"/>
+            <a:ext cx="1920240" cy="320040"/>
+          </a:xfrm>
+          <a:prstGeom prst="rect">
+            <a:avLst/>
+          </a:prstGeom>
+          <a:noFill/>
+        </p:spPr>
+        <p:txBody>
+          <a:bodyPr wrap="square">
+            <a:spAutoFit/>
+          </a:bodyPr>
+          <a:lstStyle/>
+          <a:p>
+            <a:pPr algn="l"/>
+            <a:r>
+              <a:rPr sz="1050" b="0">
+                <a:solidFill>
+                  <a:srgbClr val="C9D1D9"/>
+                </a:solidFill>
+              </a:rPr>
+              <a:t>전체 데이터 합 ÷ 개수</a:t>
+            </a:r>
+          </a:p>
+        </p:txBody>
+      </p:sp>
+      <p:sp>
+        <p:nvSpPr>
+          <p:cNvPr id="14" name="Rectangle 13"/>
+          <p:cNvSpPr/>
+          <p:nvPr/>
+        </p:nvSpPr>
+        <p:spPr>
+          <a:xfrm>
+            <a:off x="347472" y="2514600"/>
+            <a:ext cx="3383280" cy="402336"/>
+          </a:xfrm>
+          <a:prstGeom prst="rect">
+            <a:avLst/>
+          </a:prstGeom>
+          <a:solidFill>
+            <a:srgbClr val="161B22"/>
+          </a:solidFill>
+          <a:ln>
+            <a:noFill/>
+          </a:ln>
+          <a:effectLst/>
+        </p:spPr>
+        <p:style>
+          <a:lnRef idx="1">
+            <a:schemeClr val="accent1"/>
+          </a:lnRef>
+          <a:fillRef idx="3">
+            <a:schemeClr val="accent1"/>
+          </a:fillRef>
+          <a:effectRef idx="2">
+            <a:schemeClr val="accent1"/>
+          </a:effectRef>
+          <a:fontRef idx="minor">
+            <a:schemeClr val="lt1"/>
+          </a:fontRef>
+        </p:style>
+        <p:txBody>
+          <a:bodyPr rtlCol="0" anchor="ctr"/>
+          <a:lstStyle/>
+          <a:p>
+            <a:pPr algn="ctr"/>
+          </a:p>
+        </p:txBody>
+      </p:sp>
+      <p:sp>
+        <p:nvSpPr>
+          <p:cNvPr id="15" name="TextBox 14"/>
+          <p:cNvSpPr txBox="1"/>
+          <p:nvPr/>
+        </p:nvSpPr>
+        <p:spPr>
+          <a:xfrm>
+            <a:off x="457200" y="2560320"/>
+            <a:ext cx="1188720" cy="320040"/>
+          </a:xfrm>
+          <a:prstGeom prst="rect">
+            <a:avLst/>
+          </a:prstGeom>
+          <a:noFill/>
+        </p:spPr>
+        <p:txBody>
+          <a:bodyPr wrap="square">
+            <a:spAutoFit/>
+          </a:bodyPr>
+          <a:lstStyle/>
+          <a:p>
+            <a:pPr algn="l"/>
+            <a:r>
+              <a:rPr sz="1100" b="1">
+                <a:solidFill>
+                  <a:srgbClr val="58A6FF"/>
+                </a:solidFill>
+              </a:rPr>
+              <a:t>표준편차 (σ)</a:t>
+            </a:r>
+          </a:p>
+        </p:txBody>
+      </p:sp>
+      <p:sp>
+        <p:nvSpPr>
+          <p:cNvPr id="16" name="TextBox 15"/>
+          <p:cNvSpPr txBox="1"/>
+          <p:nvPr/>
+        </p:nvSpPr>
+        <p:spPr>
+          <a:xfrm>
+            <a:off x="1691640" y="2560320"/>
+            <a:ext cx="1920240" cy="320040"/>
+          </a:xfrm>
+          <a:prstGeom prst="rect">
+            <a:avLst/>
+          </a:prstGeom>
+          <a:noFill/>
+        </p:spPr>
+        <p:txBody>
+          <a:bodyPr wrap="square">
+            <a:spAutoFit/>
+          </a:bodyPr>
+          <a:lstStyle/>
+          <a:p>
+            <a:pPr algn="l"/>
+            <a:r>
+              <a:rPr sz="1050" b="0">
+                <a:solidFill>
+                  <a:srgbClr val="C9D1D9"/>
+                </a:solidFill>
+              </a:rPr>
+              <a:t>분포의 퍼짐 정도</a:t>
+            </a:r>
+          </a:p>
+        </p:txBody>
+      </p:sp>
+      <p:sp>
+        <p:nvSpPr>
+          <p:cNvPr id="17" name="Rectangle 16"/>
+          <p:cNvSpPr/>
+          <p:nvPr/>
+        </p:nvSpPr>
+        <p:spPr>
+          <a:xfrm>
+            <a:off x="347472" y="2971800"/>
+            <a:ext cx="3383280" cy="402336"/>
+          </a:xfrm>
+          <a:prstGeom prst="rect">
+            <a:avLst/>
+          </a:prstGeom>
+          <a:solidFill>
+            <a:srgbClr val="161B22"/>
+          </a:solidFill>
+          <a:ln>
+            <a:noFill/>
+          </a:ln>
+          <a:effectLst/>
+        </p:spPr>
+        <p:style>
+          <a:lnRef idx="1">
+            <a:schemeClr val="accent1"/>
+          </a:lnRef>
+          <a:fillRef idx="3">
+            <a:schemeClr val="accent1"/>
+          </a:fillRef>
+          <a:effectRef idx="2">
+            <a:schemeClr val="accent1"/>
+          </a:effectRef>
+          <a:fontRef idx="minor">
+            <a:schemeClr val="lt1"/>
+          </a:fontRef>
+        </p:style>
+        <p:txBody>
+          <a:bodyPr rtlCol="0" anchor="ctr"/>
+          <a:lstStyle/>
+          <a:p>
+            <a:pPr algn="ctr"/>
+          </a:p>
+        </p:txBody>
+      </p:sp>
+      <p:sp>
+        <p:nvSpPr>
+          <p:cNvPr id="18" name="TextBox 17"/>
+          <p:cNvSpPr txBox="1"/>
+          <p:nvPr/>
+        </p:nvSpPr>
+        <p:spPr>
+          <a:xfrm>
+            <a:off x="457200" y="3017520"/>
+            <a:ext cx="1188720" cy="320040"/>
+          </a:xfrm>
+          <a:prstGeom prst="rect">
+            <a:avLst/>
+          </a:prstGeom>
+          <a:noFill/>
+        </p:spPr>
+        <p:txBody>
+          <a:bodyPr wrap="square">
+            <a:spAutoFit/>
+          </a:bodyPr>
+          <a:lstStyle/>
+          <a:p>
+            <a:pPr algn="l"/>
+            <a:r>
+              <a:rPr sz="1100" b="1">
+                <a:solidFill>
+                  <a:srgbClr val="58A6FF"/>
+                </a:solidFill>
+              </a:rPr>
+              <a:t>Q1, Q3, IQR</a:t>
+            </a:r>
+          </a:p>
+        </p:txBody>
+      </p:sp>
+      <p:sp>
+        <p:nvSpPr>
+          <p:cNvPr id="19" name="TextBox 18"/>
+          <p:cNvSpPr txBox="1"/>
+          <p:nvPr/>
+        </p:nvSpPr>
+        <p:spPr>
+          <a:xfrm>
+            <a:off x="1691640" y="3017520"/>
+            <a:ext cx="1920240" cy="320040"/>
+          </a:xfrm>
+          <a:prstGeom prst="rect">
+            <a:avLst/>
+          </a:prstGeom>
+          <a:noFill/>
+        </p:spPr>
+        <p:txBody>
+          <a:bodyPr wrap="square">
+            <a:spAutoFit/>
+          </a:bodyPr>
+          <a:lstStyle/>
+          <a:p>
+            <a:pPr algn="l"/>
+            <a:r>
+              <a:rPr sz="1050" b="0">
+                <a:solidFill>
+                  <a:srgbClr val="C9D1D9"/>
+                </a:solidFill>
+              </a:rPr>
+              <a:t>사분위수 범위</a:t>
+            </a:r>
+          </a:p>
+        </p:txBody>
+      </p:sp>
+      <p:sp>
+        <p:nvSpPr>
+          <p:cNvPr id="20" name="Rectangle 19"/>
+          <p:cNvSpPr/>
+          <p:nvPr/>
+        </p:nvSpPr>
+        <p:spPr>
+          <a:xfrm>
+            <a:off x="347472" y="3429000"/>
+            <a:ext cx="3383280" cy="402336"/>
+          </a:xfrm>
+          <a:prstGeom prst="rect">
+            <a:avLst/>
+          </a:prstGeom>
+          <a:solidFill>
+            <a:srgbClr val="161B22"/>
+          </a:solidFill>
+          <a:ln>
+            <a:noFill/>
+          </a:ln>
+          <a:effectLst/>
+        </p:spPr>
+        <p:style>
+          <a:lnRef idx="1">
+            <a:schemeClr val="accent1"/>
+          </a:lnRef>
+          <a:fillRef idx="3">
+            <a:schemeClr val="accent1"/>
+          </a:fillRef>
+          <a:effectRef idx="2">
+            <a:schemeClr val="accent1"/>
+          </a:effectRef>
+          <a:fontRef idx="minor">
+            <a:schemeClr val="lt1"/>
+          </a:fontRef>
+        </p:style>
+        <p:txBody>
+          <a:bodyPr rtlCol="0" anchor="ctr"/>
+          <a:lstStyle/>
+          <a:p>
+            <a:pPr algn="ctr"/>
+          </a:p>
+        </p:txBody>
+      </p:sp>
+      <p:sp>
+        <p:nvSpPr>
+          <p:cNvPr id="21" name="TextBox 20"/>
+          <p:cNvSpPr txBox="1"/>
+          <p:nvPr/>
+        </p:nvSpPr>
+        <p:spPr>
+          <a:xfrm>
+            <a:off x="457200" y="3474720"/>
+            <a:ext cx="1188720" cy="320040"/>
+          </a:xfrm>
+          <a:prstGeom prst="rect">
+            <a:avLst/>
+          </a:prstGeom>
+          <a:noFill/>
+        </p:spPr>
+        <p:txBody>
+          <a:bodyPr wrap="square">
+            <a:spAutoFit/>
+          </a:bodyPr>
+          <a:lstStyle/>
+          <a:p>
+            <a:pPr algn="l"/>
+            <a:r>
+              <a:rPr sz="1100" b="1">
+                <a:solidFill>
+                  <a:srgbClr val="58A6FF"/>
+                </a:solidFill>
+              </a:rPr>
+              <a:t>중위수, MAD</a:t>
+            </a:r>
+          </a:p>
+        </p:txBody>
+      </p:sp>
+      <p:sp>
+        <p:nvSpPr>
+          <p:cNvPr id="22" name="TextBox 21"/>
+          <p:cNvSpPr txBox="1"/>
+          <p:nvPr/>
+        </p:nvSpPr>
+        <p:spPr>
+          <a:xfrm>
+            <a:off x="1691640" y="3474720"/>
+            <a:ext cx="1920240" cy="320040"/>
+          </a:xfrm>
+          <a:prstGeom prst="rect">
+            <a:avLst/>
+          </a:prstGeom>
+          <a:noFill/>
+        </p:spPr>
+        <p:txBody>
+          <a:bodyPr wrap="square">
+            <a:spAutoFit/>
+          </a:bodyPr>
+          <a:lstStyle/>
+          <a:p>
+            <a:pPr algn="l"/>
+            <a:r>
+              <a:rPr sz="1050" b="0">
+                <a:solidFill>
+                  <a:srgbClr val="C9D1D9"/>
+                </a:solidFill>
+              </a:rPr>
+              <a:t>강건 통계량</a:t>
+            </a:r>
+          </a:p>
+        </p:txBody>
+      </p:sp>
+      <p:sp>
+        <p:nvSpPr>
+          <p:cNvPr id="23" name="TextBox 22"/>
+          <p:cNvSpPr txBox="1"/>
+          <p:nvPr/>
+        </p:nvSpPr>
+        <p:spPr>
+          <a:xfrm>
+            <a:off x="3977639" y="2377440"/>
+            <a:ext cx="457200" cy="457200"/>
+          </a:xfrm>
+          <a:prstGeom prst="rect">
+            <a:avLst/>
+          </a:prstGeom>
+          <a:noFill/>
+        </p:spPr>
+        <p:txBody>
+          <a:bodyPr wrap="square">
+            <a:spAutoFit/>
+          </a:bodyPr>
+          <a:lstStyle/>
+          <a:p>
+            <a:pPr algn="ctr"/>
+            <a:r>
+              <a:rPr sz="2800" b="1">
+                <a:solidFill>
+                  <a:srgbClr val="E3B341"/>
+                </a:solidFill>
+              </a:rPr>
+              <a:t>→</a:t>
+            </a:r>
+          </a:p>
+        </p:txBody>
+      </p:sp>
+      <p:sp>
+        <p:nvSpPr>
+          <p:cNvPr id="24" name="Rectangle 23"/>
+          <p:cNvSpPr/>
+          <p:nvPr/>
+        </p:nvSpPr>
+        <p:spPr>
+          <a:xfrm>
+            <a:off x="4480560" y="1234440"/>
+            <a:ext cx="7452360" cy="2606040"/>
+          </a:xfrm>
+          <a:prstGeom prst="rect">
+            <a:avLst/>
+          </a:prstGeom>
+          <a:solidFill>
+            <a:srgbClr val="0D1933"/>
+          </a:solidFill>
+          <a:ln w="19050">
+            <a:solidFill>
+              <a:srgbClr val="3FB950"/>
+            </a:solidFill>
+          </a:ln>
+          <a:effectLst/>
+        </p:spPr>
+        <p:style>
+          <a:lnRef idx="1">
+            <a:schemeClr val="accent1"/>
+          </a:lnRef>
+          <a:fillRef idx="3">
+            <a:schemeClr val="accent1"/>
+          </a:fillRef>
+          <a:effectRef idx="2">
+            <a:schemeClr val="accent1"/>
+          </a:effectRef>
+          <a:fontRef idx="minor">
+            <a:schemeClr val="lt1"/>
+          </a:fontRef>
+        </p:style>
+        <p:txBody>
+          <a:bodyPr rtlCol="0" anchor="ctr"/>
+          <a:lstStyle/>
+          <a:p>
+            <a:pPr algn="ctr"/>
+          </a:p>
+        </p:txBody>
+      </p:sp>
+      <p:sp>
+        <p:nvSpPr>
+          <p:cNvPr id="25" name="TextBox 24"/>
+          <p:cNvSpPr txBox="1"/>
+          <p:nvPr/>
+        </p:nvSpPr>
+        <p:spPr>
+          <a:xfrm>
+            <a:off x="4617720" y="1298448"/>
+            <a:ext cx="1097280" cy="347472"/>
+          </a:xfrm>
+          <a:prstGeom prst="rect">
+            <a:avLst/>
+          </a:prstGeom>
+          <a:noFill/>
+        </p:spPr>
+        <p:txBody>
+          <a:bodyPr wrap="square">
+            <a:spAutoFit/>
+          </a:bodyPr>
+          <a:lstStyle/>
+          <a:p>
+            <a:pPr algn="l"/>
+            <a:r>
+              <a:rPr sz="1100" b="1">
+                <a:solidFill>
+                  <a:srgbClr val="E3B341"/>
+                </a:solidFill>
+              </a:rPr>
+              <a:t>STEP 2</a:t>
+            </a:r>
+          </a:p>
+        </p:txBody>
+      </p:sp>
+      <p:sp>
+        <p:nvSpPr>
+          <p:cNvPr id="26" name="TextBox 25"/>
+          <p:cNvSpPr txBox="1"/>
+          <p:nvPr/>
+        </p:nvSpPr>
+        <p:spPr>
+          <a:xfrm>
+            <a:off x="4617720" y="1627632"/>
+            <a:ext cx="7132320" cy="365760"/>
+          </a:xfrm>
+          <a:prstGeom prst="rect">
+            <a:avLst/>
+          </a:prstGeom>
+          <a:noFill/>
+        </p:spPr>
+        <p:txBody>
+          <a:bodyPr wrap="square">
+            <a:spAutoFit/>
+          </a:bodyPr>
+          <a:lstStyle/>
+          <a:p>
+            <a:pPr algn="l"/>
+            <a:r>
+              <a:rPr sz="1400" b="1">
+                <a:solidFill>
+                  <a:srgbClr val="3FB950"/>
+                </a:solidFill>
+              </a:rPr>
+              <a:t>방식별 추천 공식 적용</a:t>
+            </a:r>
+          </a:p>
+        </p:txBody>
+      </p:sp>
+      <p:sp>
+        <p:nvSpPr>
+          <p:cNvPr id="27" name="TextBox 26"/>
+          <p:cNvSpPr txBox="1"/>
+          <p:nvPr/>
+        </p:nvSpPr>
+        <p:spPr>
+          <a:xfrm>
+            <a:off x="4617720" y="2029968"/>
+            <a:ext cx="3474720" cy="347472"/>
+          </a:xfrm>
+          <a:prstGeom prst="rect">
+            <a:avLst/>
+          </a:prstGeom>
+          <a:noFill/>
+        </p:spPr>
+        <p:txBody>
+          <a:bodyPr wrap="square">
+            <a:spAutoFit/>
+          </a:bodyPr>
+          <a:lstStyle/>
+          <a:p>
+            <a:pPr algn="l"/>
+            <a:r>
+              <a:rPr sz="1100" b="1">
+                <a:solidFill>
+                  <a:srgbClr val="58A6FF"/>
+                </a:solidFill>
+              </a:rPr>
+              <a:t>데이터 기반 (9가지)</a:t>
+            </a:r>
+          </a:p>
+        </p:txBody>
+      </p:sp>
+      <p:sp>
+        <p:nvSpPr>
+          <p:cNvPr id="28" name="TextBox 27"/>
+          <p:cNvSpPr txBox="1"/>
+          <p:nvPr/>
+        </p:nvSpPr>
+        <p:spPr>
+          <a:xfrm>
+            <a:off x="4617720" y="2414016"/>
+            <a:ext cx="3474720" cy="347472"/>
+          </a:xfrm>
+          <a:prstGeom prst="rect">
+            <a:avLst/>
+          </a:prstGeom>
+          <a:noFill/>
+        </p:spPr>
+        <p:txBody>
+          <a:bodyPr wrap="square">
+            <a:spAutoFit/>
+          </a:bodyPr>
+          <a:lstStyle/>
+          <a:p>
+            <a:pPr algn="l"/>
+            <a:r>
+              <a:rPr sz="1100" b="0">
+                <a:solidFill>
+                  <a:srgbClr val="8B949E"/>
+                </a:solidFill>
+              </a:rPr>
+              <a:t>• 실제 σ를 계산에 활용</a:t>
+            </a:r>
+          </a:p>
+        </p:txBody>
+      </p:sp>
+      <p:sp>
+        <p:nvSpPr>
+          <p:cNvPr id="29" name="TextBox 28"/>
+          <p:cNvSpPr txBox="1"/>
+          <p:nvPr/>
+        </p:nvSpPr>
+        <p:spPr>
+          <a:xfrm>
+            <a:off x="4617720" y="2798064"/>
+            <a:ext cx="3474720" cy="347472"/>
+          </a:xfrm>
+          <a:prstGeom prst="rect">
+            <a:avLst/>
+          </a:prstGeom>
+          <a:noFill/>
+        </p:spPr>
+        <p:txBody>
+          <a:bodyPr wrap="square">
+            <a:spAutoFit/>
+          </a:bodyPr>
+          <a:lstStyle/>
+          <a:p>
+            <a:pPr algn="l"/>
+            <a:r>
+              <a:rPr sz="1100" b="0">
+                <a:solidFill>
+                  <a:srgbClr val="8B949E"/>
+                </a:solidFill>
+              </a:rPr>
+              <a:t>• 데이터 스케일에 자동 맞춤</a:t>
+            </a:r>
+          </a:p>
+        </p:txBody>
+      </p:sp>
+      <p:sp>
+        <p:nvSpPr>
+          <p:cNvPr id="30" name="TextBox 29"/>
+          <p:cNvSpPr txBox="1"/>
+          <p:nvPr/>
+        </p:nvSpPr>
+        <p:spPr>
+          <a:xfrm>
+            <a:off x="4617720" y="3182112"/>
+            <a:ext cx="3474720" cy="347472"/>
+          </a:xfrm>
+          <a:prstGeom prst="rect">
+            <a:avLst/>
+          </a:prstGeom>
+          <a:noFill/>
+        </p:spPr>
+        <p:txBody>
+          <a:bodyPr wrap="square">
+            <a:spAutoFit/>
+          </a:bodyPr>
+          <a:lstStyle/>
+          <a:p>
+            <a:pPr algn="l"/>
+            <a:r>
+              <a:rPr sz="1100" b="0">
+                <a:solidFill>
+                  <a:srgbClr val="C9D1D9"/>
+                </a:solidFill>
+              </a:rPr>
+              <a:t>예) ① 절대값 → 내 데이터 σ × 3</a:t>
+            </a:r>
+          </a:p>
+        </p:txBody>
+      </p:sp>
+      <p:sp>
+        <p:nvSpPr>
+          <p:cNvPr id="31" name="TextBox 30"/>
+          <p:cNvSpPr txBox="1"/>
+          <p:nvPr/>
+        </p:nvSpPr>
+        <p:spPr>
+          <a:xfrm>
+            <a:off x="4617720" y="3566160"/>
+            <a:ext cx="3474720" cy="347472"/>
+          </a:xfrm>
+          <a:prstGeom prst="rect">
+            <a:avLst/>
+          </a:prstGeom>
+          <a:noFill/>
+        </p:spPr>
+        <p:txBody>
+          <a:bodyPr wrap="square">
+            <a:spAutoFit/>
+          </a:bodyPr>
+          <a:lstStyle/>
+          <a:p>
+            <a:pPr algn="l"/>
+            <a:r>
+              <a:rPr sz="1100" b="0">
+                <a:solidFill>
+                  <a:srgbClr val="C9D1D9"/>
+                </a:solidFill>
+              </a:rPr>
+              <a:t>예) ③ 변화율% → (σ/μ) × 300</a:t>
+            </a:r>
+          </a:p>
+        </p:txBody>
+      </p:sp>
+      <p:sp>
+        <p:nvSpPr>
+          <p:cNvPr id="32" name="TextBox 31"/>
+          <p:cNvSpPr txBox="1"/>
+          <p:nvPr/>
+        </p:nvSpPr>
+        <p:spPr>
+          <a:xfrm>
+            <a:off x="4617720" y="3950208"/>
+            <a:ext cx="3474720" cy="347472"/>
+          </a:xfrm>
+          <a:prstGeom prst="rect">
+            <a:avLst/>
+          </a:prstGeom>
+          <a:noFill/>
+        </p:spPr>
+        <p:txBody>
+          <a:bodyPr wrap="square">
+            <a:spAutoFit/>
+          </a:bodyPr>
+          <a:lstStyle/>
+          <a:p>
+            <a:pPr algn="l"/>
+            <a:r>
+              <a:rPr sz="1100" b="0">
+                <a:solidFill>
+                  <a:srgbClr val="C9D1D9"/>
+                </a:solidFill>
+              </a:rPr>
+              <a:t>예) ⑦ EWMA → 내 데이터 σ × 3</a:t>
+            </a:r>
+          </a:p>
+        </p:txBody>
+      </p:sp>
+      <p:sp>
+        <p:nvSpPr>
+          <p:cNvPr id="33" name="TextBox 32"/>
+          <p:cNvSpPr txBox="1"/>
+          <p:nvPr/>
+        </p:nvSpPr>
+        <p:spPr>
+          <a:xfrm>
+            <a:off x="8275320" y="2029968"/>
+            <a:ext cx="3474720" cy="347472"/>
+          </a:xfrm>
+          <a:prstGeom prst="rect">
+            <a:avLst/>
+          </a:prstGeom>
+          <a:noFill/>
+        </p:spPr>
+        <p:txBody>
+          <a:bodyPr wrap="square">
+            <a:spAutoFit/>
+          </a:bodyPr>
+          <a:lstStyle/>
+          <a:p>
+            <a:pPr algn="l"/>
+            <a:r>
+              <a:rPr sz="1100" b="1">
+                <a:solidFill>
+                  <a:srgbClr val="E3B341"/>
+                </a:solidFill>
+              </a:rPr>
+              <a:t>이론 고정값 (14가지)</a:t>
+            </a:r>
+          </a:p>
+        </p:txBody>
+      </p:sp>
+      <p:sp>
+        <p:nvSpPr>
+          <p:cNvPr id="34" name="TextBox 33"/>
+          <p:cNvSpPr txBox="1"/>
+          <p:nvPr/>
+        </p:nvSpPr>
+        <p:spPr>
+          <a:xfrm>
+            <a:off x="8275320" y="2414016"/>
+            <a:ext cx="3474720" cy="347472"/>
+          </a:xfrm>
+          <a:prstGeom prst="rect">
+            <a:avLst/>
+          </a:prstGeom>
+          <a:noFill/>
+        </p:spPr>
+        <p:txBody>
+          <a:bodyPr wrap="square">
+            <a:spAutoFit/>
+          </a:bodyPr>
+          <a:lstStyle/>
+          <a:p>
+            <a:pPr algn="l"/>
+            <a:r>
+              <a:rPr sz="1100" b="0">
+                <a:solidFill>
+                  <a:srgbClr val="8B949E"/>
+                </a:solidFill>
+              </a:rPr>
+              <a:t>• 데이터와 무관하게 항상 동일</a:t>
+            </a:r>
+          </a:p>
+        </p:txBody>
+      </p:sp>
+      <p:sp>
+        <p:nvSpPr>
+          <p:cNvPr id="35" name="TextBox 34"/>
+          <p:cNvSpPr txBox="1"/>
+          <p:nvPr/>
+        </p:nvSpPr>
+        <p:spPr>
+          <a:xfrm>
+            <a:off x="8275320" y="2798064"/>
+            <a:ext cx="3474720" cy="347472"/>
+          </a:xfrm>
+          <a:prstGeom prst="rect">
+            <a:avLst/>
+          </a:prstGeom>
+          <a:noFill/>
+        </p:spPr>
+        <p:txBody>
+          <a:bodyPr wrap="square">
+            <a:spAutoFit/>
+          </a:bodyPr>
+          <a:lstStyle/>
+          <a:p>
+            <a:pPr algn="l"/>
+            <a:r>
+              <a:rPr sz="1100" b="0">
+                <a:solidFill>
+                  <a:srgbClr val="8B949E"/>
+                </a:solidFill>
+              </a:rPr>
+              <a:t>• 국제 표준·SPC 이론값 반환</a:t>
+            </a:r>
+          </a:p>
+        </p:txBody>
+      </p:sp>
+      <p:sp>
+        <p:nvSpPr>
+          <p:cNvPr id="36" name="TextBox 35"/>
+          <p:cNvSpPr txBox="1"/>
+          <p:nvPr/>
+        </p:nvSpPr>
+        <p:spPr>
+          <a:xfrm>
+            <a:off x="8275320" y="3182112"/>
+            <a:ext cx="3474720" cy="347472"/>
+          </a:xfrm>
+          <a:prstGeom prst="rect">
+            <a:avLst/>
+          </a:prstGeom>
+          <a:noFill/>
+        </p:spPr>
+        <p:txBody>
+          <a:bodyPr wrap="square">
+            <a:spAutoFit/>
+          </a:bodyPr>
+          <a:lstStyle/>
+          <a:p>
+            <a:pPr algn="l"/>
+            <a:r>
+              <a:rPr sz="1100" b="0">
+                <a:solidFill>
+                  <a:srgbClr val="C9D1D9"/>
+                </a:solidFill>
+              </a:rPr>
+              <a:t>예) ② σ 배수 → 항상 3</a:t>
+            </a:r>
+          </a:p>
+        </p:txBody>
+      </p:sp>
+      <p:sp>
+        <p:nvSpPr>
+          <p:cNvPr id="37" name="TextBox 36"/>
+          <p:cNvSpPr txBox="1"/>
+          <p:nvPr/>
+        </p:nvSpPr>
+        <p:spPr>
+          <a:xfrm>
+            <a:off x="8275320" y="3566160"/>
+            <a:ext cx="3474720" cy="347472"/>
+          </a:xfrm>
+          <a:prstGeom prst="rect">
+            <a:avLst/>
+          </a:prstGeom>
+          <a:noFill/>
+        </p:spPr>
+        <p:txBody>
+          <a:bodyPr wrap="square">
+            <a:spAutoFit/>
+          </a:bodyPr>
+          <a:lstStyle/>
+          <a:p>
+            <a:pPr algn="l"/>
+            <a:r>
+              <a:rPr sz="1100" b="0">
+                <a:solidFill>
+                  <a:srgbClr val="C9D1D9"/>
+                </a:solidFill>
+              </a:rPr>
+              <a:t>예) ⑫ IQR → 항상 1.5</a:t>
+            </a:r>
+          </a:p>
+        </p:txBody>
+      </p:sp>
+      <p:sp>
+        <p:nvSpPr>
+          <p:cNvPr id="38" name="TextBox 37"/>
+          <p:cNvSpPr txBox="1"/>
+          <p:nvPr/>
+        </p:nvSpPr>
+        <p:spPr>
+          <a:xfrm>
+            <a:off x="8275320" y="3950208"/>
+            <a:ext cx="3474720" cy="347472"/>
+          </a:xfrm>
+          <a:prstGeom prst="rect">
+            <a:avLst/>
+          </a:prstGeom>
+          <a:noFill/>
+        </p:spPr>
+        <p:txBody>
+          <a:bodyPr wrap="square">
+            <a:spAutoFit/>
+          </a:bodyPr>
+          <a:lstStyle/>
+          <a:p>
+            <a:pPr algn="l"/>
+            <a:r>
+              <a:rPr sz="1100" b="0">
+                <a:solidFill>
+                  <a:srgbClr val="C9D1D9"/>
+                </a:solidFill>
+              </a:rPr>
+              <a:t>예) ㉑ Cpk → 항상 1.33</a:t>
+            </a:r>
+          </a:p>
+        </p:txBody>
+      </p:sp>
+      <p:sp>
+        <p:nvSpPr>
+          <p:cNvPr id="39" name="Rectangle 38"/>
+          <p:cNvSpPr/>
+          <p:nvPr/>
+        </p:nvSpPr>
+        <p:spPr>
+          <a:xfrm>
+            <a:off x="6492240" y="2011680"/>
+            <a:ext cx="18288" cy="2286000"/>
+          </a:xfrm>
+          <a:prstGeom prst="rect">
+            <a:avLst/>
+          </a:prstGeom>
+          <a:solidFill>
+            <a:srgbClr val="30363D"/>
+          </a:solidFill>
+          <a:ln>
+            <a:noFill/>
+          </a:ln>
+          <a:effectLst/>
+        </p:spPr>
+        <p:style>
+          <a:lnRef idx="1">
+            <a:schemeClr val="accent1"/>
+          </a:lnRef>
+          <a:fillRef idx="3">
+            <a:schemeClr val="accent1"/>
+          </a:fillRef>
+          <a:effectRef idx="2">
+            <a:schemeClr val="accent1"/>
+          </a:effectRef>
+          <a:fontRef idx="minor">
+            <a:schemeClr val="lt1"/>
+          </a:fontRef>
+        </p:style>
+        <p:txBody>
+          <a:bodyPr rtlCol="0" anchor="ctr"/>
+          <a:lstStyle/>
+          <a:p>
+            <a:pPr algn="ctr"/>
+          </a:p>
+        </p:txBody>
+      </p:sp>
+      <p:sp>
+        <p:nvSpPr>
+          <p:cNvPr id="40" name="Rectangle 39"/>
+          <p:cNvSpPr/>
+          <p:nvPr/>
+        </p:nvSpPr>
+        <p:spPr>
+          <a:xfrm>
+            <a:off x="228600" y="3977639"/>
+            <a:ext cx="11731752" cy="502920"/>
+          </a:xfrm>
+          <a:prstGeom prst="rect">
+            <a:avLst/>
+          </a:prstGeom>
+          <a:solidFill>
+            <a:srgbClr val="162416"/>
+          </a:solidFill>
+          <a:ln w="12700">
+            <a:solidFill>
+              <a:srgbClr val="3FB950"/>
+            </a:solidFill>
+          </a:ln>
+          <a:effectLst/>
+        </p:spPr>
+        <p:style>
+          <a:lnRef idx="1">
+            <a:schemeClr val="accent1"/>
+          </a:lnRef>
+          <a:fillRef idx="3">
+            <a:schemeClr val="accent1"/>
+          </a:fillRef>
+          <a:effectRef idx="2">
+            <a:schemeClr val="accent1"/>
+          </a:effectRef>
+          <a:fontRef idx="minor">
+            <a:schemeClr val="lt1"/>
+          </a:fontRef>
+        </p:style>
+        <p:txBody>
+          <a:bodyPr rtlCol="0" anchor="ctr"/>
+          <a:lstStyle/>
+          <a:p>
+            <a:pPr algn="ctr"/>
+          </a:p>
+        </p:txBody>
+      </p:sp>
+      <p:sp>
+        <p:nvSpPr>
+          <p:cNvPr id="41" name="TextBox 40"/>
+          <p:cNvSpPr txBox="1"/>
+          <p:nvPr/>
+        </p:nvSpPr>
+        <p:spPr>
+          <a:xfrm>
+            <a:off x="384048" y="4005072"/>
+            <a:ext cx="11411712" cy="438912"/>
+          </a:xfrm>
+          <a:prstGeom prst="rect">
+            <a:avLst/>
+          </a:prstGeom>
+          <a:noFill/>
+        </p:spPr>
+        <p:txBody>
+          <a:bodyPr wrap="square">
+            <a:spAutoFit/>
+          </a:bodyPr>
+          <a:lstStyle/>
+          <a:p>
+            <a:pPr algn="l"/>
+            <a:r>
+              <a:rPr sz="1200" b="0">
+                <a:solidFill>
+                  <a:srgbClr val="3FB950"/>
+                </a:solidFill>
+              </a:rPr>
+              <a:t>✅  결과:  임계값 입력란에 자동 입력  +  토스트 메시지로 추천 근거 표시  (예: 추천 임계값: 6.24  (3σ 기준))</a:t>
+            </a:r>
+          </a:p>
+        </p:txBody>
+      </p:sp>
+      <p:sp>
+        <p:nvSpPr>
+          <p:cNvPr id="42" name="Rectangle 41"/>
+          <p:cNvSpPr/>
+          <p:nvPr/>
+        </p:nvSpPr>
+        <p:spPr>
+          <a:xfrm>
+            <a:off x="228600" y="4617720"/>
+            <a:ext cx="11731752" cy="1664208"/>
+          </a:xfrm>
+          <a:prstGeom prst="rect">
+            <a:avLst/>
+          </a:prstGeom>
+          <a:solidFill>
+            <a:srgbClr val="13131A"/>
+          </a:solidFill>
+          <a:ln w="12700">
+            <a:solidFill>
+              <a:srgbClr val="8B949E"/>
+            </a:solidFill>
+          </a:ln>
+          <a:effectLst/>
+        </p:spPr>
+        <p:style>
+          <a:lnRef idx="1">
+            <a:schemeClr val="accent1"/>
+          </a:lnRef>
+          <a:fillRef idx="3">
+            <a:schemeClr val="accent1"/>
+          </a:fillRef>
+          <a:effectRef idx="2">
+            <a:schemeClr val="accent1"/>
+          </a:effectRef>
+          <a:fontRef idx="minor">
+            <a:schemeClr val="lt1"/>
+          </a:fontRef>
+        </p:style>
+        <p:txBody>
+          <a:bodyPr rtlCol="0" anchor="ctr"/>
+          <a:lstStyle/>
+          <a:p>
+            <a:pPr algn="ctr"/>
+          </a:p>
+        </p:txBody>
+      </p:sp>
+      <p:sp>
+        <p:nvSpPr>
+          <p:cNvPr id="43" name="TextBox 42"/>
+          <p:cNvSpPr txBox="1"/>
+          <p:nvPr/>
+        </p:nvSpPr>
+        <p:spPr>
+          <a:xfrm>
+            <a:off x="384048" y="4663440"/>
+            <a:ext cx="3657600" cy="274320"/>
+          </a:xfrm>
+          <a:prstGeom prst="rect">
+            <a:avLst/>
+          </a:prstGeom>
+          <a:noFill/>
+        </p:spPr>
+        <p:txBody>
+          <a:bodyPr wrap="square">
+            <a:spAutoFit/>
+          </a:bodyPr>
+          <a:lstStyle/>
+          <a:p>
+            <a:pPr algn="l"/>
+            <a:r>
+              <a:rPr sz="1100" b="1">
+                <a:solidFill>
+                  <a:srgbClr val="8B949E"/>
+                </a:solidFill>
+              </a:rPr>
+              <a:t>📋  방식별 추천 공식 요약</a:t>
+            </a:r>
+          </a:p>
+        </p:txBody>
+      </p:sp>
+      <p:sp>
+        <p:nvSpPr>
+          <p:cNvPr id="44" name="TextBox 43"/>
+          <p:cNvSpPr txBox="1"/>
+          <p:nvPr/>
+        </p:nvSpPr>
+        <p:spPr>
+          <a:xfrm>
+            <a:off x="384048" y="4983480"/>
+            <a:ext cx="5303520" cy="274320"/>
+          </a:xfrm>
+          <a:prstGeom prst="rect">
+            <a:avLst/>
+          </a:prstGeom>
+          <a:noFill/>
+        </p:spPr>
+        <p:txBody>
+          <a:bodyPr wrap="square">
+            <a:spAutoFit/>
+          </a:bodyPr>
+          <a:lstStyle/>
+          <a:p>
+            <a:pPr algn="l"/>
+            <a:r>
+              <a:rPr sz="1050" b="0">
+                <a:solidFill>
+                  <a:srgbClr val="C9D1D9"/>
+                </a:solidFill>
+              </a:rPr>
+              <a:t>• ① 절대값 차이 → 데이터 σ × 3</a:t>
+            </a:r>
+          </a:p>
+        </p:txBody>
+      </p:sp>
+      <p:sp>
+        <p:nvSpPr>
+          <p:cNvPr id="45" name="TextBox 44"/>
+          <p:cNvSpPr txBox="1"/>
+          <p:nvPr/>
+        </p:nvSpPr>
+        <p:spPr>
+          <a:xfrm>
+            <a:off x="6035040" y="4983480"/>
+            <a:ext cx="5943600" cy="274320"/>
+          </a:xfrm>
+          <a:prstGeom prst="rect">
+            <a:avLst/>
+          </a:prstGeom>
+          <a:noFill/>
+        </p:spPr>
+        <p:txBody>
+          <a:bodyPr wrap="square">
+            <a:spAutoFit/>
+          </a:bodyPr>
+          <a:lstStyle/>
+          <a:p>
+            <a:pPr algn="l"/>
+            <a:r>
+              <a:rPr sz="1050" b="0">
+                <a:solidFill>
+                  <a:srgbClr val="C9D1D9"/>
+                </a:solidFill>
+              </a:rPr>
+              <a:t>• ⑰ t-검정  → σ × 3</a:t>
+            </a:r>
+          </a:p>
+        </p:txBody>
+      </p:sp>
+      <p:sp>
+        <p:nvSpPr>
+          <p:cNvPr id="46" name="TextBox 45"/>
+          <p:cNvSpPr txBox="1"/>
+          <p:nvPr/>
+        </p:nvSpPr>
+        <p:spPr>
+          <a:xfrm>
+            <a:off x="384048" y="5276088"/>
+            <a:ext cx="5303520" cy="274320"/>
+          </a:xfrm>
+          <a:prstGeom prst="rect">
+            <a:avLst/>
+          </a:prstGeom>
+          <a:noFill/>
+        </p:spPr>
+        <p:txBody>
+          <a:bodyPr wrap="square">
+            <a:spAutoFit/>
+          </a:bodyPr>
+          <a:lstStyle/>
+          <a:p>
+            <a:pPr algn="l"/>
+            <a:r>
+              <a:rPr sz="1050" b="0">
+                <a:solidFill>
+                  <a:srgbClr val="C9D1D9"/>
+                </a:solidFill>
+              </a:rPr>
+              <a:t>• ③ 변화율%   → (σ/μ) × 300</a:t>
+            </a:r>
+          </a:p>
+        </p:txBody>
+      </p:sp>
+      <p:sp>
+        <p:nvSpPr>
+          <p:cNvPr id="47" name="TextBox 46"/>
+          <p:cNvSpPr txBox="1"/>
+          <p:nvPr/>
+        </p:nvSpPr>
+        <p:spPr>
+          <a:xfrm>
+            <a:off x="6035040" y="5276088"/>
+            <a:ext cx="5943600" cy="274320"/>
+          </a:xfrm>
+          <a:prstGeom prst="rect">
+            <a:avLst/>
+          </a:prstGeom>
+          <a:noFill/>
+        </p:spPr>
+        <p:txBody>
+          <a:bodyPr wrap="square">
+            <a:spAutoFit/>
+          </a:bodyPr>
+          <a:lstStyle/>
+          <a:p>
+            <a:pPr algn="l"/>
+            <a:r>
+              <a:rPr sz="1050" b="0">
+                <a:solidFill>
+                  <a:srgbClr val="C9D1D9"/>
+                </a:solidFill>
+              </a:rPr>
+              <a:t>• ㉓ CV Shift → (σ/μ) × 30%</a:t>
+            </a:r>
+          </a:p>
+        </p:txBody>
+      </p:sp>
+      <p:sp>
+        <p:nvSpPr>
+          <p:cNvPr id="48" name="TextBox 47"/>
+          <p:cNvSpPr txBox="1"/>
+          <p:nvPr/>
+        </p:nvSpPr>
+        <p:spPr>
+          <a:xfrm>
+            <a:off x="384048" y="5568696"/>
+            <a:ext cx="5303520" cy="274320"/>
+          </a:xfrm>
+          <a:prstGeom prst="rect">
+            <a:avLst/>
+          </a:prstGeom>
+          <a:noFill/>
+        </p:spPr>
+        <p:txBody>
+          <a:bodyPr wrap="square">
+            <a:spAutoFit/>
+          </a:bodyPr>
+          <a:lstStyle/>
+          <a:p>
+            <a:pPr algn="l"/>
+            <a:r>
+              <a:rPr sz="1050" b="0">
+                <a:solidFill>
+                  <a:srgbClr val="C9D1D9"/>
+                </a:solidFill>
+              </a:rPr>
+              <a:t>• ④⑤⑥ 기울기·일별 → σ × 2</a:t>
+            </a:r>
+          </a:p>
+        </p:txBody>
+      </p:sp>
+      <p:sp>
+        <p:nvSpPr>
+          <p:cNvPr id="49" name="TextBox 48"/>
+          <p:cNvSpPr txBox="1"/>
+          <p:nvPr/>
+        </p:nvSpPr>
+        <p:spPr>
+          <a:xfrm>
+            <a:off x="6035040" y="5568696"/>
+            <a:ext cx="5943600" cy="274320"/>
+          </a:xfrm>
+          <a:prstGeom prst="rect">
+            <a:avLst/>
+          </a:prstGeom>
+          <a:noFill/>
+        </p:spPr>
+        <p:txBody>
+          <a:bodyPr wrap="square">
+            <a:spAutoFit/>
+          </a:bodyPr>
+          <a:lstStyle/>
+          <a:p>
+            <a:pPr algn="l"/>
+            <a:r>
+              <a:rPr sz="1050" b="0">
+                <a:solidFill>
+                  <a:srgbClr val="C9D1D9"/>
+                </a:solidFill>
+              </a:rPr>
+              <a:t>• ⑭⑮⑯ 반도체 특화 → σ × 2</a:t>
+            </a:r>
+          </a:p>
+        </p:txBody>
+      </p:sp>
+      <p:sp>
+        <p:nvSpPr>
+          <p:cNvPr id="50" name="TextBox 49"/>
+          <p:cNvSpPr txBox="1"/>
+          <p:nvPr/>
+        </p:nvSpPr>
+        <p:spPr>
+          <a:xfrm>
+            <a:off x="384048" y="5861304"/>
+            <a:ext cx="5303520" cy="274320"/>
+          </a:xfrm>
+          <a:prstGeom prst="rect">
+            <a:avLst/>
+          </a:prstGeom>
+          <a:noFill/>
+        </p:spPr>
+        <p:txBody>
+          <a:bodyPr wrap="square">
+            <a:spAutoFit/>
+          </a:bodyPr>
+          <a:lstStyle/>
+          <a:p>
+            <a:pPr algn="l"/>
+            <a:r>
+              <a:rPr sz="1050" b="0">
+                <a:solidFill>
+                  <a:srgbClr val="C9D1D9"/>
+                </a:solidFill>
+              </a:rPr>
+              <a:t>• ⑦ EWMA   → σ × 3  (관리한계)</a:t>
+            </a:r>
+          </a:p>
+        </p:txBody>
+      </p:sp>
+      <p:sp>
+        <p:nvSpPr>
+          <p:cNvPr id="51" name="TextBox 50"/>
+          <p:cNvSpPr txBox="1"/>
+          <p:nvPr/>
+        </p:nvSpPr>
+        <p:spPr>
+          <a:xfrm>
+            <a:off x="6035040" y="5861304"/>
+            <a:ext cx="5943600" cy="274320"/>
+          </a:xfrm>
+          <a:prstGeom prst="rect">
+            <a:avLst/>
+          </a:prstGeom>
+          <a:noFill/>
+        </p:spPr>
+        <p:txBody>
+          <a:bodyPr wrap="square">
+            <a:spAutoFit/>
+          </a:bodyPr>
+          <a:lstStyle/>
+          <a:p>
+            <a:pPr algn="l"/>
+            <a:r>
+              <a:rPr sz="1050" b="0">
+                <a:solidFill>
+                  <a:srgbClr val="C9D1D9"/>
+                </a:solidFill>
+              </a:rPr>
+              <a:t>• ② σ배수·⑨런·⑩트렌드·⑪SPC·⑫IQR·⑬ModZ</a:t>
+            </a:r>
+          </a:p>
+        </p:txBody>
+      </p:sp>
+      <p:sp>
+        <p:nvSpPr>
+          <p:cNvPr id="52" name="TextBox 51"/>
+          <p:cNvSpPr txBox="1"/>
+          <p:nvPr/>
+        </p:nvSpPr>
+        <p:spPr>
+          <a:xfrm>
+            <a:off x="384048" y="6153912"/>
+            <a:ext cx="5303520" cy="274320"/>
+          </a:xfrm>
+          <a:prstGeom prst="rect">
+            <a:avLst/>
+          </a:prstGeom>
+          <a:noFill/>
+        </p:spPr>
+        <p:txBody>
+          <a:bodyPr wrap="square">
+            <a:spAutoFit/>
+          </a:bodyPr>
+          <a:lstStyle/>
+          <a:p>
+            <a:pPr algn="l"/>
+            <a:r>
+              <a:rPr sz="1050" b="0">
+                <a:solidFill>
+                  <a:srgbClr val="C9D1D9"/>
+                </a:solidFill>
+              </a:rPr>
+              <a:t>• ⑧ CUSUM  → σ × 5  (결정 임계 H)</a:t>
+            </a:r>
+          </a:p>
+        </p:txBody>
+      </p:sp>
+      <p:sp>
+        <p:nvSpPr>
+          <p:cNvPr id="53" name="TextBox 52"/>
+          <p:cNvSpPr txBox="1"/>
+          <p:nvPr/>
+        </p:nvSpPr>
+        <p:spPr>
+          <a:xfrm>
+            <a:off x="6035040" y="6153912"/>
+            <a:ext cx="5943600" cy="274320"/>
+          </a:xfrm>
+          <a:prstGeom prst="rect">
+            <a:avLst/>
+          </a:prstGeom>
+          <a:noFill/>
+        </p:spPr>
+        <p:txBody>
+          <a:bodyPr wrap="square">
+            <a:spAutoFit/>
+          </a:bodyPr>
+          <a:lstStyle/>
+          <a:p>
+            <a:pPr algn="l"/>
+            <a:r>
+              <a:rPr sz="1050" b="0">
+                <a:solidFill>
+                  <a:srgbClr val="C9D1D9"/>
+                </a:solidFill>
+              </a:rPr>
+              <a:t>• ⑱F검정·⑲Rolling·⑳Fleet·㉑Cpk·㉒Nelson → 고정값</a:t>
+            </a:r>
+          </a:p>
+        </p:txBody>
+      </p:sp>
+      <p:sp>
+        <p:nvSpPr>
+          <p:cNvPr id="54" name="Rectangle 53"/>
+          <p:cNvSpPr/>
+          <p:nvPr/>
+        </p:nvSpPr>
+        <p:spPr>
+          <a:xfrm>
+            <a:off x="0" y="6803136"/>
+            <a:ext cx="12188952" cy="54864"/>
+          </a:xfrm>
+          <a:prstGeom prst="rect">
+            <a:avLst/>
+          </a:prstGeom>
+          <a:solidFill>
+            <a:srgbClr val="E3B341"/>
+          </a:solidFill>
+          <a:ln>
+            <a:noFill/>
+          </a:ln>
+          <a:effectLst/>
+        </p:spPr>
+        <p:style>
+          <a:lnRef idx="1">
+            <a:schemeClr val="accent1"/>
+          </a:lnRef>
+          <a:fillRef idx="3">
+            <a:schemeClr val="accent1"/>
+          </a:fillRef>
+          <a:effectRef idx="2">
+            <a:schemeClr val="accent1"/>
+          </a:effectRef>
+          <a:fontRef idx="minor">
+            <a:schemeClr val="lt1"/>
+          </a:fontRef>
+        </p:style>
+        <p:txBody>
+          <a:bodyPr rtlCol="0" anchor="ctr"/>
+          <a:lstStyle/>
+          <a:p>
+            <a:pPr algn="ctr"/>
+          </a:p>
+        </p:txBody>
+      </p:sp>
+      <p:sp>
+        <p:nvSpPr>
+          <p:cNvPr id="55" name="TextBox 54"/>
+          <p:cNvSpPr txBox="1"/>
+          <p:nvPr/>
+        </p:nvSpPr>
+        <p:spPr>
+          <a:xfrm>
+            <a:off x="10543032" y="6510528"/>
+            <a:ext cx="1371600" cy="256032"/>
+          </a:xfrm>
+          <a:prstGeom prst="rect">
+            <a:avLst/>
+          </a:prstGeom>
+          <a:noFill/>
+        </p:spPr>
+        <p:txBody>
+          <a:bodyPr wrap="square">
+            <a:spAutoFit/>
+          </a:bodyPr>
+          <a:lstStyle/>
+          <a:p>
+            <a:pPr algn="r"/>
+            <a:r>
+              <a:rPr sz="1000" b="0">
+                <a:solidFill>
+                  <a:srgbClr val="8B949E"/>
+                </a:solidFill>
+              </a:rPr>
+              <a:t>부록 1 / 2</a:t>
+            </a:r>
+          </a:p>
+        </p:txBody>
+      </p:sp>
+    </p:spTree>
+  </p:cSld>
+  <p:clrMapOvr>
+    <a:masterClrMapping/>
+  </p:clrMapOvr>
+</p:sld>
+</file>
+
+<file path=ppt/slides/slide27.xml><?xml version="1.0" encoding="utf-8"?>
+<p:sld xmlns:a="http://schemas.openxmlformats.org/drawingml/2006/main" xmlns:p="http://schemas.openxmlformats.org/presentationml/2006/main" xmlns:r="http://schemas.openxmlformats.org/officeDocument/2006/relationships">
+  <p:cSld>
+    <p:spTree>
+      <p:nvGrpSpPr>
+        <p:cNvPr id="1" name=""/>
+        <p:cNvGrpSpPr/>
+        <p:nvPr/>
+      </p:nvGrpSpPr>
+      <p:grpSpPr/>
+      <p:sp>
+        <p:nvSpPr>
+          <p:cNvPr id="2" name="Rectangle 1"/>
+          <p:cNvSpPr/>
+          <p:nvPr/>
+        </p:nvSpPr>
+        <p:spPr>
+          <a:xfrm>
+            <a:off x="0" y="0"/>
+            <a:ext cx="12188952" cy="6858000"/>
+          </a:xfrm>
+          <a:prstGeom prst="rect">
+            <a:avLst/>
+          </a:prstGeom>
+          <a:solidFill>
+            <a:srgbClr val="0D1117"/>
+          </a:solidFill>
+          <a:ln>
+            <a:noFill/>
+          </a:ln>
+          <a:effectLst/>
+        </p:spPr>
+        <p:style>
+          <a:lnRef idx="1">
+            <a:schemeClr val="accent1"/>
+          </a:lnRef>
+          <a:fillRef idx="3">
+            <a:schemeClr val="accent1"/>
+          </a:fillRef>
+          <a:effectRef idx="2">
+            <a:schemeClr val="accent1"/>
+          </a:effectRef>
+          <a:fontRef idx="minor">
+            <a:schemeClr val="lt1"/>
+          </a:fontRef>
+        </p:style>
+        <p:txBody>
+          <a:bodyPr rtlCol="0" anchor="ctr"/>
+          <a:lstStyle/>
+          <a:p>
+            <a:pPr algn="ctr"/>
+          </a:p>
+        </p:txBody>
+      </p:sp>
+      <p:sp>
+        <p:nvSpPr>
+          <p:cNvPr id="3" name="Rectangle 2"/>
+          <p:cNvSpPr/>
+          <p:nvPr/>
+        </p:nvSpPr>
+        <p:spPr>
+          <a:xfrm>
+            <a:off x="0" y="0"/>
+            <a:ext cx="12188952" cy="73152"/>
+          </a:xfrm>
+          <a:prstGeom prst="rect">
+            <a:avLst/>
+          </a:prstGeom>
+          <a:solidFill>
+            <a:srgbClr val="58A6FF"/>
+          </a:solidFill>
+          <a:ln>
+            <a:noFill/>
+          </a:ln>
+          <a:effectLst/>
+        </p:spPr>
+        <p:style>
+          <a:lnRef idx="1">
+            <a:schemeClr val="accent1"/>
+          </a:lnRef>
+          <a:fillRef idx="3">
+            <a:schemeClr val="accent1"/>
+          </a:fillRef>
+          <a:effectRef idx="2">
+            <a:schemeClr val="accent1"/>
+          </a:effectRef>
+          <a:fontRef idx="minor">
+            <a:schemeClr val="lt1"/>
+          </a:fontRef>
+        </p:style>
+        <p:txBody>
+          <a:bodyPr rtlCol="0" anchor="ctr"/>
+          <a:lstStyle/>
+          <a:p>
+            <a:pPr algn="ctr"/>
+          </a:p>
+        </p:txBody>
+      </p:sp>
+      <p:sp>
+        <p:nvSpPr>
+          <p:cNvPr id="4" name="Rectangle 3"/>
+          <p:cNvSpPr/>
+          <p:nvPr/>
+        </p:nvSpPr>
+        <p:spPr>
+          <a:xfrm>
+            <a:off x="0" y="0"/>
+            <a:ext cx="12188952" cy="1005840"/>
+          </a:xfrm>
+          <a:prstGeom prst="rect">
+            <a:avLst/>
+          </a:prstGeom>
+          <a:solidFill>
+            <a:srgbClr val="21262D"/>
+          </a:solidFill>
+          <a:ln>
+            <a:noFill/>
+          </a:ln>
+          <a:effectLst/>
+        </p:spPr>
+        <p:style>
+          <a:lnRef idx="1">
+            <a:schemeClr val="accent1"/>
+          </a:lnRef>
+          <a:fillRef idx="3">
+            <a:schemeClr val="accent1"/>
+          </a:fillRef>
+          <a:effectRef idx="2">
+            <a:schemeClr val="accent1"/>
+          </a:effectRef>
+          <a:fontRef idx="minor">
+            <a:schemeClr val="lt1"/>
+          </a:fontRef>
+        </p:style>
+        <p:txBody>
+          <a:bodyPr rtlCol="0" anchor="ctr"/>
+          <a:lstStyle/>
+          <a:p>
+            <a:pPr algn="ctr"/>
+          </a:p>
+        </p:txBody>
+      </p:sp>
+      <p:sp>
+        <p:nvSpPr>
+          <p:cNvPr id="5" name="Rectangle 4"/>
+          <p:cNvSpPr/>
+          <p:nvPr/>
+        </p:nvSpPr>
+        <p:spPr>
+          <a:xfrm>
+            <a:off x="0" y="960120"/>
+            <a:ext cx="12188952" cy="45720"/>
+          </a:xfrm>
+          <a:prstGeom prst="rect">
+            <a:avLst/>
+          </a:prstGeom>
+          <a:solidFill>
+            <a:srgbClr val="58A6FF"/>
+          </a:solidFill>
+          <a:ln>
+            <a:noFill/>
+          </a:ln>
+          <a:effectLst/>
+        </p:spPr>
+        <p:style>
+          <a:lnRef idx="1">
+            <a:schemeClr val="accent1"/>
+          </a:lnRef>
+          <a:fillRef idx="3">
+            <a:schemeClr val="accent1"/>
+          </a:fillRef>
+          <a:effectRef idx="2">
+            <a:schemeClr val="accent1"/>
+          </a:effectRef>
+          <a:fontRef idx="minor">
+            <a:schemeClr val="lt1"/>
+          </a:fontRef>
+        </p:style>
+        <p:txBody>
+          <a:bodyPr rtlCol="0" anchor="ctr"/>
+          <a:lstStyle/>
+          <a:p>
+            <a:pPr algn="ctr"/>
+          </a:p>
+        </p:txBody>
+      </p:sp>
+      <p:sp>
+        <p:nvSpPr>
+          <p:cNvPr id="6" name="TextBox 5"/>
+          <p:cNvSpPr txBox="1"/>
+          <p:nvPr/>
+        </p:nvSpPr>
+        <p:spPr>
+          <a:xfrm>
+            <a:off x="274320" y="164592"/>
+            <a:ext cx="10972800" cy="548640"/>
+          </a:xfrm>
+          <a:prstGeom prst="rect">
+            <a:avLst/>
+          </a:prstGeom>
+          <a:noFill/>
+        </p:spPr>
+        <p:txBody>
+          <a:bodyPr wrap="square">
+            <a:spAutoFit/>
+          </a:bodyPr>
+          <a:lstStyle/>
+          <a:p>
+            <a:pPr algn="l"/>
+            <a:r>
+              <a:rPr sz="2500" b="1">
+                <a:solidFill>
+                  <a:srgbClr val="FFFFFF"/>
+                </a:solidFill>
+              </a:rPr>
+              <a:t>✨  임계값 추천 — 방식별 상세 비교</a:t>
+            </a:r>
+          </a:p>
+        </p:txBody>
+      </p:sp>
+      <p:sp>
+        <p:nvSpPr>
+          <p:cNvPr id="7" name="TextBox 6"/>
+          <p:cNvSpPr txBox="1"/>
+          <p:nvPr/>
+        </p:nvSpPr>
+        <p:spPr>
+          <a:xfrm>
+            <a:off x="274320" y="685800"/>
+            <a:ext cx="9144000" cy="274320"/>
+          </a:xfrm>
+          <a:prstGeom prst="rect">
+            <a:avLst/>
+          </a:prstGeom>
+          <a:noFill/>
+        </p:spPr>
+        <p:txBody>
+          <a:bodyPr wrap="square">
+            <a:spAutoFit/>
+          </a:bodyPr>
+          <a:lstStyle/>
+          <a:p>
+            <a:pPr algn="l"/>
+            <a:r>
+              <a:rPr sz="1200" b="0">
+                <a:solidFill>
+                  <a:srgbClr val="8B949E"/>
+                </a:solidFill>
+              </a:rPr>
+              <a:t>데이터 기반 추천 vs 이론 고정값 비교</a:t>
+            </a:r>
+          </a:p>
+        </p:txBody>
+      </p:sp>
+      <p:sp>
+        <p:nvSpPr>
+          <p:cNvPr id="8" name="Rectangle 7"/>
+          <p:cNvSpPr/>
+          <p:nvPr/>
+        </p:nvSpPr>
+        <p:spPr>
+          <a:xfrm>
+            <a:off x="201168" y="1097280"/>
+            <a:ext cx="6217920" cy="274320"/>
+          </a:xfrm>
+          <a:prstGeom prst="rect">
+            <a:avLst/>
+          </a:prstGeom>
+          <a:solidFill>
+            <a:srgbClr val="21262D"/>
+          </a:solidFill>
+          <a:ln>
+            <a:noFill/>
+          </a:ln>
+          <a:effectLst/>
+        </p:spPr>
+        <p:style>
+          <a:lnRef idx="1">
+            <a:schemeClr val="accent1"/>
+          </a:lnRef>
+          <a:fillRef idx="3">
+            <a:schemeClr val="accent1"/>
+          </a:fillRef>
+          <a:effectRef idx="2">
+            <a:schemeClr val="accent1"/>
+          </a:effectRef>
+          <a:fontRef idx="minor">
+            <a:schemeClr val="lt1"/>
+          </a:fontRef>
+        </p:style>
+        <p:txBody>
+          <a:bodyPr rtlCol="0" anchor="ctr"/>
+          <a:lstStyle/>
+          <a:p>
+            <a:pPr algn="ctr"/>
+          </a:p>
+        </p:txBody>
+      </p:sp>
+      <p:sp>
+        <p:nvSpPr>
+          <p:cNvPr id="9" name="TextBox 8"/>
+          <p:cNvSpPr txBox="1"/>
+          <p:nvPr/>
+        </p:nvSpPr>
+        <p:spPr>
+          <a:xfrm>
+            <a:off x="274320" y="1115568"/>
+            <a:ext cx="2194560" cy="237744"/>
+          </a:xfrm>
+          <a:prstGeom prst="rect">
+            <a:avLst/>
+          </a:prstGeom>
+          <a:noFill/>
+        </p:spPr>
+        <p:txBody>
+          <a:bodyPr wrap="square">
+            <a:spAutoFit/>
+          </a:bodyPr>
+          <a:lstStyle/>
+          <a:p>
+            <a:pPr algn="l"/>
+            <a:r>
+              <a:rPr sz="1050" b="1">
+                <a:solidFill>
+                  <a:srgbClr val="8B949E"/>
+                </a:solidFill>
+              </a:rPr>
+              <a:t>감지 방식</a:t>
+            </a:r>
+          </a:p>
+        </p:txBody>
+      </p:sp>
+      <p:sp>
+        <p:nvSpPr>
+          <p:cNvPr id="10" name="TextBox 9"/>
+          <p:cNvSpPr txBox="1"/>
+          <p:nvPr/>
+        </p:nvSpPr>
+        <p:spPr>
+          <a:xfrm>
+            <a:off x="2578608" y="1115568"/>
+            <a:ext cx="3200400" cy="237744"/>
+          </a:xfrm>
+          <a:prstGeom prst="rect">
+            <a:avLst/>
+          </a:prstGeom>
+          <a:noFill/>
+        </p:spPr>
+        <p:txBody>
+          <a:bodyPr wrap="square">
+            <a:spAutoFit/>
+          </a:bodyPr>
+          <a:lstStyle/>
+          <a:p>
+            <a:pPr algn="l"/>
+            <a:r>
+              <a:rPr sz="1050" b="1">
+                <a:solidFill>
+                  <a:srgbClr val="8B949E"/>
+                </a:solidFill>
+              </a:rPr>
+              <a:t>추천 공식 / 근거</a:t>
+            </a:r>
+          </a:p>
+        </p:txBody>
+      </p:sp>
+      <p:sp>
+        <p:nvSpPr>
+          <p:cNvPr id="11" name="TextBox 10"/>
+          <p:cNvSpPr txBox="1"/>
+          <p:nvPr/>
+        </p:nvSpPr>
+        <p:spPr>
+          <a:xfrm>
+            <a:off x="5870448" y="1115568"/>
+            <a:ext cx="457200" cy="237744"/>
+          </a:xfrm>
+          <a:prstGeom prst="rect">
+            <a:avLst/>
+          </a:prstGeom>
+          <a:noFill/>
+        </p:spPr>
+        <p:txBody>
+          <a:bodyPr wrap="square">
+            <a:spAutoFit/>
+          </a:bodyPr>
+          <a:lstStyle/>
+          <a:p>
+            <a:pPr algn="l"/>
+            <a:r>
+              <a:rPr sz="1050" b="1">
+                <a:solidFill>
+                  <a:srgbClr val="8B949E"/>
+                </a:solidFill>
+              </a:rPr>
+              <a:t>유형</a:t>
+            </a:r>
+          </a:p>
+        </p:txBody>
+      </p:sp>
+      <p:sp>
+        <p:nvSpPr>
+          <p:cNvPr id="12" name="Rectangle 11"/>
+          <p:cNvSpPr/>
+          <p:nvPr/>
+        </p:nvSpPr>
+        <p:spPr>
+          <a:xfrm>
+            <a:off x="201168" y="1389888"/>
+            <a:ext cx="6217920" cy="224028"/>
+          </a:xfrm>
+          <a:prstGeom prst="rect">
+            <a:avLst/>
+          </a:prstGeom>
+          <a:solidFill>
+            <a:srgbClr val="161B22"/>
+          </a:solidFill>
+          <a:ln>
+            <a:noFill/>
+          </a:ln>
+          <a:effectLst/>
+        </p:spPr>
+        <p:style>
+          <a:lnRef idx="1">
+            <a:schemeClr val="accent1"/>
+          </a:lnRef>
+          <a:fillRef idx="3">
+            <a:schemeClr val="accent1"/>
+          </a:fillRef>
+          <a:effectRef idx="2">
+            <a:schemeClr val="accent1"/>
+          </a:effectRef>
+          <a:fontRef idx="minor">
+            <a:schemeClr val="lt1"/>
+          </a:fontRef>
+        </p:style>
+        <p:txBody>
+          <a:bodyPr rtlCol="0" anchor="ctr"/>
+          <a:lstStyle/>
+          <a:p>
+            <a:pPr algn="ctr"/>
+          </a:p>
+        </p:txBody>
+      </p:sp>
+      <p:sp>
+        <p:nvSpPr>
+          <p:cNvPr id="13" name="TextBox 12"/>
+          <p:cNvSpPr txBox="1"/>
+          <p:nvPr/>
+        </p:nvSpPr>
+        <p:spPr>
+          <a:xfrm>
+            <a:off x="274320" y="1408176"/>
+            <a:ext cx="2240280" cy="224028"/>
+          </a:xfrm>
+          <a:prstGeom prst="rect">
+            <a:avLst/>
+          </a:prstGeom>
+          <a:noFill/>
+        </p:spPr>
+        <p:txBody>
+          <a:bodyPr wrap="square">
+            <a:spAutoFit/>
+          </a:bodyPr>
+          <a:lstStyle/>
+          <a:p>
+            <a:pPr algn="l"/>
+            <a:r>
+              <a:rPr sz="950" b="0">
+                <a:solidFill>
+                  <a:srgbClr val="FFFFFF"/>
+                </a:solidFill>
+              </a:rPr>
+              <a:t>① 절대값 차이</a:t>
+            </a:r>
+          </a:p>
+        </p:txBody>
+      </p:sp>
+      <p:sp>
+        <p:nvSpPr>
+          <p:cNvPr id="14" name="TextBox 13"/>
+          <p:cNvSpPr txBox="1"/>
+          <p:nvPr/>
+        </p:nvSpPr>
+        <p:spPr>
+          <a:xfrm>
+            <a:off x="2578608" y="1408176"/>
+            <a:ext cx="3291840" cy="224028"/>
+          </a:xfrm>
+          <a:prstGeom prst="rect">
+            <a:avLst/>
+          </a:prstGeom>
+          <a:noFill/>
+        </p:spPr>
+        <p:txBody>
+          <a:bodyPr wrap="square">
+            <a:spAutoFit/>
+          </a:bodyPr>
+          <a:lstStyle/>
+          <a:p>
+            <a:pPr algn="l"/>
+            <a:r>
+              <a:rPr sz="950" b="0">
+                <a:solidFill>
+                  <a:srgbClr val="58A6FF"/>
+                </a:solidFill>
+              </a:rPr>
+              <a:t>데이터 σ × 3</a:t>
+            </a:r>
+          </a:p>
+        </p:txBody>
+      </p:sp>
+      <p:sp>
+        <p:nvSpPr>
+          <p:cNvPr id="15" name="Rectangle 14"/>
+          <p:cNvSpPr/>
+          <p:nvPr/>
+        </p:nvSpPr>
+        <p:spPr>
+          <a:xfrm>
+            <a:off x="5824728" y="1417320"/>
+            <a:ext cx="566928" cy="169164"/>
+          </a:xfrm>
+          <a:prstGeom prst="rect">
+            <a:avLst/>
+          </a:prstGeom>
+          <a:solidFill>
+            <a:srgbClr val="0D1933"/>
+          </a:solidFill>
+          <a:ln w="8890">
+            <a:solidFill>
+              <a:srgbClr val="58A6FF"/>
+            </a:solidFill>
+          </a:ln>
+          <a:effectLst/>
+        </p:spPr>
+        <p:style>
+          <a:lnRef idx="1">
+            <a:schemeClr val="accent1"/>
+          </a:lnRef>
+          <a:fillRef idx="3">
+            <a:schemeClr val="accent1"/>
+          </a:fillRef>
+          <a:effectRef idx="2">
+            <a:schemeClr val="accent1"/>
+          </a:effectRef>
+          <a:fontRef idx="minor">
+            <a:schemeClr val="lt1"/>
+          </a:fontRef>
+        </p:style>
+        <p:txBody>
+          <a:bodyPr rtlCol="0" anchor="ctr"/>
+          <a:lstStyle/>
+          <a:p>
+            <a:pPr algn="ctr"/>
+          </a:p>
+        </p:txBody>
+      </p:sp>
+      <p:sp>
+        <p:nvSpPr>
+          <p:cNvPr id="16" name="TextBox 15"/>
+          <p:cNvSpPr txBox="1"/>
+          <p:nvPr/>
+        </p:nvSpPr>
+        <p:spPr>
+          <a:xfrm>
+            <a:off x="5824728" y="1417320"/>
+            <a:ext cx="566928" cy="169164"/>
+          </a:xfrm>
+          <a:prstGeom prst="rect">
+            <a:avLst/>
+          </a:prstGeom>
+          <a:noFill/>
+        </p:spPr>
+        <p:txBody>
+          <a:bodyPr wrap="square">
+            <a:spAutoFit/>
+          </a:bodyPr>
+          <a:lstStyle/>
+          <a:p>
+            <a:pPr algn="ctr"/>
+            <a:r>
+              <a:rPr sz="800" b="0">
+                <a:solidFill>
+                  <a:srgbClr val="58A6FF"/>
+                </a:solidFill>
+              </a:rPr>
+              <a:t>데이터 기반</a:t>
+            </a:r>
+          </a:p>
+        </p:txBody>
+      </p:sp>
+      <p:sp>
+        <p:nvSpPr>
+          <p:cNvPr id="17" name="Rectangle 16"/>
+          <p:cNvSpPr/>
+          <p:nvPr/>
+        </p:nvSpPr>
+        <p:spPr>
+          <a:xfrm>
+            <a:off x="201168" y="1613916"/>
+            <a:ext cx="6217920" cy="224028"/>
+          </a:xfrm>
+          <a:prstGeom prst="rect">
+            <a:avLst/>
+          </a:prstGeom>
+          <a:solidFill>
+            <a:srgbClr val="13181E"/>
+          </a:solidFill>
+          <a:ln>
+            <a:noFill/>
+          </a:ln>
+          <a:effectLst/>
+        </p:spPr>
+        <p:style>
+          <a:lnRef idx="1">
+            <a:schemeClr val="accent1"/>
+          </a:lnRef>
+          <a:fillRef idx="3">
+            <a:schemeClr val="accent1"/>
+          </a:fillRef>
+          <a:effectRef idx="2">
+            <a:schemeClr val="accent1"/>
+          </a:effectRef>
+          <a:fontRef idx="minor">
+            <a:schemeClr val="lt1"/>
+          </a:fontRef>
+        </p:style>
+        <p:txBody>
+          <a:bodyPr rtlCol="0" anchor="ctr"/>
+          <a:lstStyle/>
+          <a:p>
+            <a:pPr algn="ctr"/>
+          </a:p>
+        </p:txBody>
+      </p:sp>
+      <p:sp>
+        <p:nvSpPr>
+          <p:cNvPr id="18" name="TextBox 17"/>
+          <p:cNvSpPr txBox="1"/>
+          <p:nvPr/>
+        </p:nvSpPr>
+        <p:spPr>
+          <a:xfrm>
+            <a:off x="274320" y="1632204"/>
+            <a:ext cx="2240280" cy="224028"/>
+          </a:xfrm>
+          <a:prstGeom prst="rect">
+            <a:avLst/>
+          </a:prstGeom>
+          <a:noFill/>
+        </p:spPr>
+        <p:txBody>
+          <a:bodyPr wrap="square">
+            <a:spAutoFit/>
+          </a:bodyPr>
+          <a:lstStyle/>
+          <a:p>
+            <a:pPr algn="l"/>
+            <a:r>
+              <a:rPr sz="950" b="0">
+                <a:solidFill>
+                  <a:srgbClr val="FFFFFF"/>
+                </a:solidFill>
+              </a:rPr>
+              <a:t>② σ 배수</a:t>
+            </a:r>
+          </a:p>
+        </p:txBody>
+      </p:sp>
+      <p:sp>
+        <p:nvSpPr>
+          <p:cNvPr id="19" name="TextBox 18"/>
+          <p:cNvSpPr txBox="1"/>
+          <p:nvPr/>
+        </p:nvSpPr>
+        <p:spPr>
+          <a:xfrm>
+            <a:off x="2578608" y="1632204"/>
+            <a:ext cx="3291840" cy="224028"/>
+          </a:xfrm>
+          <a:prstGeom prst="rect">
+            <a:avLst/>
+          </a:prstGeom>
+          <a:noFill/>
+        </p:spPr>
+        <p:txBody>
+          <a:bodyPr wrap="square">
+            <a:spAutoFit/>
+          </a:bodyPr>
+          <a:lstStyle/>
+          <a:p>
+            <a:pPr algn="l"/>
+            <a:r>
+              <a:rPr sz="950" b="0">
+                <a:solidFill>
+                  <a:srgbClr val="E3B341"/>
+                </a:solidFill>
+              </a:rPr>
+              <a:t>항상 3  (3σ 통계 표준)</a:t>
+            </a:r>
+          </a:p>
+        </p:txBody>
+      </p:sp>
+      <p:sp>
+        <p:nvSpPr>
+          <p:cNvPr id="20" name="Rectangle 19"/>
+          <p:cNvSpPr/>
+          <p:nvPr/>
+        </p:nvSpPr>
+        <p:spPr>
+          <a:xfrm>
+            <a:off x="5824728" y="1641348"/>
+            <a:ext cx="566928" cy="169164"/>
+          </a:xfrm>
+          <a:prstGeom prst="rect">
+            <a:avLst/>
+          </a:prstGeom>
+          <a:solidFill>
+            <a:srgbClr val="1A1200"/>
+          </a:solidFill>
+          <a:ln w="8890">
+            <a:solidFill>
+              <a:srgbClr val="E3B341"/>
+            </a:solidFill>
+          </a:ln>
+          <a:effectLst/>
+        </p:spPr>
+        <p:style>
+          <a:lnRef idx="1">
+            <a:schemeClr val="accent1"/>
+          </a:lnRef>
+          <a:fillRef idx="3">
+            <a:schemeClr val="accent1"/>
+          </a:fillRef>
+          <a:effectRef idx="2">
+            <a:schemeClr val="accent1"/>
+          </a:effectRef>
+          <a:fontRef idx="minor">
+            <a:schemeClr val="lt1"/>
+          </a:fontRef>
+        </p:style>
+        <p:txBody>
+          <a:bodyPr rtlCol="0" anchor="ctr"/>
+          <a:lstStyle/>
+          <a:p>
+            <a:pPr algn="ctr"/>
+          </a:p>
+        </p:txBody>
+      </p:sp>
+      <p:sp>
+        <p:nvSpPr>
+          <p:cNvPr id="21" name="TextBox 20"/>
+          <p:cNvSpPr txBox="1"/>
+          <p:nvPr/>
+        </p:nvSpPr>
+        <p:spPr>
+          <a:xfrm>
+            <a:off x="5824728" y="1641348"/>
+            <a:ext cx="566928" cy="169164"/>
+          </a:xfrm>
+          <a:prstGeom prst="rect">
+            <a:avLst/>
+          </a:prstGeom>
+          <a:noFill/>
+        </p:spPr>
+        <p:txBody>
+          <a:bodyPr wrap="square">
+            <a:spAutoFit/>
+          </a:bodyPr>
+          <a:lstStyle/>
+          <a:p>
+            <a:pPr algn="ctr"/>
+            <a:r>
+              <a:rPr sz="800" b="0">
+                <a:solidFill>
+                  <a:srgbClr val="E3B341"/>
+                </a:solidFill>
+              </a:rPr>
+              <a:t>고정값</a:t>
+            </a:r>
+          </a:p>
+        </p:txBody>
+      </p:sp>
+      <p:sp>
+        <p:nvSpPr>
+          <p:cNvPr id="22" name="Rectangle 21"/>
+          <p:cNvSpPr/>
+          <p:nvPr/>
+        </p:nvSpPr>
+        <p:spPr>
+          <a:xfrm>
+            <a:off x="201168" y="1837944"/>
+            <a:ext cx="6217920" cy="224028"/>
+          </a:xfrm>
+          <a:prstGeom prst="rect">
+            <a:avLst/>
+          </a:prstGeom>
+          <a:solidFill>
+            <a:srgbClr val="161B22"/>
+          </a:solidFill>
+          <a:ln>
+            <a:noFill/>
+          </a:ln>
+          <a:effectLst/>
+        </p:spPr>
+        <p:style>
+          <a:lnRef idx="1">
+            <a:schemeClr val="accent1"/>
+          </a:lnRef>
+          <a:fillRef idx="3">
+            <a:schemeClr val="accent1"/>
+          </a:fillRef>
+          <a:effectRef idx="2">
+            <a:schemeClr val="accent1"/>
+          </a:effectRef>
+          <a:fontRef idx="minor">
+            <a:schemeClr val="lt1"/>
+          </a:fontRef>
+        </p:style>
+        <p:txBody>
+          <a:bodyPr rtlCol="0" anchor="ctr"/>
+          <a:lstStyle/>
+          <a:p>
+            <a:pPr algn="ctr"/>
+          </a:p>
+        </p:txBody>
+      </p:sp>
+      <p:sp>
+        <p:nvSpPr>
+          <p:cNvPr id="23" name="TextBox 22"/>
+          <p:cNvSpPr txBox="1"/>
+          <p:nvPr/>
+        </p:nvSpPr>
+        <p:spPr>
+          <a:xfrm>
+            <a:off x="274320" y="1856232"/>
+            <a:ext cx="2240280" cy="224028"/>
+          </a:xfrm>
+          <a:prstGeom prst="rect">
+            <a:avLst/>
+          </a:prstGeom>
+          <a:noFill/>
+        </p:spPr>
+        <p:txBody>
+          <a:bodyPr wrap="square">
+            <a:spAutoFit/>
+          </a:bodyPr>
+          <a:lstStyle/>
+          <a:p>
+            <a:pPr algn="l"/>
+            <a:r>
+              <a:rPr sz="950" b="0">
+                <a:solidFill>
+                  <a:srgbClr val="FFFFFF"/>
+                </a:solidFill>
+              </a:rPr>
+              <a:t>③ 변화율%</a:t>
+            </a:r>
+          </a:p>
+        </p:txBody>
+      </p:sp>
+      <p:sp>
+        <p:nvSpPr>
+          <p:cNvPr id="24" name="TextBox 23"/>
+          <p:cNvSpPr txBox="1"/>
+          <p:nvPr/>
+        </p:nvSpPr>
+        <p:spPr>
+          <a:xfrm>
+            <a:off x="2578608" y="1856232"/>
+            <a:ext cx="3291840" cy="224028"/>
+          </a:xfrm>
+          <a:prstGeom prst="rect">
+            <a:avLst/>
+          </a:prstGeom>
+          <a:noFill/>
+        </p:spPr>
+        <p:txBody>
+          <a:bodyPr wrap="square">
+            <a:spAutoFit/>
+          </a:bodyPr>
+          <a:lstStyle/>
+          <a:p>
+            <a:pPr algn="l"/>
+            <a:r>
+              <a:rPr sz="950" b="0">
+                <a:solidFill>
+                  <a:srgbClr val="58A6FF"/>
+                </a:solidFill>
+              </a:rPr>
+              <a:t>데이터 (σ/μ) × 300</a:t>
+            </a:r>
+          </a:p>
+        </p:txBody>
+      </p:sp>
+      <p:sp>
+        <p:nvSpPr>
+          <p:cNvPr id="25" name="Rectangle 24"/>
+          <p:cNvSpPr/>
+          <p:nvPr/>
+        </p:nvSpPr>
+        <p:spPr>
+          <a:xfrm>
+            <a:off x="5824728" y="1865376"/>
+            <a:ext cx="566928" cy="169164"/>
+          </a:xfrm>
+          <a:prstGeom prst="rect">
+            <a:avLst/>
+          </a:prstGeom>
+          <a:solidFill>
+            <a:srgbClr val="0D1933"/>
+          </a:solidFill>
+          <a:ln w="8890">
+            <a:solidFill>
+              <a:srgbClr val="58A6FF"/>
+            </a:solidFill>
+          </a:ln>
+          <a:effectLst/>
+        </p:spPr>
+        <p:style>
+          <a:lnRef idx="1">
+            <a:schemeClr val="accent1"/>
+          </a:lnRef>
+          <a:fillRef idx="3">
+            <a:schemeClr val="accent1"/>
+          </a:fillRef>
+          <a:effectRef idx="2">
+            <a:schemeClr val="accent1"/>
+          </a:effectRef>
+          <a:fontRef idx="minor">
+            <a:schemeClr val="lt1"/>
+          </a:fontRef>
+        </p:style>
+        <p:txBody>
+          <a:bodyPr rtlCol="0" anchor="ctr"/>
+          <a:lstStyle/>
+          <a:p>
+            <a:pPr algn="ctr"/>
+          </a:p>
+        </p:txBody>
+      </p:sp>
+      <p:sp>
+        <p:nvSpPr>
+          <p:cNvPr id="26" name="TextBox 25"/>
+          <p:cNvSpPr txBox="1"/>
+          <p:nvPr/>
+        </p:nvSpPr>
+        <p:spPr>
+          <a:xfrm>
+            <a:off x="5824728" y="1865376"/>
+            <a:ext cx="566928" cy="169164"/>
+          </a:xfrm>
+          <a:prstGeom prst="rect">
+            <a:avLst/>
+          </a:prstGeom>
+          <a:noFill/>
+        </p:spPr>
+        <p:txBody>
+          <a:bodyPr wrap="square">
+            <a:spAutoFit/>
+          </a:bodyPr>
+          <a:lstStyle/>
+          <a:p>
+            <a:pPr algn="ctr"/>
+            <a:r>
+              <a:rPr sz="800" b="0">
+                <a:solidFill>
+                  <a:srgbClr val="58A6FF"/>
+                </a:solidFill>
+              </a:rPr>
+              <a:t>데이터 기반</a:t>
+            </a:r>
+          </a:p>
+        </p:txBody>
+      </p:sp>
+      <p:sp>
+        <p:nvSpPr>
+          <p:cNvPr id="27" name="Rectangle 26"/>
+          <p:cNvSpPr/>
+          <p:nvPr/>
+        </p:nvSpPr>
+        <p:spPr>
+          <a:xfrm>
+            <a:off x="201168" y="2061972"/>
+            <a:ext cx="6217920" cy="224028"/>
+          </a:xfrm>
+          <a:prstGeom prst="rect">
+            <a:avLst/>
+          </a:prstGeom>
+          <a:solidFill>
+            <a:srgbClr val="13181E"/>
+          </a:solidFill>
+          <a:ln>
+            <a:noFill/>
+          </a:ln>
+          <a:effectLst/>
+        </p:spPr>
+        <p:style>
+          <a:lnRef idx="1">
+            <a:schemeClr val="accent1"/>
+          </a:lnRef>
+          <a:fillRef idx="3">
+            <a:schemeClr val="accent1"/>
+          </a:fillRef>
+          <a:effectRef idx="2">
+            <a:schemeClr val="accent1"/>
+          </a:effectRef>
+          <a:fontRef idx="minor">
+            <a:schemeClr val="lt1"/>
+          </a:fontRef>
+        </p:style>
+        <p:txBody>
+          <a:bodyPr rtlCol="0" anchor="ctr"/>
+          <a:lstStyle/>
+          <a:p>
+            <a:pPr algn="ctr"/>
+          </a:p>
+        </p:txBody>
+      </p:sp>
+      <p:sp>
+        <p:nvSpPr>
+          <p:cNvPr id="28" name="TextBox 27"/>
+          <p:cNvSpPr txBox="1"/>
+          <p:nvPr/>
+        </p:nvSpPr>
+        <p:spPr>
+          <a:xfrm>
+            <a:off x="274320" y="2080260"/>
+            <a:ext cx="2240280" cy="224028"/>
+          </a:xfrm>
+          <a:prstGeom prst="rect">
+            <a:avLst/>
+          </a:prstGeom>
+          <a:noFill/>
+        </p:spPr>
+        <p:txBody>
+          <a:bodyPr wrap="square">
+            <a:spAutoFit/>
+          </a:bodyPr>
+          <a:lstStyle/>
+          <a:p>
+            <a:pPr algn="l"/>
+            <a:r>
+              <a:rPr sz="950" b="0">
+                <a:solidFill>
+                  <a:srgbClr val="FFFFFF"/>
+                </a:solidFill>
+              </a:rPr>
+              <a:t>④ 기울기 변화량</a:t>
+            </a:r>
+          </a:p>
+        </p:txBody>
+      </p:sp>
+      <p:sp>
+        <p:nvSpPr>
+          <p:cNvPr id="29" name="TextBox 28"/>
+          <p:cNvSpPr txBox="1"/>
+          <p:nvPr/>
+        </p:nvSpPr>
+        <p:spPr>
+          <a:xfrm>
+            <a:off x="2578608" y="2080260"/>
+            <a:ext cx="3291840" cy="224028"/>
+          </a:xfrm>
+          <a:prstGeom prst="rect">
+            <a:avLst/>
+          </a:prstGeom>
+          <a:noFill/>
+        </p:spPr>
+        <p:txBody>
+          <a:bodyPr wrap="square">
+            <a:spAutoFit/>
+          </a:bodyPr>
+          <a:lstStyle/>
+          <a:p>
+            <a:pPr algn="l"/>
+            <a:r>
+              <a:rPr sz="950" b="0">
+                <a:solidFill>
+                  <a:srgbClr val="58A6FF"/>
+                </a:solidFill>
+              </a:rPr>
+              <a:t>데이터 σ × 2</a:t>
+            </a:r>
+          </a:p>
+        </p:txBody>
+      </p:sp>
+      <p:sp>
+        <p:nvSpPr>
+          <p:cNvPr id="30" name="Rectangle 29"/>
+          <p:cNvSpPr/>
+          <p:nvPr/>
+        </p:nvSpPr>
+        <p:spPr>
+          <a:xfrm>
+            <a:off x="5824728" y="2089404"/>
+            <a:ext cx="566928" cy="169164"/>
+          </a:xfrm>
+          <a:prstGeom prst="rect">
+            <a:avLst/>
+          </a:prstGeom>
+          <a:solidFill>
+            <a:srgbClr val="0D1933"/>
+          </a:solidFill>
+          <a:ln w="8890">
+            <a:solidFill>
+              <a:srgbClr val="58A6FF"/>
+            </a:solidFill>
+          </a:ln>
+          <a:effectLst/>
+        </p:spPr>
+        <p:style>
+          <a:lnRef idx="1">
+            <a:schemeClr val="accent1"/>
+          </a:lnRef>
+          <a:fillRef idx="3">
+            <a:schemeClr val="accent1"/>
+          </a:fillRef>
+          <a:effectRef idx="2">
+            <a:schemeClr val="accent1"/>
+          </a:effectRef>
+          <a:fontRef idx="minor">
+            <a:schemeClr val="lt1"/>
+          </a:fontRef>
+        </p:style>
+        <p:txBody>
+          <a:bodyPr rtlCol="0" anchor="ctr"/>
+          <a:lstStyle/>
+          <a:p>
+            <a:pPr algn="ctr"/>
+          </a:p>
+        </p:txBody>
+      </p:sp>
+      <p:sp>
+        <p:nvSpPr>
+          <p:cNvPr id="31" name="TextBox 30"/>
+          <p:cNvSpPr txBox="1"/>
+          <p:nvPr/>
+        </p:nvSpPr>
+        <p:spPr>
+          <a:xfrm>
+            <a:off x="5824728" y="2089404"/>
+            <a:ext cx="566928" cy="169164"/>
+          </a:xfrm>
+          <a:prstGeom prst="rect">
+            <a:avLst/>
+          </a:prstGeom>
+          <a:noFill/>
+        </p:spPr>
+        <p:txBody>
+          <a:bodyPr wrap="square">
+            <a:spAutoFit/>
+          </a:bodyPr>
+          <a:lstStyle/>
+          <a:p>
+            <a:pPr algn="ctr"/>
+            <a:r>
+              <a:rPr sz="800" b="0">
+                <a:solidFill>
+                  <a:srgbClr val="58A6FF"/>
+                </a:solidFill>
+              </a:rPr>
+              <a:t>데이터 기반</a:t>
+            </a:r>
+          </a:p>
+        </p:txBody>
+      </p:sp>
+      <p:sp>
+        <p:nvSpPr>
+          <p:cNvPr id="32" name="Rectangle 31"/>
+          <p:cNvSpPr/>
+          <p:nvPr/>
+        </p:nvSpPr>
+        <p:spPr>
+          <a:xfrm>
+            <a:off x="201168" y="2286000"/>
+            <a:ext cx="6217920" cy="224028"/>
+          </a:xfrm>
+          <a:prstGeom prst="rect">
+            <a:avLst/>
+          </a:prstGeom>
+          <a:solidFill>
+            <a:srgbClr val="161B22"/>
+          </a:solidFill>
+          <a:ln>
+            <a:noFill/>
+          </a:ln>
+          <a:effectLst/>
+        </p:spPr>
+        <p:style>
+          <a:lnRef idx="1">
+            <a:schemeClr val="accent1"/>
+          </a:lnRef>
+          <a:fillRef idx="3">
+            <a:schemeClr val="accent1"/>
+          </a:fillRef>
+          <a:effectRef idx="2">
+            <a:schemeClr val="accent1"/>
+          </a:effectRef>
+          <a:fontRef idx="minor">
+            <a:schemeClr val="lt1"/>
+          </a:fontRef>
+        </p:style>
+        <p:txBody>
+          <a:bodyPr rtlCol="0" anchor="ctr"/>
+          <a:lstStyle/>
+          <a:p>
+            <a:pPr algn="ctr"/>
+          </a:p>
+        </p:txBody>
+      </p:sp>
+      <p:sp>
+        <p:nvSpPr>
+          <p:cNvPr id="33" name="TextBox 32"/>
+          <p:cNvSpPr txBox="1"/>
+          <p:nvPr/>
+        </p:nvSpPr>
+        <p:spPr>
+          <a:xfrm>
+            <a:off x="274320" y="2304288"/>
+            <a:ext cx="2240280" cy="224028"/>
+          </a:xfrm>
+          <a:prstGeom prst="rect">
+            <a:avLst/>
+          </a:prstGeom>
+          <a:noFill/>
+        </p:spPr>
+        <p:txBody>
+          <a:bodyPr wrap="square">
+            <a:spAutoFit/>
+          </a:bodyPr>
+          <a:lstStyle/>
+          <a:p>
+            <a:pPr algn="l"/>
+            <a:r>
+              <a:rPr sz="950" b="0">
+                <a:solidFill>
+                  <a:srgbClr val="FFFFFF"/>
+                </a:solidFill>
+              </a:rPr>
+              <a:t>⑤ 이동창 기울기</a:t>
+            </a:r>
+          </a:p>
+        </p:txBody>
+      </p:sp>
+      <p:sp>
+        <p:nvSpPr>
+          <p:cNvPr id="34" name="TextBox 33"/>
+          <p:cNvSpPr txBox="1"/>
+          <p:nvPr/>
+        </p:nvSpPr>
+        <p:spPr>
+          <a:xfrm>
+            <a:off x="2578608" y="2304288"/>
+            <a:ext cx="3291840" cy="224028"/>
+          </a:xfrm>
+          <a:prstGeom prst="rect">
+            <a:avLst/>
+          </a:prstGeom>
+          <a:noFill/>
+        </p:spPr>
+        <p:txBody>
+          <a:bodyPr wrap="square">
+            <a:spAutoFit/>
+          </a:bodyPr>
+          <a:lstStyle/>
+          <a:p>
+            <a:pPr algn="l"/>
+            <a:r>
+              <a:rPr sz="950" b="0">
+                <a:solidFill>
+                  <a:srgbClr val="58A6FF"/>
+                </a:solidFill>
+              </a:rPr>
+              <a:t>데이터 σ × 2</a:t>
+            </a:r>
+          </a:p>
+        </p:txBody>
+      </p:sp>
+      <p:sp>
+        <p:nvSpPr>
+          <p:cNvPr id="35" name="Rectangle 34"/>
+          <p:cNvSpPr/>
+          <p:nvPr/>
+        </p:nvSpPr>
+        <p:spPr>
+          <a:xfrm>
+            <a:off x="5824728" y="2313432"/>
+            <a:ext cx="566928" cy="169164"/>
+          </a:xfrm>
+          <a:prstGeom prst="rect">
+            <a:avLst/>
+          </a:prstGeom>
+          <a:solidFill>
+            <a:srgbClr val="0D1933"/>
+          </a:solidFill>
+          <a:ln w="8890">
+            <a:solidFill>
+              <a:srgbClr val="58A6FF"/>
+            </a:solidFill>
+          </a:ln>
+          <a:effectLst/>
+        </p:spPr>
+        <p:style>
+          <a:lnRef idx="1">
+            <a:schemeClr val="accent1"/>
+          </a:lnRef>
+          <a:fillRef idx="3">
+            <a:schemeClr val="accent1"/>
+          </a:fillRef>
+          <a:effectRef idx="2">
+            <a:schemeClr val="accent1"/>
+          </a:effectRef>
+          <a:fontRef idx="minor">
+            <a:schemeClr val="lt1"/>
+          </a:fontRef>
+        </p:style>
+        <p:txBody>
+          <a:bodyPr rtlCol="0" anchor="ctr"/>
+          <a:lstStyle/>
+          <a:p>
+            <a:pPr algn="ctr"/>
+          </a:p>
+        </p:txBody>
+      </p:sp>
+      <p:sp>
+        <p:nvSpPr>
+          <p:cNvPr id="36" name="TextBox 35"/>
+          <p:cNvSpPr txBox="1"/>
+          <p:nvPr/>
+        </p:nvSpPr>
+        <p:spPr>
+          <a:xfrm>
+            <a:off x="5824728" y="2313432"/>
+            <a:ext cx="566928" cy="169164"/>
+          </a:xfrm>
+          <a:prstGeom prst="rect">
+            <a:avLst/>
+          </a:prstGeom>
+          <a:noFill/>
+        </p:spPr>
+        <p:txBody>
+          <a:bodyPr wrap="square">
+            <a:spAutoFit/>
+          </a:bodyPr>
+          <a:lstStyle/>
+          <a:p>
+            <a:pPr algn="ctr"/>
+            <a:r>
+              <a:rPr sz="800" b="0">
+                <a:solidFill>
+                  <a:srgbClr val="58A6FF"/>
+                </a:solidFill>
+              </a:rPr>
+              <a:t>데이터 기반</a:t>
+            </a:r>
+          </a:p>
+        </p:txBody>
+      </p:sp>
+      <p:sp>
+        <p:nvSpPr>
+          <p:cNvPr id="37" name="Rectangle 36"/>
+          <p:cNvSpPr/>
+          <p:nvPr/>
+        </p:nvSpPr>
+        <p:spPr>
+          <a:xfrm>
+            <a:off x="201168" y="2510028"/>
+            <a:ext cx="6217920" cy="224028"/>
+          </a:xfrm>
+          <a:prstGeom prst="rect">
+            <a:avLst/>
+          </a:prstGeom>
+          <a:solidFill>
+            <a:srgbClr val="13181E"/>
+          </a:solidFill>
+          <a:ln>
+            <a:noFill/>
+          </a:ln>
+          <a:effectLst/>
+        </p:spPr>
+        <p:style>
+          <a:lnRef idx="1">
+            <a:schemeClr val="accent1"/>
+          </a:lnRef>
+          <a:fillRef idx="3">
+            <a:schemeClr val="accent1"/>
+          </a:fillRef>
+          <a:effectRef idx="2">
+            <a:schemeClr val="accent1"/>
+          </a:effectRef>
+          <a:fontRef idx="minor">
+            <a:schemeClr val="lt1"/>
+          </a:fontRef>
+        </p:style>
+        <p:txBody>
+          <a:bodyPr rtlCol="0" anchor="ctr"/>
+          <a:lstStyle/>
+          <a:p>
+            <a:pPr algn="ctr"/>
+          </a:p>
+        </p:txBody>
+      </p:sp>
+      <p:sp>
+        <p:nvSpPr>
+          <p:cNvPr id="38" name="TextBox 37"/>
+          <p:cNvSpPr txBox="1"/>
+          <p:nvPr/>
+        </p:nvSpPr>
+        <p:spPr>
+          <a:xfrm>
+            <a:off x="274320" y="2528316"/>
+            <a:ext cx="2240280" cy="224028"/>
+          </a:xfrm>
+          <a:prstGeom prst="rect">
+            <a:avLst/>
+          </a:prstGeom>
+          <a:noFill/>
+        </p:spPr>
+        <p:txBody>
+          <a:bodyPr wrap="square">
+            <a:spAutoFit/>
+          </a:bodyPr>
+          <a:lstStyle/>
+          <a:p>
+            <a:pPr algn="l"/>
+            <a:r>
+              <a:rPr sz="950" b="0">
+                <a:solidFill>
+                  <a:srgbClr val="FFFFFF"/>
+                </a:solidFill>
+              </a:rPr>
+              <a:t>⑥ 일별 평균 차이</a:t>
+            </a:r>
+          </a:p>
+        </p:txBody>
+      </p:sp>
+      <p:sp>
+        <p:nvSpPr>
+          <p:cNvPr id="39" name="TextBox 38"/>
+          <p:cNvSpPr txBox="1"/>
+          <p:nvPr/>
+        </p:nvSpPr>
+        <p:spPr>
+          <a:xfrm>
+            <a:off x="2578608" y="2528316"/>
+            <a:ext cx="3291840" cy="224028"/>
+          </a:xfrm>
+          <a:prstGeom prst="rect">
+            <a:avLst/>
+          </a:prstGeom>
+          <a:noFill/>
+        </p:spPr>
+        <p:txBody>
+          <a:bodyPr wrap="square">
+            <a:spAutoFit/>
+          </a:bodyPr>
+          <a:lstStyle/>
+          <a:p>
+            <a:pPr algn="l"/>
+            <a:r>
+              <a:rPr sz="950" b="0">
+                <a:solidFill>
+                  <a:srgbClr val="58A6FF"/>
+                </a:solidFill>
+              </a:rPr>
+              <a:t>데이터 σ × 2</a:t>
+            </a:r>
+          </a:p>
+        </p:txBody>
+      </p:sp>
+      <p:sp>
+        <p:nvSpPr>
+          <p:cNvPr id="40" name="Rectangle 39"/>
+          <p:cNvSpPr/>
+          <p:nvPr/>
+        </p:nvSpPr>
+        <p:spPr>
+          <a:xfrm>
+            <a:off x="5824728" y="2537460"/>
+            <a:ext cx="566928" cy="169164"/>
+          </a:xfrm>
+          <a:prstGeom prst="rect">
+            <a:avLst/>
+          </a:prstGeom>
+          <a:solidFill>
+            <a:srgbClr val="0D1933"/>
+          </a:solidFill>
+          <a:ln w="8890">
+            <a:solidFill>
+              <a:srgbClr val="58A6FF"/>
+            </a:solidFill>
+          </a:ln>
+          <a:effectLst/>
+        </p:spPr>
+        <p:style>
+          <a:lnRef idx="1">
+            <a:schemeClr val="accent1"/>
+          </a:lnRef>
+          <a:fillRef idx="3">
+            <a:schemeClr val="accent1"/>
+          </a:fillRef>
+          <a:effectRef idx="2">
+            <a:schemeClr val="accent1"/>
+          </a:effectRef>
+          <a:fontRef idx="minor">
+            <a:schemeClr val="lt1"/>
+          </a:fontRef>
+        </p:style>
+        <p:txBody>
+          <a:bodyPr rtlCol="0" anchor="ctr"/>
+          <a:lstStyle/>
+          <a:p>
+            <a:pPr algn="ctr"/>
+          </a:p>
+        </p:txBody>
+      </p:sp>
+      <p:sp>
+        <p:nvSpPr>
+          <p:cNvPr id="41" name="TextBox 40"/>
+          <p:cNvSpPr txBox="1"/>
+          <p:nvPr/>
+        </p:nvSpPr>
+        <p:spPr>
+          <a:xfrm>
+            <a:off x="5824728" y="2537460"/>
+            <a:ext cx="566928" cy="169164"/>
+          </a:xfrm>
+          <a:prstGeom prst="rect">
+            <a:avLst/>
+          </a:prstGeom>
+          <a:noFill/>
+        </p:spPr>
+        <p:txBody>
+          <a:bodyPr wrap="square">
+            <a:spAutoFit/>
+          </a:bodyPr>
+          <a:lstStyle/>
+          <a:p>
+            <a:pPr algn="ctr"/>
+            <a:r>
+              <a:rPr sz="800" b="0">
+                <a:solidFill>
+                  <a:srgbClr val="58A6FF"/>
+                </a:solidFill>
+              </a:rPr>
+              <a:t>데이터 기반</a:t>
+            </a:r>
+          </a:p>
+        </p:txBody>
+      </p:sp>
+      <p:sp>
+        <p:nvSpPr>
+          <p:cNvPr id="42" name="Rectangle 41"/>
+          <p:cNvSpPr/>
+          <p:nvPr/>
+        </p:nvSpPr>
+        <p:spPr>
+          <a:xfrm>
+            <a:off x="201168" y="2734056"/>
+            <a:ext cx="6217920" cy="224028"/>
+          </a:xfrm>
+          <a:prstGeom prst="rect">
+            <a:avLst/>
+          </a:prstGeom>
+          <a:solidFill>
+            <a:srgbClr val="161B22"/>
+          </a:solidFill>
+          <a:ln>
+            <a:noFill/>
+          </a:ln>
+          <a:effectLst/>
+        </p:spPr>
+        <p:style>
+          <a:lnRef idx="1">
+            <a:schemeClr val="accent1"/>
+          </a:lnRef>
+          <a:fillRef idx="3">
+            <a:schemeClr val="accent1"/>
+          </a:fillRef>
+          <a:effectRef idx="2">
+            <a:schemeClr val="accent1"/>
+          </a:effectRef>
+          <a:fontRef idx="minor">
+            <a:schemeClr val="lt1"/>
+          </a:fontRef>
+        </p:style>
+        <p:txBody>
+          <a:bodyPr rtlCol="0" anchor="ctr"/>
+          <a:lstStyle/>
+          <a:p>
+            <a:pPr algn="ctr"/>
+          </a:p>
+        </p:txBody>
+      </p:sp>
+      <p:sp>
+        <p:nvSpPr>
+          <p:cNvPr id="43" name="TextBox 42"/>
+          <p:cNvSpPr txBox="1"/>
+          <p:nvPr/>
+        </p:nvSpPr>
+        <p:spPr>
+          <a:xfrm>
+            <a:off x="274320" y="2752344"/>
+            <a:ext cx="2240280" cy="224028"/>
+          </a:xfrm>
+          <a:prstGeom prst="rect">
+            <a:avLst/>
+          </a:prstGeom>
+          <a:noFill/>
+        </p:spPr>
+        <p:txBody>
+          <a:bodyPr wrap="square">
+            <a:spAutoFit/>
+          </a:bodyPr>
+          <a:lstStyle/>
+          <a:p>
+            <a:pPr algn="l"/>
+            <a:r>
+              <a:rPr sz="950" b="0">
+                <a:solidFill>
+                  <a:srgbClr val="FFFFFF"/>
+                </a:solidFill>
+              </a:rPr>
+              <a:t>⑦ EWMA 관리도</a:t>
+            </a:r>
+          </a:p>
+        </p:txBody>
+      </p:sp>
+      <p:sp>
+        <p:nvSpPr>
+          <p:cNvPr id="44" name="TextBox 43"/>
+          <p:cNvSpPr txBox="1"/>
+          <p:nvPr/>
+        </p:nvSpPr>
+        <p:spPr>
+          <a:xfrm>
+            <a:off x="2578608" y="2752344"/>
+            <a:ext cx="3291840" cy="224028"/>
+          </a:xfrm>
+          <a:prstGeom prst="rect">
+            <a:avLst/>
+          </a:prstGeom>
+          <a:noFill/>
+        </p:spPr>
+        <p:txBody>
+          <a:bodyPr wrap="square">
+            <a:spAutoFit/>
+          </a:bodyPr>
+          <a:lstStyle/>
+          <a:p>
+            <a:pPr algn="l"/>
+            <a:r>
+              <a:rPr sz="950" b="0">
+                <a:solidFill>
+                  <a:srgbClr val="58A6FF"/>
+                </a:solidFill>
+              </a:rPr>
+              <a:t>데이터 σ × 3</a:t>
+            </a:r>
+          </a:p>
+        </p:txBody>
+      </p:sp>
+      <p:sp>
+        <p:nvSpPr>
+          <p:cNvPr id="45" name="Rectangle 44"/>
+          <p:cNvSpPr/>
+          <p:nvPr/>
+        </p:nvSpPr>
+        <p:spPr>
+          <a:xfrm>
+            <a:off x="5824728" y="2761488"/>
+            <a:ext cx="566928" cy="169164"/>
+          </a:xfrm>
+          <a:prstGeom prst="rect">
+            <a:avLst/>
+          </a:prstGeom>
+          <a:solidFill>
+            <a:srgbClr val="0D1933"/>
+          </a:solidFill>
+          <a:ln w="8890">
+            <a:solidFill>
+              <a:srgbClr val="58A6FF"/>
+            </a:solidFill>
+          </a:ln>
+          <a:effectLst/>
+        </p:spPr>
+        <p:style>
+          <a:lnRef idx="1">
+            <a:schemeClr val="accent1"/>
+          </a:lnRef>
+          <a:fillRef idx="3">
+            <a:schemeClr val="accent1"/>
+          </a:fillRef>
+          <a:effectRef idx="2">
+            <a:schemeClr val="accent1"/>
+          </a:effectRef>
+          <a:fontRef idx="minor">
+            <a:schemeClr val="lt1"/>
+          </a:fontRef>
+        </p:style>
+        <p:txBody>
+          <a:bodyPr rtlCol="0" anchor="ctr"/>
+          <a:lstStyle/>
+          <a:p>
+            <a:pPr algn="ctr"/>
+          </a:p>
+        </p:txBody>
+      </p:sp>
+      <p:sp>
+        <p:nvSpPr>
+          <p:cNvPr id="46" name="TextBox 45"/>
+          <p:cNvSpPr txBox="1"/>
+          <p:nvPr/>
+        </p:nvSpPr>
+        <p:spPr>
+          <a:xfrm>
+            <a:off x="5824728" y="2761488"/>
+            <a:ext cx="566928" cy="169164"/>
+          </a:xfrm>
+          <a:prstGeom prst="rect">
+            <a:avLst/>
+          </a:prstGeom>
+          <a:noFill/>
+        </p:spPr>
+        <p:txBody>
+          <a:bodyPr wrap="square">
+            <a:spAutoFit/>
+          </a:bodyPr>
+          <a:lstStyle/>
+          <a:p>
+            <a:pPr algn="ctr"/>
+            <a:r>
+              <a:rPr sz="800" b="0">
+                <a:solidFill>
+                  <a:srgbClr val="58A6FF"/>
+                </a:solidFill>
+              </a:rPr>
+              <a:t>데이터 기반</a:t>
+            </a:r>
+          </a:p>
+        </p:txBody>
+      </p:sp>
+      <p:sp>
+        <p:nvSpPr>
+          <p:cNvPr id="47" name="Rectangle 46"/>
+          <p:cNvSpPr/>
+          <p:nvPr/>
+        </p:nvSpPr>
+        <p:spPr>
+          <a:xfrm>
+            <a:off x="201168" y="2958084"/>
+            <a:ext cx="6217920" cy="224028"/>
+          </a:xfrm>
+          <a:prstGeom prst="rect">
+            <a:avLst/>
+          </a:prstGeom>
+          <a:solidFill>
+            <a:srgbClr val="13181E"/>
+          </a:solidFill>
+          <a:ln>
+            <a:noFill/>
+          </a:ln>
+          <a:effectLst/>
+        </p:spPr>
+        <p:style>
+          <a:lnRef idx="1">
+            <a:schemeClr val="accent1"/>
+          </a:lnRef>
+          <a:fillRef idx="3">
+            <a:schemeClr val="accent1"/>
+          </a:fillRef>
+          <a:effectRef idx="2">
+            <a:schemeClr val="accent1"/>
+          </a:effectRef>
+          <a:fontRef idx="minor">
+            <a:schemeClr val="lt1"/>
+          </a:fontRef>
+        </p:style>
+        <p:txBody>
+          <a:bodyPr rtlCol="0" anchor="ctr"/>
+          <a:lstStyle/>
+          <a:p>
+            <a:pPr algn="ctr"/>
+          </a:p>
+        </p:txBody>
+      </p:sp>
+      <p:sp>
+        <p:nvSpPr>
+          <p:cNvPr id="48" name="TextBox 47"/>
+          <p:cNvSpPr txBox="1"/>
+          <p:nvPr/>
+        </p:nvSpPr>
+        <p:spPr>
+          <a:xfrm>
+            <a:off x="274320" y="2976372"/>
+            <a:ext cx="2240280" cy="224028"/>
+          </a:xfrm>
+          <a:prstGeom prst="rect">
+            <a:avLst/>
+          </a:prstGeom>
+          <a:noFill/>
+        </p:spPr>
+        <p:txBody>
+          <a:bodyPr wrap="square">
+            <a:spAutoFit/>
+          </a:bodyPr>
+          <a:lstStyle/>
+          <a:p>
+            <a:pPr algn="l"/>
+            <a:r>
+              <a:rPr sz="950" b="0">
+                <a:solidFill>
+                  <a:srgbClr val="FFFFFF"/>
+                </a:solidFill>
+              </a:rPr>
+              <a:t>⑧ CUSUM 관리도</a:t>
+            </a:r>
+          </a:p>
+        </p:txBody>
+      </p:sp>
+      <p:sp>
+        <p:nvSpPr>
+          <p:cNvPr id="49" name="TextBox 48"/>
+          <p:cNvSpPr txBox="1"/>
+          <p:nvPr/>
+        </p:nvSpPr>
+        <p:spPr>
+          <a:xfrm>
+            <a:off x="2578608" y="2976372"/>
+            <a:ext cx="3291840" cy="224028"/>
+          </a:xfrm>
+          <a:prstGeom prst="rect">
+            <a:avLst/>
+          </a:prstGeom>
+          <a:noFill/>
+        </p:spPr>
+        <p:txBody>
+          <a:bodyPr wrap="square">
+            <a:spAutoFit/>
+          </a:bodyPr>
+          <a:lstStyle/>
+          <a:p>
+            <a:pPr algn="l"/>
+            <a:r>
+              <a:rPr sz="950" b="0">
+                <a:solidFill>
+                  <a:srgbClr val="58A6FF"/>
+                </a:solidFill>
+              </a:rPr>
+              <a:t>데이터 σ × 5</a:t>
+            </a:r>
+          </a:p>
+        </p:txBody>
+      </p:sp>
+      <p:sp>
+        <p:nvSpPr>
+          <p:cNvPr id="50" name="Rectangle 49"/>
+          <p:cNvSpPr/>
+          <p:nvPr/>
+        </p:nvSpPr>
+        <p:spPr>
+          <a:xfrm>
+            <a:off x="5824728" y="2985516"/>
+            <a:ext cx="566928" cy="169164"/>
+          </a:xfrm>
+          <a:prstGeom prst="rect">
+            <a:avLst/>
+          </a:prstGeom>
+          <a:solidFill>
+            <a:srgbClr val="0D1933"/>
+          </a:solidFill>
+          <a:ln w="8890">
+            <a:solidFill>
+              <a:srgbClr val="58A6FF"/>
+            </a:solidFill>
+          </a:ln>
+          <a:effectLst/>
+        </p:spPr>
+        <p:style>
+          <a:lnRef idx="1">
+            <a:schemeClr val="accent1"/>
+          </a:lnRef>
+          <a:fillRef idx="3">
+            <a:schemeClr val="accent1"/>
+          </a:fillRef>
+          <a:effectRef idx="2">
+            <a:schemeClr val="accent1"/>
+          </a:effectRef>
+          <a:fontRef idx="minor">
+            <a:schemeClr val="lt1"/>
+          </a:fontRef>
+        </p:style>
+        <p:txBody>
+          <a:bodyPr rtlCol="0" anchor="ctr"/>
+          <a:lstStyle/>
+          <a:p>
+            <a:pPr algn="ctr"/>
+          </a:p>
+        </p:txBody>
+      </p:sp>
+      <p:sp>
+        <p:nvSpPr>
+          <p:cNvPr id="51" name="TextBox 50"/>
+          <p:cNvSpPr txBox="1"/>
+          <p:nvPr/>
+        </p:nvSpPr>
+        <p:spPr>
+          <a:xfrm>
+            <a:off x="5824728" y="2985516"/>
+            <a:ext cx="566928" cy="169164"/>
+          </a:xfrm>
+          <a:prstGeom prst="rect">
+            <a:avLst/>
+          </a:prstGeom>
+          <a:noFill/>
+        </p:spPr>
+        <p:txBody>
+          <a:bodyPr wrap="square">
+            <a:spAutoFit/>
+          </a:bodyPr>
+          <a:lstStyle/>
+          <a:p>
+            <a:pPr algn="ctr"/>
+            <a:r>
+              <a:rPr sz="800" b="0">
+                <a:solidFill>
+                  <a:srgbClr val="58A6FF"/>
+                </a:solidFill>
+              </a:rPr>
+              <a:t>데이터 기반</a:t>
+            </a:r>
+          </a:p>
+        </p:txBody>
+      </p:sp>
+      <p:sp>
+        <p:nvSpPr>
+          <p:cNvPr id="52" name="Rectangle 51"/>
+          <p:cNvSpPr/>
+          <p:nvPr/>
+        </p:nvSpPr>
+        <p:spPr>
+          <a:xfrm>
+            <a:off x="201168" y="3182112"/>
+            <a:ext cx="6217920" cy="224028"/>
+          </a:xfrm>
+          <a:prstGeom prst="rect">
+            <a:avLst/>
+          </a:prstGeom>
+          <a:solidFill>
+            <a:srgbClr val="161B22"/>
+          </a:solidFill>
+          <a:ln>
+            <a:noFill/>
+          </a:ln>
+          <a:effectLst/>
+        </p:spPr>
+        <p:style>
+          <a:lnRef idx="1">
+            <a:schemeClr val="accent1"/>
+          </a:lnRef>
+          <a:fillRef idx="3">
+            <a:schemeClr val="accent1"/>
+          </a:fillRef>
+          <a:effectRef idx="2">
+            <a:schemeClr val="accent1"/>
+          </a:effectRef>
+          <a:fontRef idx="minor">
+            <a:schemeClr val="lt1"/>
+          </a:fontRef>
+        </p:style>
+        <p:txBody>
+          <a:bodyPr rtlCol="0" anchor="ctr"/>
+          <a:lstStyle/>
+          <a:p>
+            <a:pPr algn="ctr"/>
+          </a:p>
+        </p:txBody>
+      </p:sp>
+      <p:sp>
+        <p:nvSpPr>
+          <p:cNvPr id="53" name="TextBox 52"/>
+          <p:cNvSpPr txBox="1"/>
+          <p:nvPr/>
+        </p:nvSpPr>
+        <p:spPr>
+          <a:xfrm>
+            <a:off x="274320" y="3200400"/>
+            <a:ext cx="2240280" cy="224028"/>
+          </a:xfrm>
+          <a:prstGeom prst="rect">
+            <a:avLst/>
+          </a:prstGeom>
+          <a:noFill/>
+        </p:spPr>
+        <p:txBody>
+          <a:bodyPr wrap="square">
+            <a:spAutoFit/>
+          </a:bodyPr>
+          <a:lstStyle/>
+          <a:p>
+            <a:pPr algn="l"/>
+            <a:r>
+              <a:rPr sz="950" b="0">
+                <a:solidFill>
+                  <a:srgbClr val="FFFFFF"/>
+                </a:solidFill>
+              </a:rPr>
+              <a:t>⑨ 런 규칙-편향</a:t>
+            </a:r>
+          </a:p>
+        </p:txBody>
+      </p:sp>
+      <p:sp>
+        <p:nvSpPr>
+          <p:cNvPr id="54" name="TextBox 53"/>
+          <p:cNvSpPr txBox="1"/>
+          <p:nvPr/>
+        </p:nvSpPr>
+        <p:spPr>
+          <a:xfrm>
+            <a:off x="2578608" y="3200400"/>
+            <a:ext cx="3291840" cy="224028"/>
+          </a:xfrm>
+          <a:prstGeom prst="rect">
+            <a:avLst/>
+          </a:prstGeom>
+          <a:noFill/>
+        </p:spPr>
+        <p:txBody>
+          <a:bodyPr wrap="square">
+            <a:spAutoFit/>
+          </a:bodyPr>
+          <a:lstStyle/>
+          <a:p>
+            <a:pPr algn="l"/>
+            <a:r>
+              <a:rPr sz="950" b="0">
+                <a:solidFill>
+                  <a:srgbClr val="E3B341"/>
+                </a:solidFill>
+              </a:rPr>
+              <a:t>항상 7  (SPC 표준)</a:t>
+            </a:r>
+          </a:p>
+        </p:txBody>
+      </p:sp>
+      <p:sp>
+        <p:nvSpPr>
+          <p:cNvPr id="55" name="Rectangle 54"/>
+          <p:cNvSpPr/>
+          <p:nvPr/>
+        </p:nvSpPr>
+        <p:spPr>
+          <a:xfrm>
+            <a:off x="5824728" y="3209544"/>
+            <a:ext cx="566928" cy="169164"/>
+          </a:xfrm>
+          <a:prstGeom prst="rect">
+            <a:avLst/>
+          </a:prstGeom>
+          <a:solidFill>
+            <a:srgbClr val="1A1200"/>
+          </a:solidFill>
+          <a:ln w="8890">
+            <a:solidFill>
+              <a:srgbClr val="E3B341"/>
+            </a:solidFill>
+          </a:ln>
+          <a:effectLst/>
+        </p:spPr>
+        <p:style>
+          <a:lnRef idx="1">
+            <a:schemeClr val="accent1"/>
+          </a:lnRef>
+          <a:fillRef idx="3">
+            <a:schemeClr val="accent1"/>
+          </a:fillRef>
+          <a:effectRef idx="2">
+            <a:schemeClr val="accent1"/>
+          </a:effectRef>
+          <a:fontRef idx="minor">
+            <a:schemeClr val="lt1"/>
+          </a:fontRef>
+        </p:style>
+        <p:txBody>
+          <a:bodyPr rtlCol="0" anchor="ctr"/>
+          <a:lstStyle/>
+          <a:p>
+            <a:pPr algn="ctr"/>
+          </a:p>
+        </p:txBody>
+      </p:sp>
+      <p:sp>
+        <p:nvSpPr>
+          <p:cNvPr id="56" name="TextBox 55"/>
+          <p:cNvSpPr txBox="1"/>
+          <p:nvPr/>
+        </p:nvSpPr>
+        <p:spPr>
+          <a:xfrm>
+            <a:off x="5824728" y="3209544"/>
+            <a:ext cx="566928" cy="169164"/>
+          </a:xfrm>
+          <a:prstGeom prst="rect">
+            <a:avLst/>
+          </a:prstGeom>
+          <a:noFill/>
+        </p:spPr>
+        <p:txBody>
+          <a:bodyPr wrap="square">
+            <a:spAutoFit/>
+          </a:bodyPr>
+          <a:lstStyle/>
+          <a:p>
+            <a:pPr algn="ctr"/>
+            <a:r>
+              <a:rPr sz="800" b="0">
+                <a:solidFill>
+                  <a:srgbClr val="E3B341"/>
+                </a:solidFill>
+              </a:rPr>
+              <a:t>고정값</a:t>
+            </a:r>
+          </a:p>
+        </p:txBody>
+      </p:sp>
+      <p:sp>
+        <p:nvSpPr>
+          <p:cNvPr id="57" name="Rectangle 56"/>
+          <p:cNvSpPr/>
+          <p:nvPr/>
+        </p:nvSpPr>
+        <p:spPr>
+          <a:xfrm>
+            <a:off x="201168" y="3406140"/>
+            <a:ext cx="6217920" cy="224028"/>
+          </a:xfrm>
+          <a:prstGeom prst="rect">
+            <a:avLst/>
+          </a:prstGeom>
+          <a:solidFill>
+            <a:srgbClr val="13181E"/>
+          </a:solidFill>
+          <a:ln>
+            <a:noFill/>
+          </a:ln>
+          <a:effectLst/>
+        </p:spPr>
+        <p:style>
+          <a:lnRef idx="1">
+            <a:schemeClr val="accent1"/>
+          </a:lnRef>
+          <a:fillRef idx="3">
+            <a:schemeClr val="accent1"/>
+          </a:fillRef>
+          <a:effectRef idx="2">
+            <a:schemeClr val="accent1"/>
+          </a:effectRef>
+          <a:fontRef idx="minor">
+            <a:schemeClr val="lt1"/>
+          </a:fontRef>
+        </p:style>
+        <p:txBody>
+          <a:bodyPr rtlCol="0" anchor="ctr"/>
+          <a:lstStyle/>
+          <a:p>
+            <a:pPr algn="ctr"/>
+          </a:p>
+        </p:txBody>
+      </p:sp>
+      <p:sp>
+        <p:nvSpPr>
+          <p:cNvPr id="58" name="TextBox 57"/>
+          <p:cNvSpPr txBox="1"/>
+          <p:nvPr/>
+        </p:nvSpPr>
+        <p:spPr>
+          <a:xfrm>
+            <a:off x="274320" y="3424428"/>
+            <a:ext cx="2240280" cy="224028"/>
+          </a:xfrm>
+          <a:prstGeom prst="rect">
+            <a:avLst/>
+          </a:prstGeom>
+          <a:noFill/>
+        </p:spPr>
+        <p:txBody>
+          <a:bodyPr wrap="square">
+            <a:spAutoFit/>
+          </a:bodyPr>
+          <a:lstStyle/>
+          <a:p>
+            <a:pPr algn="l"/>
+            <a:r>
+              <a:rPr sz="950" b="0">
+                <a:solidFill>
+                  <a:srgbClr val="FFFFFF"/>
+                </a:solidFill>
+              </a:rPr>
+              <a:t>⑩ 런 규칙-트렌드</a:t>
+            </a:r>
+          </a:p>
+        </p:txBody>
+      </p:sp>
+      <p:sp>
+        <p:nvSpPr>
+          <p:cNvPr id="59" name="TextBox 58"/>
+          <p:cNvSpPr txBox="1"/>
+          <p:nvPr/>
+        </p:nvSpPr>
+        <p:spPr>
+          <a:xfrm>
+            <a:off x="2578608" y="3424428"/>
+            <a:ext cx="3291840" cy="224028"/>
+          </a:xfrm>
+          <a:prstGeom prst="rect">
+            <a:avLst/>
+          </a:prstGeom>
+          <a:noFill/>
+        </p:spPr>
+        <p:txBody>
+          <a:bodyPr wrap="square">
+            <a:spAutoFit/>
+          </a:bodyPr>
+          <a:lstStyle/>
+          <a:p>
+            <a:pPr algn="l"/>
+            <a:r>
+              <a:rPr sz="950" b="0">
+                <a:solidFill>
+                  <a:srgbClr val="E3B341"/>
+                </a:solidFill>
+              </a:rPr>
+              <a:t>항상 6</a:t>
+            </a:r>
+          </a:p>
+        </p:txBody>
+      </p:sp>
+      <p:sp>
+        <p:nvSpPr>
+          <p:cNvPr id="60" name="Rectangle 59"/>
+          <p:cNvSpPr/>
+          <p:nvPr/>
+        </p:nvSpPr>
+        <p:spPr>
+          <a:xfrm>
+            <a:off x="5824728" y="3433572"/>
+            <a:ext cx="566928" cy="169164"/>
+          </a:xfrm>
+          <a:prstGeom prst="rect">
+            <a:avLst/>
+          </a:prstGeom>
+          <a:solidFill>
+            <a:srgbClr val="1A1200"/>
+          </a:solidFill>
+          <a:ln w="8890">
+            <a:solidFill>
+              <a:srgbClr val="E3B341"/>
+            </a:solidFill>
+          </a:ln>
+          <a:effectLst/>
+        </p:spPr>
+        <p:style>
+          <a:lnRef idx="1">
+            <a:schemeClr val="accent1"/>
+          </a:lnRef>
+          <a:fillRef idx="3">
+            <a:schemeClr val="accent1"/>
+          </a:fillRef>
+          <a:effectRef idx="2">
+            <a:schemeClr val="accent1"/>
+          </a:effectRef>
+          <a:fontRef idx="minor">
+            <a:schemeClr val="lt1"/>
+          </a:fontRef>
+        </p:style>
+        <p:txBody>
+          <a:bodyPr rtlCol="0" anchor="ctr"/>
+          <a:lstStyle/>
+          <a:p>
+            <a:pPr algn="ctr"/>
+          </a:p>
+        </p:txBody>
+      </p:sp>
+      <p:sp>
+        <p:nvSpPr>
+          <p:cNvPr id="61" name="TextBox 60"/>
+          <p:cNvSpPr txBox="1"/>
+          <p:nvPr/>
+        </p:nvSpPr>
+        <p:spPr>
+          <a:xfrm>
+            <a:off x="5824728" y="3433572"/>
+            <a:ext cx="566928" cy="169164"/>
+          </a:xfrm>
+          <a:prstGeom prst="rect">
+            <a:avLst/>
+          </a:prstGeom>
+          <a:noFill/>
+        </p:spPr>
+        <p:txBody>
+          <a:bodyPr wrap="square">
+            <a:spAutoFit/>
+          </a:bodyPr>
+          <a:lstStyle/>
+          <a:p>
+            <a:pPr algn="ctr"/>
+            <a:r>
+              <a:rPr sz="800" b="0">
+                <a:solidFill>
+                  <a:srgbClr val="E3B341"/>
+                </a:solidFill>
+              </a:rPr>
+              <a:t>고정값</a:t>
+            </a:r>
+          </a:p>
+        </p:txBody>
+      </p:sp>
+      <p:sp>
+        <p:nvSpPr>
+          <p:cNvPr id="62" name="Rectangle 61"/>
+          <p:cNvSpPr/>
+          <p:nvPr/>
+        </p:nvSpPr>
+        <p:spPr>
+          <a:xfrm>
+            <a:off x="201168" y="3630168"/>
+            <a:ext cx="6217920" cy="224028"/>
+          </a:xfrm>
+          <a:prstGeom prst="rect">
+            <a:avLst/>
+          </a:prstGeom>
+          <a:solidFill>
+            <a:srgbClr val="161B22"/>
+          </a:solidFill>
+          <a:ln>
+            <a:noFill/>
+          </a:ln>
+          <a:effectLst/>
+        </p:spPr>
+        <p:style>
+          <a:lnRef idx="1">
+            <a:schemeClr val="accent1"/>
+          </a:lnRef>
+          <a:fillRef idx="3">
+            <a:schemeClr val="accent1"/>
+          </a:fillRef>
+          <a:effectRef idx="2">
+            <a:schemeClr val="accent1"/>
+          </a:effectRef>
+          <a:fontRef idx="minor">
+            <a:schemeClr val="lt1"/>
+          </a:fontRef>
+        </p:style>
+        <p:txBody>
+          <a:bodyPr rtlCol="0" anchor="ctr"/>
+          <a:lstStyle/>
+          <a:p>
+            <a:pPr algn="ctr"/>
+          </a:p>
+        </p:txBody>
+      </p:sp>
+      <p:sp>
+        <p:nvSpPr>
+          <p:cNvPr id="63" name="TextBox 62"/>
+          <p:cNvSpPr txBox="1"/>
+          <p:nvPr/>
+        </p:nvSpPr>
+        <p:spPr>
+          <a:xfrm>
+            <a:off x="274320" y="3648456"/>
+            <a:ext cx="2240280" cy="224028"/>
+          </a:xfrm>
+          <a:prstGeom prst="rect">
+            <a:avLst/>
+          </a:prstGeom>
+          <a:noFill/>
+        </p:spPr>
+        <p:txBody>
+          <a:bodyPr wrap="square">
+            <a:spAutoFit/>
+          </a:bodyPr>
+          <a:lstStyle/>
+          <a:p>
+            <a:pPr algn="l"/>
+            <a:r>
+              <a:rPr sz="950" b="0">
+                <a:solidFill>
+                  <a:srgbClr val="FFFFFF"/>
+                </a:solidFill>
+              </a:rPr>
+              <a:t>⑪ SPC 복합 규칙</a:t>
+            </a:r>
+          </a:p>
+        </p:txBody>
+      </p:sp>
+      <p:sp>
+        <p:nvSpPr>
+          <p:cNvPr id="64" name="TextBox 63"/>
+          <p:cNvSpPr txBox="1"/>
+          <p:nvPr/>
+        </p:nvSpPr>
+        <p:spPr>
+          <a:xfrm>
+            <a:off x="2578608" y="3648456"/>
+            <a:ext cx="3291840" cy="224028"/>
+          </a:xfrm>
+          <a:prstGeom prst="rect">
+            <a:avLst/>
+          </a:prstGeom>
+          <a:noFill/>
+        </p:spPr>
+        <p:txBody>
+          <a:bodyPr wrap="square">
+            <a:spAutoFit/>
+          </a:bodyPr>
+          <a:lstStyle/>
+          <a:p>
+            <a:pPr algn="l"/>
+            <a:r>
+              <a:rPr sz="950" b="0">
+                <a:solidFill>
+                  <a:srgbClr val="E3B341"/>
+                </a:solidFill>
+              </a:rPr>
+              <a:t>항상 2  (서양전기 기준)</a:t>
+            </a:r>
+          </a:p>
+        </p:txBody>
+      </p:sp>
+      <p:sp>
+        <p:nvSpPr>
+          <p:cNvPr id="65" name="Rectangle 64"/>
+          <p:cNvSpPr/>
+          <p:nvPr/>
+        </p:nvSpPr>
+        <p:spPr>
+          <a:xfrm>
+            <a:off x="5824728" y="3657600"/>
+            <a:ext cx="566928" cy="169164"/>
+          </a:xfrm>
+          <a:prstGeom prst="rect">
+            <a:avLst/>
+          </a:prstGeom>
+          <a:solidFill>
+            <a:srgbClr val="1A1200"/>
+          </a:solidFill>
+          <a:ln w="8890">
+            <a:solidFill>
+              <a:srgbClr val="E3B341"/>
+            </a:solidFill>
+          </a:ln>
+          <a:effectLst/>
+        </p:spPr>
+        <p:style>
+          <a:lnRef idx="1">
+            <a:schemeClr val="accent1"/>
+          </a:lnRef>
+          <a:fillRef idx="3">
+            <a:schemeClr val="accent1"/>
+          </a:fillRef>
+          <a:effectRef idx="2">
+            <a:schemeClr val="accent1"/>
+          </a:effectRef>
+          <a:fontRef idx="minor">
+            <a:schemeClr val="lt1"/>
+          </a:fontRef>
+        </p:style>
+        <p:txBody>
+          <a:bodyPr rtlCol="0" anchor="ctr"/>
+          <a:lstStyle/>
+          <a:p>
+            <a:pPr algn="ctr"/>
+          </a:p>
+        </p:txBody>
+      </p:sp>
+      <p:sp>
+        <p:nvSpPr>
+          <p:cNvPr id="66" name="TextBox 65"/>
+          <p:cNvSpPr txBox="1"/>
+          <p:nvPr/>
+        </p:nvSpPr>
+        <p:spPr>
+          <a:xfrm>
+            <a:off x="5824728" y="3657600"/>
+            <a:ext cx="566928" cy="169164"/>
+          </a:xfrm>
+          <a:prstGeom prst="rect">
+            <a:avLst/>
+          </a:prstGeom>
+          <a:noFill/>
+        </p:spPr>
+        <p:txBody>
+          <a:bodyPr wrap="square">
+            <a:spAutoFit/>
+          </a:bodyPr>
+          <a:lstStyle/>
+          <a:p>
+            <a:pPr algn="ctr"/>
+            <a:r>
+              <a:rPr sz="800" b="0">
+                <a:solidFill>
+                  <a:srgbClr val="E3B341"/>
+                </a:solidFill>
+              </a:rPr>
+              <a:t>고정값</a:t>
+            </a:r>
+          </a:p>
+        </p:txBody>
+      </p:sp>
+      <p:sp>
+        <p:nvSpPr>
+          <p:cNvPr id="67" name="Rectangle 66"/>
+          <p:cNvSpPr/>
+          <p:nvPr/>
+        </p:nvSpPr>
+        <p:spPr>
+          <a:xfrm>
+            <a:off x="201168" y="3854196"/>
+            <a:ext cx="6217920" cy="224028"/>
+          </a:xfrm>
+          <a:prstGeom prst="rect">
+            <a:avLst/>
+          </a:prstGeom>
+          <a:solidFill>
+            <a:srgbClr val="13181E"/>
+          </a:solidFill>
+          <a:ln>
+            <a:noFill/>
+          </a:ln>
+          <a:effectLst/>
+        </p:spPr>
+        <p:style>
+          <a:lnRef idx="1">
+            <a:schemeClr val="accent1"/>
+          </a:lnRef>
+          <a:fillRef idx="3">
+            <a:schemeClr val="accent1"/>
+          </a:fillRef>
+          <a:effectRef idx="2">
+            <a:schemeClr val="accent1"/>
+          </a:effectRef>
+          <a:fontRef idx="minor">
+            <a:schemeClr val="lt1"/>
+          </a:fontRef>
+        </p:style>
+        <p:txBody>
+          <a:bodyPr rtlCol="0" anchor="ctr"/>
+          <a:lstStyle/>
+          <a:p>
+            <a:pPr algn="ctr"/>
+          </a:p>
+        </p:txBody>
+      </p:sp>
+      <p:sp>
+        <p:nvSpPr>
+          <p:cNvPr id="68" name="TextBox 67"/>
+          <p:cNvSpPr txBox="1"/>
+          <p:nvPr/>
+        </p:nvSpPr>
+        <p:spPr>
+          <a:xfrm>
+            <a:off x="274320" y="3872484"/>
+            <a:ext cx="2240280" cy="224028"/>
+          </a:xfrm>
+          <a:prstGeom prst="rect">
+            <a:avLst/>
+          </a:prstGeom>
+          <a:noFill/>
+        </p:spPr>
+        <p:txBody>
+          <a:bodyPr wrap="square">
+            <a:spAutoFit/>
+          </a:bodyPr>
+          <a:lstStyle/>
+          <a:p>
+            <a:pPr algn="l"/>
+            <a:r>
+              <a:rPr sz="950" b="0">
+                <a:solidFill>
+                  <a:srgbClr val="FFFFFF"/>
+                </a:solidFill>
+              </a:rPr>
+              <a:t>⑫ IQR 박스플롯</a:t>
+            </a:r>
+          </a:p>
+        </p:txBody>
+      </p:sp>
+      <p:sp>
+        <p:nvSpPr>
+          <p:cNvPr id="69" name="TextBox 68"/>
+          <p:cNvSpPr txBox="1"/>
+          <p:nvPr/>
+        </p:nvSpPr>
+        <p:spPr>
+          <a:xfrm>
+            <a:off x="2578608" y="3872484"/>
+            <a:ext cx="3291840" cy="224028"/>
+          </a:xfrm>
+          <a:prstGeom prst="rect">
+            <a:avLst/>
+          </a:prstGeom>
+          <a:noFill/>
+        </p:spPr>
+        <p:txBody>
+          <a:bodyPr wrap="square">
+            <a:spAutoFit/>
+          </a:bodyPr>
+          <a:lstStyle/>
+          <a:p>
+            <a:pPr algn="l"/>
+            <a:r>
+              <a:rPr sz="950" b="0">
+                <a:solidFill>
+                  <a:srgbClr val="E3B341"/>
+                </a:solidFill>
+              </a:rPr>
+              <a:t>항상 1.5  (박스플롯 표준)</a:t>
+            </a:r>
+          </a:p>
+        </p:txBody>
+      </p:sp>
+      <p:sp>
+        <p:nvSpPr>
+          <p:cNvPr id="70" name="Rectangle 69"/>
+          <p:cNvSpPr/>
+          <p:nvPr/>
+        </p:nvSpPr>
+        <p:spPr>
+          <a:xfrm>
+            <a:off x="5824728" y="3881628"/>
+            <a:ext cx="566928" cy="169164"/>
+          </a:xfrm>
+          <a:prstGeom prst="rect">
+            <a:avLst/>
+          </a:prstGeom>
+          <a:solidFill>
+            <a:srgbClr val="1A1200"/>
+          </a:solidFill>
+          <a:ln w="8890">
+            <a:solidFill>
+              <a:srgbClr val="E3B341"/>
+            </a:solidFill>
+          </a:ln>
+          <a:effectLst/>
+        </p:spPr>
+        <p:style>
+          <a:lnRef idx="1">
+            <a:schemeClr val="accent1"/>
+          </a:lnRef>
+          <a:fillRef idx="3">
+            <a:schemeClr val="accent1"/>
+          </a:fillRef>
+          <a:effectRef idx="2">
+            <a:schemeClr val="accent1"/>
+          </a:effectRef>
+          <a:fontRef idx="minor">
+            <a:schemeClr val="lt1"/>
+          </a:fontRef>
+        </p:style>
+        <p:txBody>
+          <a:bodyPr rtlCol="0" anchor="ctr"/>
+          <a:lstStyle/>
+          <a:p>
+            <a:pPr algn="ctr"/>
+          </a:p>
+        </p:txBody>
+      </p:sp>
+      <p:sp>
+        <p:nvSpPr>
+          <p:cNvPr id="71" name="TextBox 70"/>
+          <p:cNvSpPr txBox="1"/>
+          <p:nvPr/>
+        </p:nvSpPr>
+        <p:spPr>
+          <a:xfrm>
+            <a:off x="5824728" y="3881628"/>
+            <a:ext cx="566928" cy="169164"/>
+          </a:xfrm>
+          <a:prstGeom prst="rect">
+            <a:avLst/>
+          </a:prstGeom>
+          <a:noFill/>
+        </p:spPr>
+        <p:txBody>
+          <a:bodyPr wrap="square">
+            <a:spAutoFit/>
+          </a:bodyPr>
+          <a:lstStyle/>
+          <a:p>
+            <a:pPr algn="ctr"/>
+            <a:r>
+              <a:rPr sz="800" b="0">
+                <a:solidFill>
+                  <a:srgbClr val="E3B341"/>
+                </a:solidFill>
+              </a:rPr>
+              <a:t>고정값</a:t>
+            </a:r>
+          </a:p>
+        </p:txBody>
+      </p:sp>
+      <p:sp>
+        <p:nvSpPr>
+          <p:cNvPr id="72" name="Rectangle 71"/>
+          <p:cNvSpPr/>
+          <p:nvPr/>
+        </p:nvSpPr>
+        <p:spPr>
+          <a:xfrm>
+            <a:off x="201168" y="4078224"/>
+            <a:ext cx="6217920" cy="224028"/>
+          </a:xfrm>
+          <a:prstGeom prst="rect">
+            <a:avLst/>
+          </a:prstGeom>
+          <a:solidFill>
+            <a:srgbClr val="161B22"/>
+          </a:solidFill>
+          <a:ln>
+            <a:noFill/>
+          </a:ln>
+          <a:effectLst/>
+        </p:spPr>
+        <p:style>
+          <a:lnRef idx="1">
+            <a:schemeClr val="accent1"/>
+          </a:lnRef>
+          <a:fillRef idx="3">
+            <a:schemeClr val="accent1"/>
+          </a:fillRef>
+          <a:effectRef idx="2">
+            <a:schemeClr val="accent1"/>
+          </a:effectRef>
+          <a:fontRef idx="minor">
+            <a:schemeClr val="lt1"/>
+          </a:fontRef>
+        </p:style>
+        <p:txBody>
+          <a:bodyPr rtlCol="0" anchor="ctr"/>
+          <a:lstStyle/>
+          <a:p>
+            <a:pPr algn="ctr"/>
+          </a:p>
+        </p:txBody>
+      </p:sp>
+      <p:sp>
+        <p:nvSpPr>
+          <p:cNvPr id="73" name="TextBox 72"/>
+          <p:cNvSpPr txBox="1"/>
+          <p:nvPr/>
+        </p:nvSpPr>
+        <p:spPr>
+          <a:xfrm>
+            <a:off x="274320" y="4096512"/>
+            <a:ext cx="2240280" cy="224028"/>
+          </a:xfrm>
+          <a:prstGeom prst="rect">
+            <a:avLst/>
+          </a:prstGeom>
+          <a:noFill/>
+        </p:spPr>
+        <p:txBody>
+          <a:bodyPr wrap="square">
+            <a:spAutoFit/>
+          </a:bodyPr>
+          <a:lstStyle/>
+          <a:p>
+            <a:pPr algn="l"/>
+            <a:r>
+              <a:rPr sz="950" b="0">
+                <a:solidFill>
+                  <a:srgbClr val="FFFFFF"/>
+                </a:solidFill>
+              </a:rPr>
+              <a:t>⑬ Modified Z-score</a:t>
+            </a:r>
+          </a:p>
+        </p:txBody>
+      </p:sp>
+      <p:sp>
+        <p:nvSpPr>
+          <p:cNvPr id="74" name="TextBox 73"/>
+          <p:cNvSpPr txBox="1"/>
+          <p:nvPr/>
+        </p:nvSpPr>
+        <p:spPr>
+          <a:xfrm>
+            <a:off x="2578608" y="4096512"/>
+            <a:ext cx="3291840" cy="224028"/>
+          </a:xfrm>
+          <a:prstGeom prst="rect">
+            <a:avLst/>
+          </a:prstGeom>
+          <a:noFill/>
+        </p:spPr>
+        <p:txBody>
+          <a:bodyPr wrap="square">
+            <a:spAutoFit/>
+          </a:bodyPr>
+          <a:lstStyle/>
+          <a:p>
+            <a:pPr algn="l"/>
+            <a:r>
+              <a:rPr sz="950" b="0">
+                <a:solidFill>
+                  <a:srgbClr val="E3B341"/>
+                </a:solidFill>
+              </a:rPr>
+              <a:t>항상 3.5  (Iglewicz 기준)</a:t>
+            </a:r>
+          </a:p>
+        </p:txBody>
+      </p:sp>
+      <p:sp>
+        <p:nvSpPr>
+          <p:cNvPr id="75" name="Rectangle 74"/>
+          <p:cNvSpPr/>
+          <p:nvPr/>
+        </p:nvSpPr>
+        <p:spPr>
+          <a:xfrm>
+            <a:off x="5824728" y="4105656"/>
+            <a:ext cx="566928" cy="169164"/>
+          </a:xfrm>
+          <a:prstGeom prst="rect">
+            <a:avLst/>
+          </a:prstGeom>
+          <a:solidFill>
+            <a:srgbClr val="1A1200"/>
+          </a:solidFill>
+          <a:ln w="8890">
+            <a:solidFill>
+              <a:srgbClr val="E3B341"/>
+            </a:solidFill>
+          </a:ln>
+          <a:effectLst/>
+        </p:spPr>
+        <p:style>
+          <a:lnRef idx="1">
+            <a:schemeClr val="accent1"/>
+          </a:lnRef>
+          <a:fillRef idx="3">
+            <a:schemeClr val="accent1"/>
+          </a:fillRef>
+          <a:effectRef idx="2">
+            <a:schemeClr val="accent1"/>
+          </a:effectRef>
+          <a:fontRef idx="minor">
+            <a:schemeClr val="lt1"/>
+          </a:fontRef>
+        </p:style>
+        <p:txBody>
+          <a:bodyPr rtlCol="0" anchor="ctr"/>
+          <a:lstStyle/>
+          <a:p>
+            <a:pPr algn="ctr"/>
+          </a:p>
+        </p:txBody>
+      </p:sp>
+      <p:sp>
+        <p:nvSpPr>
+          <p:cNvPr id="76" name="TextBox 75"/>
+          <p:cNvSpPr txBox="1"/>
+          <p:nvPr/>
+        </p:nvSpPr>
+        <p:spPr>
+          <a:xfrm>
+            <a:off x="5824728" y="4105656"/>
+            <a:ext cx="566928" cy="169164"/>
+          </a:xfrm>
+          <a:prstGeom prst="rect">
+            <a:avLst/>
+          </a:prstGeom>
+          <a:noFill/>
+        </p:spPr>
+        <p:txBody>
+          <a:bodyPr wrap="square">
+            <a:spAutoFit/>
+          </a:bodyPr>
+          <a:lstStyle/>
+          <a:p>
+            <a:pPr algn="ctr"/>
+            <a:r>
+              <a:rPr sz="800" b="0">
+                <a:solidFill>
+                  <a:srgbClr val="E3B341"/>
+                </a:solidFill>
+              </a:rPr>
+              <a:t>고정값</a:t>
+            </a:r>
+          </a:p>
+        </p:txBody>
+      </p:sp>
+      <p:sp>
+        <p:nvSpPr>
+          <p:cNvPr id="77" name="Rectangle 76"/>
+          <p:cNvSpPr/>
+          <p:nvPr/>
+        </p:nvSpPr>
+        <p:spPr>
+          <a:xfrm>
+            <a:off x="201168" y="4302252"/>
+            <a:ext cx="6217920" cy="224028"/>
+          </a:xfrm>
+          <a:prstGeom prst="rect">
+            <a:avLst/>
+          </a:prstGeom>
+          <a:solidFill>
+            <a:srgbClr val="13181E"/>
+          </a:solidFill>
+          <a:ln>
+            <a:noFill/>
+          </a:ln>
+          <a:effectLst/>
+        </p:spPr>
+        <p:style>
+          <a:lnRef idx="1">
+            <a:schemeClr val="accent1"/>
+          </a:lnRef>
+          <a:fillRef idx="3">
+            <a:schemeClr val="accent1"/>
+          </a:fillRef>
+          <a:effectRef idx="2">
+            <a:schemeClr val="accent1"/>
+          </a:effectRef>
+          <a:fontRef idx="minor">
+            <a:schemeClr val="lt1"/>
+          </a:fontRef>
+        </p:style>
+        <p:txBody>
+          <a:bodyPr rtlCol="0" anchor="ctr"/>
+          <a:lstStyle/>
+          <a:p>
+            <a:pPr algn="ctr"/>
+          </a:p>
+        </p:txBody>
+      </p:sp>
+      <p:sp>
+        <p:nvSpPr>
+          <p:cNvPr id="78" name="TextBox 77"/>
+          <p:cNvSpPr txBox="1"/>
+          <p:nvPr/>
+        </p:nvSpPr>
+        <p:spPr>
+          <a:xfrm>
+            <a:off x="274320" y="4320540"/>
+            <a:ext cx="2240280" cy="224028"/>
+          </a:xfrm>
+          <a:prstGeom prst="rect">
+            <a:avLst/>
+          </a:prstGeom>
+          <a:noFill/>
+        </p:spPr>
+        <p:txBody>
+          <a:bodyPr wrap="square">
+            <a:spAutoFit/>
+          </a:bodyPr>
+          <a:lstStyle/>
+          <a:p>
+            <a:pPr algn="l"/>
+            <a:r>
+              <a:rPr sz="950" b="0">
+                <a:solidFill>
+                  <a:srgbClr val="FFFFFF"/>
+                </a:solidFill>
+              </a:rPr>
+              <a:t>⑭ Wafer-to-Wafer</a:t>
+            </a:r>
+          </a:p>
+        </p:txBody>
+      </p:sp>
+      <p:sp>
+        <p:nvSpPr>
+          <p:cNvPr id="79" name="TextBox 78"/>
+          <p:cNvSpPr txBox="1"/>
+          <p:nvPr/>
+        </p:nvSpPr>
+        <p:spPr>
+          <a:xfrm>
+            <a:off x="2578608" y="4320540"/>
+            <a:ext cx="3291840" cy="224028"/>
+          </a:xfrm>
+          <a:prstGeom prst="rect">
+            <a:avLst/>
+          </a:prstGeom>
+          <a:noFill/>
+        </p:spPr>
+        <p:txBody>
+          <a:bodyPr wrap="square">
+            <a:spAutoFit/>
+          </a:bodyPr>
+          <a:lstStyle/>
+          <a:p>
+            <a:pPr algn="l"/>
+            <a:r>
+              <a:rPr sz="950" b="0">
+                <a:solidFill>
+                  <a:srgbClr val="58A6FF"/>
+                </a:solidFill>
+              </a:rPr>
+              <a:t>데이터 σ × 2</a:t>
+            </a:r>
+          </a:p>
+        </p:txBody>
+      </p:sp>
+      <p:sp>
+        <p:nvSpPr>
+          <p:cNvPr id="80" name="Rectangle 79"/>
+          <p:cNvSpPr/>
+          <p:nvPr/>
+        </p:nvSpPr>
+        <p:spPr>
+          <a:xfrm>
+            <a:off x="5824728" y="4329684"/>
+            <a:ext cx="566928" cy="169164"/>
+          </a:xfrm>
+          <a:prstGeom prst="rect">
+            <a:avLst/>
+          </a:prstGeom>
+          <a:solidFill>
+            <a:srgbClr val="0D1933"/>
+          </a:solidFill>
+          <a:ln w="8890">
+            <a:solidFill>
+              <a:srgbClr val="58A6FF"/>
+            </a:solidFill>
+          </a:ln>
+          <a:effectLst/>
+        </p:spPr>
+        <p:style>
+          <a:lnRef idx="1">
+            <a:schemeClr val="accent1"/>
+          </a:lnRef>
+          <a:fillRef idx="3">
+            <a:schemeClr val="accent1"/>
+          </a:fillRef>
+          <a:effectRef idx="2">
+            <a:schemeClr val="accent1"/>
+          </a:effectRef>
+          <a:fontRef idx="minor">
+            <a:schemeClr val="lt1"/>
+          </a:fontRef>
+        </p:style>
+        <p:txBody>
+          <a:bodyPr rtlCol="0" anchor="ctr"/>
+          <a:lstStyle/>
+          <a:p>
+            <a:pPr algn="ctr"/>
+          </a:p>
+        </p:txBody>
+      </p:sp>
+      <p:sp>
+        <p:nvSpPr>
+          <p:cNvPr id="81" name="TextBox 80"/>
+          <p:cNvSpPr txBox="1"/>
+          <p:nvPr/>
+        </p:nvSpPr>
+        <p:spPr>
+          <a:xfrm>
+            <a:off x="5824728" y="4329684"/>
+            <a:ext cx="566928" cy="169164"/>
+          </a:xfrm>
+          <a:prstGeom prst="rect">
+            <a:avLst/>
+          </a:prstGeom>
+          <a:noFill/>
+        </p:spPr>
+        <p:txBody>
+          <a:bodyPr wrap="square">
+            <a:spAutoFit/>
+          </a:bodyPr>
+          <a:lstStyle/>
+          <a:p>
+            <a:pPr algn="ctr"/>
+            <a:r>
+              <a:rPr sz="800" b="0">
+                <a:solidFill>
+                  <a:srgbClr val="58A6FF"/>
+                </a:solidFill>
+              </a:rPr>
+              <a:t>데이터 기반</a:t>
+            </a:r>
+          </a:p>
+        </p:txBody>
+      </p:sp>
+      <p:sp>
+        <p:nvSpPr>
+          <p:cNvPr id="82" name="Rectangle 81"/>
+          <p:cNvSpPr/>
+          <p:nvPr/>
+        </p:nvSpPr>
+        <p:spPr>
+          <a:xfrm>
+            <a:off x="201168" y="4526280"/>
+            <a:ext cx="6217920" cy="224028"/>
+          </a:xfrm>
+          <a:prstGeom prst="rect">
+            <a:avLst/>
+          </a:prstGeom>
+          <a:solidFill>
+            <a:srgbClr val="161B22"/>
+          </a:solidFill>
+          <a:ln>
+            <a:noFill/>
+          </a:ln>
+          <a:effectLst/>
+        </p:spPr>
+        <p:style>
+          <a:lnRef idx="1">
+            <a:schemeClr val="accent1"/>
+          </a:lnRef>
+          <a:fillRef idx="3">
+            <a:schemeClr val="accent1"/>
+          </a:fillRef>
+          <a:effectRef idx="2">
+            <a:schemeClr val="accent1"/>
+          </a:effectRef>
+          <a:fontRef idx="minor">
+            <a:schemeClr val="lt1"/>
+          </a:fontRef>
+        </p:style>
+        <p:txBody>
+          <a:bodyPr rtlCol="0" anchor="ctr"/>
+          <a:lstStyle/>
+          <a:p>
+            <a:pPr algn="ctr"/>
+          </a:p>
+        </p:txBody>
+      </p:sp>
+      <p:sp>
+        <p:nvSpPr>
+          <p:cNvPr id="83" name="TextBox 82"/>
+          <p:cNvSpPr txBox="1"/>
+          <p:nvPr/>
+        </p:nvSpPr>
+        <p:spPr>
+          <a:xfrm>
+            <a:off x="274320" y="4544568"/>
+            <a:ext cx="2240280" cy="224028"/>
+          </a:xfrm>
+          <a:prstGeom prst="rect">
+            <a:avLst/>
+          </a:prstGeom>
+          <a:noFill/>
+        </p:spPr>
+        <p:txBody>
+          <a:bodyPr wrap="square">
+            <a:spAutoFit/>
+          </a:bodyPr>
+          <a:lstStyle/>
+          <a:p>
+            <a:pPr algn="l"/>
+            <a:r>
+              <a:rPr sz="950" b="0">
+                <a:solidFill>
+                  <a:srgbClr val="FFFFFF"/>
+                </a:solidFill>
+              </a:rPr>
+              <a:t>⑮ Chamber Matching</a:t>
+            </a:r>
+          </a:p>
+        </p:txBody>
+      </p:sp>
+      <p:sp>
+        <p:nvSpPr>
+          <p:cNvPr id="84" name="TextBox 83"/>
+          <p:cNvSpPr txBox="1"/>
+          <p:nvPr/>
+        </p:nvSpPr>
+        <p:spPr>
+          <a:xfrm>
+            <a:off x="2578608" y="4544568"/>
+            <a:ext cx="3291840" cy="224028"/>
+          </a:xfrm>
+          <a:prstGeom prst="rect">
+            <a:avLst/>
+          </a:prstGeom>
+          <a:noFill/>
+        </p:spPr>
+        <p:txBody>
+          <a:bodyPr wrap="square">
+            <a:spAutoFit/>
+          </a:bodyPr>
+          <a:lstStyle/>
+          <a:p>
+            <a:pPr algn="l"/>
+            <a:r>
+              <a:rPr sz="950" b="0">
+                <a:solidFill>
+                  <a:srgbClr val="58A6FF"/>
+                </a:solidFill>
+              </a:rPr>
+              <a:t>데이터 σ × 2</a:t>
+            </a:r>
+          </a:p>
+        </p:txBody>
+      </p:sp>
+      <p:sp>
+        <p:nvSpPr>
+          <p:cNvPr id="85" name="Rectangle 84"/>
+          <p:cNvSpPr/>
+          <p:nvPr/>
+        </p:nvSpPr>
+        <p:spPr>
+          <a:xfrm>
+            <a:off x="5824728" y="4553712"/>
+            <a:ext cx="566928" cy="169164"/>
+          </a:xfrm>
+          <a:prstGeom prst="rect">
+            <a:avLst/>
+          </a:prstGeom>
+          <a:solidFill>
+            <a:srgbClr val="0D1933"/>
+          </a:solidFill>
+          <a:ln w="8890">
+            <a:solidFill>
+              <a:srgbClr val="58A6FF"/>
+            </a:solidFill>
+          </a:ln>
+          <a:effectLst/>
+        </p:spPr>
+        <p:style>
+          <a:lnRef idx="1">
+            <a:schemeClr val="accent1"/>
+          </a:lnRef>
+          <a:fillRef idx="3">
+            <a:schemeClr val="accent1"/>
+          </a:fillRef>
+          <a:effectRef idx="2">
+            <a:schemeClr val="accent1"/>
+          </a:effectRef>
+          <a:fontRef idx="minor">
+            <a:schemeClr val="lt1"/>
+          </a:fontRef>
+        </p:style>
+        <p:txBody>
+          <a:bodyPr rtlCol="0" anchor="ctr"/>
+          <a:lstStyle/>
+          <a:p>
+            <a:pPr algn="ctr"/>
+          </a:p>
+        </p:txBody>
+      </p:sp>
+      <p:sp>
+        <p:nvSpPr>
+          <p:cNvPr id="86" name="TextBox 85"/>
+          <p:cNvSpPr txBox="1"/>
+          <p:nvPr/>
+        </p:nvSpPr>
+        <p:spPr>
+          <a:xfrm>
+            <a:off x="5824728" y="4553712"/>
+            <a:ext cx="566928" cy="169164"/>
+          </a:xfrm>
+          <a:prstGeom prst="rect">
+            <a:avLst/>
+          </a:prstGeom>
+          <a:noFill/>
+        </p:spPr>
+        <p:txBody>
+          <a:bodyPr wrap="square">
+            <a:spAutoFit/>
+          </a:bodyPr>
+          <a:lstStyle/>
+          <a:p>
+            <a:pPr algn="ctr"/>
+            <a:r>
+              <a:rPr sz="800" b="0">
+                <a:solidFill>
+                  <a:srgbClr val="58A6FF"/>
+                </a:solidFill>
+              </a:rPr>
+              <a:t>데이터 기반</a:t>
+            </a:r>
+          </a:p>
+        </p:txBody>
+      </p:sp>
+      <p:sp>
+        <p:nvSpPr>
+          <p:cNvPr id="87" name="Rectangle 86"/>
+          <p:cNvSpPr/>
+          <p:nvPr/>
+        </p:nvSpPr>
+        <p:spPr>
+          <a:xfrm>
+            <a:off x="201168" y="4750308"/>
+            <a:ext cx="6217920" cy="224028"/>
+          </a:xfrm>
+          <a:prstGeom prst="rect">
+            <a:avLst/>
+          </a:prstGeom>
+          <a:solidFill>
+            <a:srgbClr val="13181E"/>
+          </a:solidFill>
+          <a:ln>
+            <a:noFill/>
+          </a:ln>
+          <a:effectLst/>
+        </p:spPr>
+        <p:style>
+          <a:lnRef idx="1">
+            <a:schemeClr val="accent1"/>
+          </a:lnRef>
+          <a:fillRef idx="3">
+            <a:schemeClr val="accent1"/>
+          </a:fillRef>
+          <a:effectRef idx="2">
+            <a:schemeClr val="accent1"/>
+          </a:effectRef>
+          <a:fontRef idx="minor">
+            <a:schemeClr val="lt1"/>
+          </a:fontRef>
+        </p:style>
+        <p:txBody>
+          <a:bodyPr rtlCol="0" anchor="ctr"/>
+          <a:lstStyle/>
+          <a:p>
+            <a:pPr algn="ctr"/>
+          </a:p>
+        </p:txBody>
+      </p:sp>
+      <p:sp>
+        <p:nvSpPr>
+          <p:cNvPr id="88" name="TextBox 87"/>
+          <p:cNvSpPr txBox="1"/>
+          <p:nvPr/>
+        </p:nvSpPr>
+        <p:spPr>
+          <a:xfrm>
+            <a:off x="274320" y="4768596"/>
+            <a:ext cx="2240280" cy="224028"/>
+          </a:xfrm>
+          <a:prstGeom prst="rect">
+            <a:avLst/>
+          </a:prstGeom>
+          <a:noFill/>
+        </p:spPr>
+        <p:txBody>
+          <a:bodyPr wrap="square">
+            <a:spAutoFit/>
+          </a:bodyPr>
+          <a:lstStyle/>
+          <a:p>
+            <a:pPr algn="l"/>
+            <a:r>
+              <a:rPr sz="950" b="0">
+                <a:solidFill>
+                  <a:srgbClr val="FFFFFF"/>
+                </a:solidFill>
+              </a:rPr>
+              <a:t>⑯ Lot-to-Lot</a:t>
+            </a:r>
+          </a:p>
+        </p:txBody>
+      </p:sp>
+      <p:sp>
+        <p:nvSpPr>
+          <p:cNvPr id="89" name="TextBox 88"/>
+          <p:cNvSpPr txBox="1"/>
+          <p:nvPr/>
+        </p:nvSpPr>
+        <p:spPr>
+          <a:xfrm>
+            <a:off x="2578608" y="4768596"/>
+            <a:ext cx="3291840" cy="224028"/>
+          </a:xfrm>
+          <a:prstGeom prst="rect">
+            <a:avLst/>
+          </a:prstGeom>
+          <a:noFill/>
+        </p:spPr>
+        <p:txBody>
+          <a:bodyPr wrap="square">
+            <a:spAutoFit/>
+          </a:bodyPr>
+          <a:lstStyle/>
+          <a:p>
+            <a:pPr algn="l"/>
+            <a:r>
+              <a:rPr sz="950" b="0">
+                <a:solidFill>
+                  <a:srgbClr val="58A6FF"/>
+                </a:solidFill>
+              </a:rPr>
+              <a:t>데이터 σ × 2</a:t>
+            </a:r>
+          </a:p>
+        </p:txBody>
+      </p:sp>
+      <p:sp>
+        <p:nvSpPr>
+          <p:cNvPr id="90" name="Rectangle 89"/>
+          <p:cNvSpPr/>
+          <p:nvPr/>
+        </p:nvSpPr>
+        <p:spPr>
+          <a:xfrm>
+            <a:off x="5824728" y="4777740"/>
+            <a:ext cx="566928" cy="169164"/>
+          </a:xfrm>
+          <a:prstGeom prst="rect">
+            <a:avLst/>
+          </a:prstGeom>
+          <a:solidFill>
+            <a:srgbClr val="0D1933"/>
+          </a:solidFill>
+          <a:ln w="8890">
+            <a:solidFill>
+              <a:srgbClr val="58A6FF"/>
+            </a:solidFill>
+          </a:ln>
+          <a:effectLst/>
+        </p:spPr>
+        <p:style>
+          <a:lnRef idx="1">
+            <a:schemeClr val="accent1"/>
+          </a:lnRef>
+          <a:fillRef idx="3">
+            <a:schemeClr val="accent1"/>
+          </a:fillRef>
+          <a:effectRef idx="2">
+            <a:schemeClr val="accent1"/>
+          </a:effectRef>
+          <a:fontRef idx="minor">
+            <a:schemeClr val="lt1"/>
+          </a:fontRef>
+        </p:style>
+        <p:txBody>
+          <a:bodyPr rtlCol="0" anchor="ctr"/>
+          <a:lstStyle/>
+          <a:p>
+            <a:pPr algn="ctr"/>
+          </a:p>
+        </p:txBody>
+      </p:sp>
+      <p:sp>
+        <p:nvSpPr>
+          <p:cNvPr id="91" name="TextBox 90"/>
+          <p:cNvSpPr txBox="1"/>
+          <p:nvPr/>
+        </p:nvSpPr>
+        <p:spPr>
+          <a:xfrm>
+            <a:off x="5824728" y="4777740"/>
+            <a:ext cx="566928" cy="169164"/>
+          </a:xfrm>
+          <a:prstGeom prst="rect">
+            <a:avLst/>
+          </a:prstGeom>
+          <a:noFill/>
+        </p:spPr>
+        <p:txBody>
+          <a:bodyPr wrap="square">
+            <a:spAutoFit/>
+          </a:bodyPr>
+          <a:lstStyle/>
+          <a:p>
+            <a:pPr algn="ctr"/>
+            <a:r>
+              <a:rPr sz="800" b="0">
+                <a:solidFill>
+                  <a:srgbClr val="58A6FF"/>
+                </a:solidFill>
+              </a:rPr>
+              <a:t>데이터 기반</a:t>
+            </a:r>
+          </a:p>
+        </p:txBody>
+      </p:sp>
+      <p:sp>
+        <p:nvSpPr>
+          <p:cNvPr id="92" name="Rectangle 91"/>
+          <p:cNvSpPr/>
+          <p:nvPr/>
+        </p:nvSpPr>
+        <p:spPr>
+          <a:xfrm>
+            <a:off x="201168" y="4974336"/>
+            <a:ext cx="6217920" cy="224028"/>
+          </a:xfrm>
+          <a:prstGeom prst="rect">
+            <a:avLst/>
+          </a:prstGeom>
+          <a:solidFill>
+            <a:srgbClr val="161B22"/>
+          </a:solidFill>
+          <a:ln>
+            <a:noFill/>
+          </a:ln>
+          <a:effectLst/>
+        </p:spPr>
+        <p:style>
+          <a:lnRef idx="1">
+            <a:schemeClr val="accent1"/>
+          </a:lnRef>
+          <a:fillRef idx="3">
+            <a:schemeClr val="accent1"/>
+          </a:fillRef>
+          <a:effectRef idx="2">
+            <a:schemeClr val="accent1"/>
+          </a:effectRef>
+          <a:fontRef idx="minor">
+            <a:schemeClr val="lt1"/>
+          </a:fontRef>
+        </p:style>
+        <p:txBody>
+          <a:bodyPr rtlCol="0" anchor="ctr"/>
+          <a:lstStyle/>
+          <a:p>
+            <a:pPr algn="ctr"/>
+          </a:p>
+        </p:txBody>
+      </p:sp>
+      <p:sp>
+        <p:nvSpPr>
+          <p:cNvPr id="93" name="TextBox 92"/>
+          <p:cNvSpPr txBox="1"/>
+          <p:nvPr/>
+        </p:nvSpPr>
+        <p:spPr>
+          <a:xfrm>
+            <a:off x="274320" y="4992624"/>
+            <a:ext cx="2240280" cy="224028"/>
+          </a:xfrm>
+          <a:prstGeom prst="rect">
+            <a:avLst/>
+          </a:prstGeom>
+          <a:noFill/>
+        </p:spPr>
+        <p:txBody>
+          <a:bodyPr wrap="square">
+            <a:spAutoFit/>
+          </a:bodyPr>
+          <a:lstStyle/>
+          <a:p>
+            <a:pPr algn="l"/>
+            <a:r>
+              <a:rPr sz="950" b="0">
+                <a:solidFill>
+                  <a:srgbClr val="FFFFFF"/>
+                </a:solidFill>
+              </a:rPr>
+              <a:t>⑰ t-검정 계단 변화</a:t>
+            </a:r>
+          </a:p>
+        </p:txBody>
+      </p:sp>
+      <p:sp>
+        <p:nvSpPr>
+          <p:cNvPr id="94" name="TextBox 93"/>
+          <p:cNvSpPr txBox="1"/>
+          <p:nvPr/>
+        </p:nvSpPr>
+        <p:spPr>
+          <a:xfrm>
+            <a:off x="2578608" y="4992624"/>
+            <a:ext cx="3291840" cy="224028"/>
+          </a:xfrm>
+          <a:prstGeom prst="rect">
+            <a:avLst/>
+          </a:prstGeom>
+          <a:noFill/>
+        </p:spPr>
+        <p:txBody>
+          <a:bodyPr wrap="square">
+            <a:spAutoFit/>
+          </a:bodyPr>
+          <a:lstStyle/>
+          <a:p>
+            <a:pPr algn="l"/>
+            <a:r>
+              <a:rPr sz="950" b="0">
+                <a:solidFill>
+                  <a:srgbClr val="58A6FF"/>
+                </a:solidFill>
+              </a:rPr>
+              <a:t>데이터 σ × 3</a:t>
+            </a:r>
+          </a:p>
+        </p:txBody>
+      </p:sp>
+      <p:sp>
+        <p:nvSpPr>
+          <p:cNvPr id="95" name="Rectangle 94"/>
+          <p:cNvSpPr/>
+          <p:nvPr/>
+        </p:nvSpPr>
+        <p:spPr>
+          <a:xfrm>
+            <a:off x="5824728" y="5001768"/>
+            <a:ext cx="566928" cy="169164"/>
+          </a:xfrm>
+          <a:prstGeom prst="rect">
+            <a:avLst/>
+          </a:prstGeom>
+          <a:solidFill>
+            <a:srgbClr val="0D1933"/>
+          </a:solidFill>
+          <a:ln w="8890">
+            <a:solidFill>
+              <a:srgbClr val="58A6FF"/>
+            </a:solidFill>
+          </a:ln>
+          <a:effectLst/>
+        </p:spPr>
+        <p:style>
+          <a:lnRef idx="1">
+            <a:schemeClr val="accent1"/>
+          </a:lnRef>
+          <a:fillRef idx="3">
+            <a:schemeClr val="accent1"/>
+          </a:fillRef>
+          <a:effectRef idx="2">
+            <a:schemeClr val="accent1"/>
+          </a:effectRef>
+          <a:fontRef idx="minor">
+            <a:schemeClr val="lt1"/>
+          </a:fontRef>
+        </p:style>
+        <p:txBody>
+          <a:bodyPr rtlCol="0" anchor="ctr"/>
+          <a:lstStyle/>
+          <a:p>
+            <a:pPr algn="ctr"/>
+          </a:p>
+        </p:txBody>
+      </p:sp>
+      <p:sp>
+        <p:nvSpPr>
+          <p:cNvPr id="96" name="TextBox 95"/>
+          <p:cNvSpPr txBox="1"/>
+          <p:nvPr/>
+        </p:nvSpPr>
+        <p:spPr>
+          <a:xfrm>
+            <a:off x="5824728" y="5001768"/>
+            <a:ext cx="566928" cy="169164"/>
+          </a:xfrm>
+          <a:prstGeom prst="rect">
+            <a:avLst/>
+          </a:prstGeom>
+          <a:noFill/>
+        </p:spPr>
+        <p:txBody>
+          <a:bodyPr wrap="square">
+            <a:spAutoFit/>
+          </a:bodyPr>
+          <a:lstStyle/>
+          <a:p>
+            <a:pPr algn="ctr"/>
+            <a:r>
+              <a:rPr sz="800" b="0">
+                <a:solidFill>
+                  <a:srgbClr val="58A6FF"/>
+                </a:solidFill>
+              </a:rPr>
+              <a:t>데이터 기반</a:t>
+            </a:r>
+          </a:p>
+        </p:txBody>
+      </p:sp>
+      <p:sp>
+        <p:nvSpPr>
+          <p:cNvPr id="97" name="Rectangle 96"/>
+          <p:cNvSpPr/>
+          <p:nvPr/>
+        </p:nvSpPr>
+        <p:spPr>
+          <a:xfrm>
+            <a:off x="201168" y="5198364"/>
+            <a:ext cx="6217920" cy="224028"/>
+          </a:xfrm>
+          <a:prstGeom prst="rect">
+            <a:avLst/>
+          </a:prstGeom>
+          <a:solidFill>
+            <a:srgbClr val="13181E"/>
+          </a:solidFill>
+          <a:ln>
+            <a:noFill/>
+          </a:ln>
+          <a:effectLst/>
+        </p:spPr>
+        <p:style>
+          <a:lnRef idx="1">
+            <a:schemeClr val="accent1"/>
+          </a:lnRef>
+          <a:fillRef idx="3">
+            <a:schemeClr val="accent1"/>
+          </a:fillRef>
+          <a:effectRef idx="2">
+            <a:schemeClr val="accent1"/>
+          </a:effectRef>
+          <a:fontRef idx="minor">
+            <a:schemeClr val="lt1"/>
+          </a:fontRef>
+        </p:style>
+        <p:txBody>
+          <a:bodyPr rtlCol="0" anchor="ctr"/>
+          <a:lstStyle/>
+          <a:p>
+            <a:pPr algn="ctr"/>
+          </a:p>
+        </p:txBody>
+      </p:sp>
+      <p:sp>
+        <p:nvSpPr>
+          <p:cNvPr id="98" name="TextBox 97"/>
+          <p:cNvSpPr txBox="1"/>
+          <p:nvPr/>
+        </p:nvSpPr>
+        <p:spPr>
+          <a:xfrm>
+            <a:off x="274320" y="5216652"/>
+            <a:ext cx="2240280" cy="224028"/>
+          </a:xfrm>
+          <a:prstGeom prst="rect">
+            <a:avLst/>
+          </a:prstGeom>
+          <a:noFill/>
+        </p:spPr>
+        <p:txBody>
+          <a:bodyPr wrap="square">
+            <a:spAutoFit/>
+          </a:bodyPr>
+          <a:lstStyle/>
+          <a:p>
+            <a:pPr algn="l"/>
+            <a:r>
+              <a:rPr sz="950" b="0">
+                <a:solidFill>
+                  <a:srgbClr val="FFFFFF"/>
+                </a:solidFill>
+              </a:rPr>
+              <a:t>⑱ F-검정 분산 급변</a:t>
+            </a:r>
+          </a:p>
+        </p:txBody>
+      </p:sp>
+      <p:sp>
+        <p:nvSpPr>
+          <p:cNvPr id="99" name="TextBox 98"/>
+          <p:cNvSpPr txBox="1"/>
+          <p:nvPr/>
+        </p:nvSpPr>
+        <p:spPr>
+          <a:xfrm>
+            <a:off x="2578608" y="5216652"/>
+            <a:ext cx="3291840" cy="224028"/>
+          </a:xfrm>
+          <a:prstGeom prst="rect">
+            <a:avLst/>
+          </a:prstGeom>
+          <a:noFill/>
+        </p:spPr>
+        <p:txBody>
+          <a:bodyPr wrap="square">
+            <a:spAutoFit/>
+          </a:bodyPr>
+          <a:lstStyle/>
+          <a:p>
+            <a:pPr algn="l"/>
+            <a:r>
+              <a:rPr sz="950" b="0">
+                <a:solidFill>
+                  <a:srgbClr val="E3B341"/>
+                </a:solidFill>
+              </a:rPr>
+              <a:t>항상 4  (분산비 기준)</a:t>
+            </a:r>
+          </a:p>
+        </p:txBody>
+      </p:sp>
+      <p:sp>
+        <p:nvSpPr>
+          <p:cNvPr id="100" name="Rectangle 99"/>
+          <p:cNvSpPr/>
+          <p:nvPr/>
+        </p:nvSpPr>
+        <p:spPr>
+          <a:xfrm>
+            <a:off x="5824728" y="5225796"/>
+            <a:ext cx="566928" cy="169164"/>
+          </a:xfrm>
+          <a:prstGeom prst="rect">
+            <a:avLst/>
+          </a:prstGeom>
+          <a:solidFill>
+            <a:srgbClr val="1A1200"/>
+          </a:solidFill>
+          <a:ln w="8890">
+            <a:solidFill>
+              <a:srgbClr val="E3B341"/>
+            </a:solidFill>
+          </a:ln>
+          <a:effectLst/>
+        </p:spPr>
+        <p:style>
+          <a:lnRef idx="1">
+            <a:schemeClr val="accent1"/>
+          </a:lnRef>
+          <a:fillRef idx="3">
+            <a:schemeClr val="accent1"/>
+          </a:fillRef>
+          <a:effectRef idx="2">
+            <a:schemeClr val="accent1"/>
+          </a:effectRef>
+          <a:fontRef idx="minor">
+            <a:schemeClr val="lt1"/>
+          </a:fontRef>
+        </p:style>
+        <p:txBody>
+          <a:bodyPr rtlCol="0" anchor="ctr"/>
+          <a:lstStyle/>
+          <a:p>
+            <a:pPr algn="ctr"/>
+          </a:p>
+        </p:txBody>
+      </p:sp>
+      <p:sp>
+        <p:nvSpPr>
+          <p:cNvPr id="101" name="TextBox 100"/>
+          <p:cNvSpPr txBox="1"/>
+          <p:nvPr/>
+        </p:nvSpPr>
+        <p:spPr>
+          <a:xfrm>
+            <a:off x="5824728" y="5225796"/>
+            <a:ext cx="566928" cy="169164"/>
+          </a:xfrm>
+          <a:prstGeom prst="rect">
+            <a:avLst/>
+          </a:prstGeom>
+          <a:noFill/>
+        </p:spPr>
+        <p:txBody>
+          <a:bodyPr wrap="square">
+            <a:spAutoFit/>
+          </a:bodyPr>
+          <a:lstStyle/>
+          <a:p>
+            <a:pPr algn="ctr"/>
+            <a:r>
+              <a:rPr sz="800" b="0">
+                <a:solidFill>
+                  <a:srgbClr val="E3B341"/>
+                </a:solidFill>
+              </a:rPr>
+              <a:t>고정값</a:t>
+            </a:r>
+          </a:p>
+        </p:txBody>
+      </p:sp>
+      <p:sp>
+        <p:nvSpPr>
+          <p:cNvPr id="102" name="Rectangle 101"/>
+          <p:cNvSpPr/>
+          <p:nvPr/>
+        </p:nvSpPr>
+        <p:spPr>
+          <a:xfrm>
+            <a:off x="201168" y="5422392"/>
+            <a:ext cx="6217920" cy="224028"/>
+          </a:xfrm>
+          <a:prstGeom prst="rect">
+            <a:avLst/>
+          </a:prstGeom>
+          <a:solidFill>
+            <a:srgbClr val="161B22"/>
+          </a:solidFill>
+          <a:ln>
+            <a:noFill/>
+          </a:ln>
+          <a:effectLst/>
+        </p:spPr>
+        <p:style>
+          <a:lnRef idx="1">
+            <a:schemeClr val="accent1"/>
+          </a:lnRef>
+          <a:fillRef idx="3">
+            <a:schemeClr val="accent1"/>
+          </a:fillRef>
+          <a:effectRef idx="2">
+            <a:schemeClr val="accent1"/>
+          </a:effectRef>
+          <a:fontRef idx="minor">
+            <a:schemeClr val="lt1"/>
+          </a:fontRef>
+        </p:style>
+        <p:txBody>
+          <a:bodyPr rtlCol="0" anchor="ctr"/>
+          <a:lstStyle/>
+          <a:p>
+            <a:pPr algn="ctr"/>
+          </a:p>
+        </p:txBody>
+      </p:sp>
+      <p:sp>
+        <p:nvSpPr>
+          <p:cNvPr id="103" name="TextBox 102"/>
+          <p:cNvSpPr txBox="1"/>
+          <p:nvPr/>
+        </p:nvSpPr>
+        <p:spPr>
+          <a:xfrm>
+            <a:off x="274320" y="5440680"/>
+            <a:ext cx="2240280" cy="224028"/>
+          </a:xfrm>
+          <a:prstGeom prst="rect">
+            <a:avLst/>
+          </a:prstGeom>
+          <a:noFill/>
+        </p:spPr>
+        <p:txBody>
+          <a:bodyPr wrap="square">
+            <a:spAutoFit/>
+          </a:bodyPr>
+          <a:lstStyle/>
+          <a:p>
+            <a:pPr algn="l"/>
+            <a:r>
+              <a:rPr sz="950" b="0">
+                <a:solidFill>
+                  <a:srgbClr val="FFFFFF"/>
+                </a:solidFill>
+              </a:rPr>
+              <a:t>⑲ 이동 통계 관리한계</a:t>
+            </a:r>
+          </a:p>
+        </p:txBody>
+      </p:sp>
+      <p:sp>
+        <p:nvSpPr>
+          <p:cNvPr id="104" name="TextBox 103"/>
+          <p:cNvSpPr txBox="1"/>
+          <p:nvPr/>
+        </p:nvSpPr>
+        <p:spPr>
+          <a:xfrm>
+            <a:off x="2578608" y="5440680"/>
+            <a:ext cx="3291840" cy="224028"/>
+          </a:xfrm>
+          <a:prstGeom prst="rect">
+            <a:avLst/>
+          </a:prstGeom>
+          <a:noFill/>
+        </p:spPr>
+        <p:txBody>
+          <a:bodyPr wrap="square">
+            <a:spAutoFit/>
+          </a:bodyPr>
+          <a:lstStyle/>
+          <a:p>
+            <a:pPr algn="l"/>
+            <a:r>
+              <a:rPr sz="950" b="0">
+                <a:solidFill>
+                  <a:srgbClr val="E3B341"/>
+                </a:solidFill>
+              </a:rPr>
+              <a:t>항상 3  (3σ 동적 관리한계)</a:t>
+            </a:r>
+          </a:p>
+        </p:txBody>
+      </p:sp>
+      <p:sp>
+        <p:nvSpPr>
+          <p:cNvPr id="105" name="Rectangle 104"/>
+          <p:cNvSpPr/>
+          <p:nvPr/>
+        </p:nvSpPr>
+        <p:spPr>
+          <a:xfrm>
+            <a:off x="5824728" y="5449824"/>
+            <a:ext cx="566928" cy="169164"/>
+          </a:xfrm>
+          <a:prstGeom prst="rect">
+            <a:avLst/>
+          </a:prstGeom>
+          <a:solidFill>
+            <a:srgbClr val="1A1200"/>
+          </a:solidFill>
+          <a:ln w="8890">
+            <a:solidFill>
+              <a:srgbClr val="E3B341"/>
+            </a:solidFill>
+          </a:ln>
+          <a:effectLst/>
+        </p:spPr>
+        <p:style>
+          <a:lnRef idx="1">
+            <a:schemeClr val="accent1"/>
+          </a:lnRef>
+          <a:fillRef idx="3">
+            <a:schemeClr val="accent1"/>
+          </a:fillRef>
+          <a:effectRef idx="2">
+            <a:schemeClr val="accent1"/>
+          </a:effectRef>
+          <a:fontRef idx="minor">
+            <a:schemeClr val="lt1"/>
+          </a:fontRef>
+        </p:style>
+        <p:txBody>
+          <a:bodyPr rtlCol="0" anchor="ctr"/>
+          <a:lstStyle/>
+          <a:p>
+            <a:pPr algn="ctr"/>
+          </a:p>
+        </p:txBody>
+      </p:sp>
+      <p:sp>
+        <p:nvSpPr>
+          <p:cNvPr id="106" name="TextBox 105"/>
+          <p:cNvSpPr txBox="1"/>
+          <p:nvPr/>
+        </p:nvSpPr>
+        <p:spPr>
+          <a:xfrm>
+            <a:off x="5824728" y="5449824"/>
+            <a:ext cx="566928" cy="169164"/>
+          </a:xfrm>
+          <a:prstGeom prst="rect">
+            <a:avLst/>
+          </a:prstGeom>
+          <a:noFill/>
+        </p:spPr>
+        <p:txBody>
+          <a:bodyPr wrap="square">
+            <a:spAutoFit/>
+          </a:bodyPr>
+          <a:lstStyle/>
+          <a:p>
+            <a:pPr algn="ctr"/>
+            <a:r>
+              <a:rPr sz="800" b="0">
+                <a:solidFill>
+                  <a:srgbClr val="E3B341"/>
+                </a:solidFill>
+              </a:rPr>
+              <a:t>고정값</a:t>
+            </a:r>
+          </a:p>
+        </p:txBody>
+      </p:sp>
+      <p:sp>
+        <p:nvSpPr>
+          <p:cNvPr id="107" name="Rectangle 106"/>
+          <p:cNvSpPr/>
+          <p:nvPr/>
+        </p:nvSpPr>
+        <p:spPr>
+          <a:xfrm>
+            <a:off x="201168" y="5646420"/>
+            <a:ext cx="6217920" cy="224028"/>
+          </a:xfrm>
+          <a:prstGeom prst="rect">
+            <a:avLst/>
+          </a:prstGeom>
+          <a:solidFill>
+            <a:srgbClr val="13181E"/>
+          </a:solidFill>
+          <a:ln>
+            <a:noFill/>
+          </a:ln>
+          <a:effectLst/>
+        </p:spPr>
+        <p:style>
+          <a:lnRef idx="1">
+            <a:schemeClr val="accent1"/>
+          </a:lnRef>
+          <a:fillRef idx="3">
+            <a:schemeClr val="accent1"/>
+          </a:fillRef>
+          <a:effectRef idx="2">
+            <a:schemeClr val="accent1"/>
+          </a:effectRef>
+          <a:fontRef idx="minor">
+            <a:schemeClr val="lt1"/>
+          </a:fontRef>
+        </p:style>
+        <p:txBody>
+          <a:bodyPr rtlCol="0" anchor="ctr"/>
+          <a:lstStyle/>
+          <a:p>
+            <a:pPr algn="ctr"/>
+          </a:p>
+        </p:txBody>
+      </p:sp>
+      <p:sp>
+        <p:nvSpPr>
+          <p:cNvPr id="108" name="TextBox 107"/>
+          <p:cNvSpPr txBox="1"/>
+          <p:nvPr/>
+        </p:nvSpPr>
+        <p:spPr>
+          <a:xfrm>
+            <a:off x="274320" y="5664708"/>
+            <a:ext cx="2240280" cy="224028"/>
+          </a:xfrm>
+          <a:prstGeom prst="rect">
+            <a:avLst/>
+          </a:prstGeom>
+          <a:noFill/>
+        </p:spPr>
+        <p:txBody>
+          <a:bodyPr wrap="square">
+            <a:spAutoFit/>
+          </a:bodyPr>
+          <a:lstStyle/>
+          <a:p>
+            <a:pPr algn="l"/>
+            <a:r>
+              <a:rPr sz="950" b="0">
+                <a:solidFill>
+                  <a:srgbClr val="FFFFFF"/>
+                </a:solidFill>
+              </a:rPr>
+              <a:t>⑳ 설비간 편차</a:t>
+            </a:r>
+          </a:p>
+        </p:txBody>
+      </p:sp>
+      <p:sp>
+        <p:nvSpPr>
+          <p:cNvPr id="109" name="TextBox 108"/>
+          <p:cNvSpPr txBox="1"/>
+          <p:nvPr/>
+        </p:nvSpPr>
+        <p:spPr>
+          <a:xfrm>
+            <a:off x="2578608" y="5664708"/>
+            <a:ext cx="3291840" cy="224028"/>
+          </a:xfrm>
+          <a:prstGeom prst="rect">
+            <a:avLst/>
+          </a:prstGeom>
+          <a:noFill/>
+        </p:spPr>
+        <p:txBody>
+          <a:bodyPr wrap="square">
+            <a:spAutoFit/>
+          </a:bodyPr>
+          <a:lstStyle/>
+          <a:p>
+            <a:pPr algn="l"/>
+            <a:r>
+              <a:rPr sz="950" b="0">
+                <a:solidFill>
+                  <a:srgbClr val="E3B341"/>
+                </a:solidFill>
+              </a:rPr>
+              <a:t>항상 2  (2σ 기준)</a:t>
+            </a:r>
+          </a:p>
+        </p:txBody>
+      </p:sp>
+      <p:sp>
+        <p:nvSpPr>
+          <p:cNvPr id="110" name="Rectangle 109"/>
+          <p:cNvSpPr/>
+          <p:nvPr/>
+        </p:nvSpPr>
+        <p:spPr>
+          <a:xfrm>
+            <a:off x="5824728" y="5673852"/>
+            <a:ext cx="566928" cy="169164"/>
+          </a:xfrm>
+          <a:prstGeom prst="rect">
+            <a:avLst/>
+          </a:prstGeom>
+          <a:solidFill>
+            <a:srgbClr val="1A1200"/>
+          </a:solidFill>
+          <a:ln w="8890">
+            <a:solidFill>
+              <a:srgbClr val="E3B341"/>
+            </a:solidFill>
+          </a:ln>
+          <a:effectLst/>
+        </p:spPr>
+        <p:style>
+          <a:lnRef idx="1">
+            <a:schemeClr val="accent1"/>
+          </a:lnRef>
+          <a:fillRef idx="3">
+            <a:schemeClr val="accent1"/>
+          </a:fillRef>
+          <a:effectRef idx="2">
+            <a:schemeClr val="accent1"/>
+          </a:effectRef>
+          <a:fontRef idx="minor">
+            <a:schemeClr val="lt1"/>
+          </a:fontRef>
+        </p:style>
+        <p:txBody>
+          <a:bodyPr rtlCol="0" anchor="ctr"/>
+          <a:lstStyle/>
+          <a:p>
+            <a:pPr algn="ctr"/>
+          </a:p>
+        </p:txBody>
+      </p:sp>
+      <p:sp>
+        <p:nvSpPr>
+          <p:cNvPr id="111" name="TextBox 110"/>
+          <p:cNvSpPr txBox="1"/>
+          <p:nvPr/>
+        </p:nvSpPr>
+        <p:spPr>
+          <a:xfrm>
+            <a:off x="5824728" y="5673852"/>
+            <a:ext cx="566928" cy="169164"/>
+          </a:xfrm>
+          <a:prstGeom prst="rect">
+            <a:avLst/>
+          </a:prstGeom>
+          <a:noFill/>
+        </p:spPr>
+        <p:txBody>
+          <a:bodyPr wrap="square">
+            <a:spAutoFit/>
+          </a:bodyPr>
+          <a:lstStyle/>
+          <a:p>
+            <a:pPr algn="ctr"/>
+            <a:r>
+              <a:rPr sz="800" b="0">
+                <a:solidFill>
+                  <a:srgbClr val="E3B341"/>
+                </a:solidFill>
+              </a:rPr>
+              <a:t>고정값</a:t>
+            </a:r>
+          </a:p>
+        </p:txBody>
+      </p:sp>
+      <p:sp>
+        <p:nvSpPr>
+          <p:cNvPr id="112" name="Rectangle 111"/>
+          <p:cNvSpPr/>
+          <p:nvPr/>
+        </p:nvSpPr>
+        <p:spPr>
+          <a:xfrm>
+            <a:off x="201168" y="5870448"/>
+            <a:ext cx="6217920" cy="224028"/>
+          </a:xfrm>
+          <a:prstGeom prst="rect">
+            <a:avLst/>
+          </a:prstGeom>
+          <a:solidFill>
+            <a:srgbClr val="161B22"/>
+          </a:solidFill>
+          <a:ln>
+            <a:noFill/>
+          </a:ln>
+          <a:effectLst/>
+        </p:spPr>
+        <p:style>
+          <a:lnRef idx="1">
+            <a:schemeClr val="accent1"/>
+          </a:lnRef>
+          <a:fillRef idx="3">
+            <a:schemeClr val="accent1"/>
+          </a:fillRef>
+          <a:effectRef idx="2">
+            <a:schemeClr val="accent1"/>
+          </a:effectRef>
+          <a:fontRef idx="minor">
+            <a:schemeClr val="lt1"/>
+          </a:fontRef>
+        </p:style>
+        <p:txBody>
+          <a:bodyPr rtlCol="0" anchor="ctr"/>
+          <a:lstStyle/>
+          <a:p>
+            <a:pPr algn="ctr"/>
+          </a:p>
+        </p:txBody>
+      </p:sp>
+      <p:sp>
+        <p:nvSpPr>
+          <p:cNvPr id="113" name="TextBox 112"/>
+          <p:cNvSpPr txBox="1"/>
+          <p:nvPr/>
+        </p:nvSpPr>
+        <p:spPr>
+          <a:xfrm>
+            <a:off x="274320" y="5888736"/>
+            <a:ext cx="2240280" cy="224028"/>
+          </a:xfrm>
+          <a:prstGeom prst="rect">
+            <a:avLst/>
+          </a:prstGeom>
+          <a:noFill/>
+        </p:spPr>
+        <p:txBody>
+          <a:bodyPr wrap="square">
+            <a:spAutoFit/>
+          </a:bodyPr>
+          <a:lstStyle/>
+          <a:p>
+            <a:pPr algn="l"/>
+            <a:r>
+              <a:rPr sz="950" b="0">
+                <a:solidFill>
+                  <a:srgbClr val="FFFFFF"/>
+                </a:solidFill>
+              </a:rPr>
+              <a:t>㉑ Cp/Cpk 공정 능력</a:t>
+            </a:r>
+          </a:p>
+        </p:txBody>
+      </p:sp>
+      <p:sp>
+        <p:nvSpPr>
+          <p:cNvPr id="114" name="TextBox 113"/>
+          <p:cNvSpPr txBox="1"/>
+          <p:nvPr/>
+        </p:nvSpPr>
+        <p:spPr>
+          <a:xfrm>
+            <a:off x="2578608" y="5888736"/>
+            <a:ext cx="3291840" cy="224028"/>
+          </a:xfrm>
+          <a:prstGeom prst="rect">
+            <a:avLst/>
+          </a:prstGeom>
+          <a:noFill/>
+        </p:spPr>
+        <p:txBody>
+          <a:bodyPr wrap="square">
+            <a:spAutoFit/>
+          </a:bodyPr>
+          <a:lstStyle/>
+          <a:p>
+            <a:pPr algn="l"/>
+            <a:r>
+              <a:rPr sz="950" b="0">
+                <a:solidFill>
+                  <a:srgbClr val="E3B341"/>
+                </a:solidFill>
+              </a:rPr>
+              <a:t>항상 1.33  (공정 능력 표준)</a:t>
+            </a:r>
+          </a:p>
+        </p:txBody>
+      </p:sp>
+      <p:sp>
+        <p:nvSpPr>
+          <p:cNvPr id="115" name="Rectangle 114"/>
+          <p:cNvSpPr/>
+          <p:nvPr/>
+        </p:nvSpPr>
+        <p:spPr>
+          <a:xfrm>
+            <a:off x="5824728" y="5897880"/>
+            <a:ext cx="566928" cy="169164"/>
+          </a:xfrm>
+          <a:prstGeom prst="rect">
+            <a:avLst/>
+          </a:prstGeom>
+          <a:solidFill>
+            <a:srgbClr val="1A1200"/>
+          </a:solidFill>
+          <a:ln w="8890">
+            <a:solidFill>
+              <a:srgbClr val="E3B341"/>
+            </a:solidFill>
+          </a:ln>
+          <a:effectLst/>
+        </p:spPr>
+        <p:style>
+          <a:lnRef idx="1">
+            <a:schemeClr val="accent1"/>
+          </a:lnRef>
+          <a:fillRef idx="3">
+            <a:schemeClr val="accent1"/>
+          </a:fillRef>
+          <a:effectRef idx="2">
+            <a:schemeClr val="accent1"/>
+          </a:effectRef>
+          <a:fontRef idx="minor">
+            <a:schemeClr val="lt1"/>
+          </a:fontRef>
+        </p:style>
+        <p:txBody>
+          <a:bodyPr rtlCol="0" anchor="ctr"/>
+          <a:lstStyle/>
+          <a:p>
+            <a:pPr algn="ctr"/>
+          </a:p>
+        </p:txBody>
+      </p:sp>
+      <p:sp>
+        <p:nvSpPr>
+          <p:cNvPr id="116" name="TextBox 115"/>
+          <p:cNvSpPr txBox="1"/>
+          <p:nvPr/>
+        </p:nvSpPr>
+        <p:spPr>
+          <a:xfrm>
+            <a:off x="5824728" y="5897880"/>
+            <a:ext cx="566928" cy="169164"/>
+          </a:xfrm>
+          <a:prstGeom prst="rect">
+            <a:avLst/>
+          </a:prstGeom>
+          <a:noFill/>
+        </p:spPr>
+        <p:txBody>
+          <a:bodyPr wrap="square">
+            <a:spAutoFit/>
+          </a:bodyPr>
+          <a:lstStyle/>
+          <a:p>
+            <a:pPr algn="ctr"/>
+            <a:r>
+              <a:rPr sz="800" b="0">
+                <a:solidFill>
+                  <a:srgbClr val="E3B341"/>
+                </a:solidFill>
+              </a:rPr>
+              <a:t>고정값</a:t>
+            </a:r>
+          </a:p>
+        </p:txBody>
+      </p:sp>
+      <p:sp>
+        <p:nvSpPr>
+          <p:cNvPr id="117" name="Rectangle 116"/>
+          <p:cNvSpPr/>
+          <p:nvPr/>
+        </p:nvSpPr>
+        <p:spPr>
+          <a:xfrm>
+            <a:off x="201168" y="6094476"/>
+            <a:ext cx="6217920" cy="224028"/>
+          </a:xfrm>
+          <a:prstGeom prst="rect">
+            <a:avLst/>
+          </a:prstGeom>
+          <a:solidFill>
+            <a:srgbClr val="13181E"/>
+          </a:solidFill>
+          <a:ln>
+            <a:noFill/>
+          </a:ln>
+          <a:effectLst/>
+        </p:spPr>
+        <p:style>
+          <a:lnRef idx="1">
+            <a:schemeClr val="accent1"/>
+          </a:lnRef>
+          <a:fillRef idx="3">
+            <a:schemeClr val="accent1"/>
+          </a:fillRef>
+          <a:effectRef idx="2">
+            <a:schemeClr val="accent1"/>
+          </a:effectRef>
+          <a:fontRef idx="minor">
+            <a:schemeClr val="lt1"/>
+          </a:fontRef>
+        </p:style>
+        <p:txBody>
+          <a:bodyPr rtlCol="0" anchor="ctr"/>
+          <a:lstStyle/>
+          <a:p>
+            <a:pPr algn="ctr"/>
+          </a:p>
+        </p:txBody>
+      </p:sp>
+      <p:sp>
+        <p:nvSpPr>
+          <p:cNvPr id="118" name="TextBox 117"/>
+          <p:cNvSpPr txBox="1"/>
+          <p:nvPr/>
+        </p:nvSpPr>
+        <p:spPr>
+          <a:xfrm>
+            <a:off x="274320" y="6112764"/>
+            <a:ext cx="2240280" cy="224028"/>
+          </a:xfrm>
+          <a:prstGeom prst="rect">
+            <a:avLst/>
+          </a:prstGeom>
+          <a:noFill/>
+        </p:spPr>
+        <p:txBody>
+          <a:bodyPr wrap="square">
+            <a:spAutoFit/>
+          </a:bodyPr>
+          <a:lstStyle/>
+          <a:p>
+            <a:pPr algn="l"/>
+            <a:r>
+              <a:rPr sz="950" b="0">
+                <a:solidFill>
+                  <a:srgbClr val="FFFFFF"/>
+                </a:solidFill>
+              </a:rPr>
+              <a:t>㉒ Nelson 8개 규칙</a:t>
+            </a:r>
+          </a:p>
+        </p:txBody>
+      </p:sp>
+      <p:sp>
+        <p:nvSpPr>
+          <p:cNvPr id="119" name="TextBox 118"/>
+          <p:cNvSpPr txBox="1"/>
+          <p:nvPr/>
+        </p:nvSpPr>
+        <p:spPr>
+          <a:xfrm>
+            <a:off x="2578608" y="6112764"/>
+            <a:ext cx="3291840" cy="224028"/>
+          </a:xfrm>
+          <a:prstGeom prst="rect">
+            <a:avLst/>
+          </a:prstGeom>
+          <a:noFill/>
+        </p:spPr>
+        <p:txBody>
+          <a:bodyPr wrap="square">
+            <a:spAutoFit/>
+          </a:bodyPr>
+          <a:lstStyle/>
+          <a:p>
+            <a:pPr algn="l"/>
+            <a:r>
+              <a:rPr sz="950" b="0">
+                <a:solidFill>
+                  <a:srgbClr val="E3B341"/>
+                </a:solidFill>
+              </a:rPr>
+              <a:t>항상 3  (Nelson Rule 1)</a:t>
+            </a:r>
+          </a:p>
+        </p:txBody>
+      </p:sp>
+      <p:sp>
+        <p:nvSpPr>
+          <p:cNvPr id="120" name="Rectangle 119"/>
+          <p:cNvSpPr/>
+          <p:nvPr/>
+        </p:nvSpPr>
+        <p:spPr>
+          <a:xfrm>
+            <a:off x="5824728" y="6121908"/>
+            <a:ext cx="566928" cy="169164"/>
+          </a:xfrm>
+          <a:prstGeom prst="rect">
+            <a:avLst/>
+          </a:prstGeom>
+          <a:solidFill>
+            <a:srgbClr val="1A1200"/>
+          </a:solidFill>
+          <a:ln w="8890">
+            <a:solidFill>
+              <a:srgbClr val="E3B341"/>
+            </a:solidFill>
+          </a:ln>
+          <a:effectLst/>
+        </p:spPr>
+        <p:style>
+          <a:lnRef idx="1">
+            <a:schemeClr val="accent1"/>
+          </a:lnRef>
+          <a:fillRef idx="3">
+            <a:schemeClr val="accent1"/>
+          </a:fillRef>
+          <a:effectRef idx="2">
+            <a:schemeClr val="accent1"/>
+          </a:effectRef>
+          <a:fontRef idx="minor">
+            <a:schemeClr val="lt1"/>
+          </a:fontRef>
+        </p:style>
+        <p:txBody>
+          <a:bodyPr rtlCol="0" anchor="ctr"/>
+          <a:lstStyle/>
+          <a:p>
+            <a:pPr algn="ctr"/>
+          </a:p>
+        </p:txBody>
+      </p:sp>
+      <p:sp>
+        <p:nvSpPr>
+          <p:cNvPr id="121" name="TextBox 120"/>
+          <p:cNvSpPr txBox="1"/>
+          <p:nvPr/>
+        </p:nvSpPr>
+        <p:spPr>
+          <a:xfrm>
+            <a:off x="5824728" y="6121908"/>
+            <a:ext cx="566928" cy="169164"/>
+          </a:xfrm>
+          <a:prstGeom prst="rect">
+            <a:avLst/>
+          </a:prstGeom>
+          <a:noFill/>
+        </p:spPr>
+        <p:txBody>
+          <a:bodyPr wrap="square">
+            <a:spAutoFit/>
+          </a:bodyPr>
+          <a:lstStyle/>
+          <a:p>
+            <a:pPr algn="ctr"/>
+            <a:r>
+              <a:rPr sz="800" b="0">
+                <a:solidFill>
+                  <a:srgbClr val="E3B341"/>
+                </a:solidFill>
+              </a:rPr>
+              <a:t>고정값</a:t>
+            </a:r>
+          </a:p>
+        </p:txBody>
+      </p:sp>
+      <p:sp>
+        <p:nvSpPr>
+          <p:cNvPr id="122" name="Rectangle 121"/>
+          <p:cNvSpPr/>
+          <p:nvPr/>
+        </p:nvSpPr>
+        <p:spPr>
+          <a:xfrm>
+            <a:off x="201168" y="6318504"/>
+            <a:ext cx="6217920" cy="224028"/>
+          </a:xfrm>
+          <a:prstGeom prst="rect">
+            <a:avLst/>
+          </a:prstGeom>
+          <a:solidFill>
+            <a:srgbClr val="161B22"/>
+          </a:solidFill>
+          <a:ln>
+            <a:noFill/>
+          </a:ln>
+          <a:effectLst/>
+        </p:spPr>
+        <p:style>
+          <a:lnRef idx="1">
+            <a:schemeClr val="accent1"/>
+          </a:lnRef>
+          <a:fillRef idx="3">
+            <a:schemeClr val="accent1"/>
+          </a:fillRef>
+          <a:effectRef idx="2">
+            <a:schemeClr val="accent1"/>
+          </a:effectRef>
+          <a:fontRef idx="minor">
+            <a:schemeClr val="lt1"/>
+          </a:fontRef>
+        </p:style>
+        <p:txBody>
+          <a:bodyPr rtlCol="0" anchor="ctr"/>
+          <a:lstStyle/>
+          <a:p>
+            <a:pPr algn="ctr"/>
+          </a:p>
+        </p:txBody>
+      </p:sp>
+      <p:sp>
+        <p:nvSpPr>
+          <p:cNvPr id="123" name="TextBox 122"/>
+          <p:cNvSpPr txBox="1"/>
+          <p:nvPr/>
+        </p:nvSpPr>
+        <p:spPr>
+          <a:xfrm>
+            <a:off x="274320" y="6336792"/>
+            <a:ext cx="2240280" cy="224028"/>
+          </a:xfrm>
+          <a:prstGeom prst="rect">
+            <a:avLst/>
+          </a:prstGeom>
+          <a:noFill/>
+        </p:spPr>
+        <p:txBody>
+          <a:bodyPr wrap="square">
+            <a:spAutoFit/>
+          </a:bodyPr>
+          <a:lstStyle/>
+          <a:p>
+            <a:pPr algn="l"/>
+            <a:r>
+              <a:rPr sz="950" b="0">
+                <a:solidFill>
+                  <a:srgbClr val="FFFFFF"/>
+                </a:solidFill>
+              </a:rPr>
+              <a:t>㉓ 변동계수 급변</a:t>
+            </a:r>
+          </a:p>
+        </p:txBody>
+      </p:sp>
+      <p:sp>
+        <p:nvSpPr>
+          <p:cNvPr id="124" name="TextBox 123"/>
+          <p:cNvSpPr txBox="1"/>
+          <p:nvPr/>
+        </p:nvSpPr>
+        <p:spPr>
+          <a:xfrm>
+            <a:off x="2578608" y="6336792"/>
+            <a:ext cx="3291840" cy="224028"/>
+          </a:xfrm>
+          <a:prstGeom prst="rect">
+            <a:avLst/>
+          </a:prstGeom>
+          <a:noFill/>
+        </p:spPr>
+        <p:txBody>
+          <a:bodyPr wrap="square">
+            <a:spAutoFit/>
+          </a:bodyPr>
+          <a:lstStyle/>
+          <a:p>
+            <a:pPr algn="l"/>
+            <a:r>
+              <a:rPr sz="950" b="0">
+                <a:solidFill>
+                  <a:srgbClr val="58A6FF"/>
+                </a:solidFill>
+              </a:rPr>
+              <a:t>데이터 (σ/μ) × 30%</a:t>
+            </a:r>
+          </a:p>
+        </p:txBody>
+      </p:sp>
+      <p:sp>
+        <p:nvSpPr>
+          <p:cNvPr id="125" name="Rectangle 124"/>
+          <p:cNvSpPr/>
+          <p:nvPr/>
+        </p:nvSpPr>
+        <p:spPr>
+          <a:xfrm>
+            <a:off x="5824728" y="6345936"/>
+            <a:ext cx="566928" cy="169164"/>
+          </a:xfrm>
+          <a:prstGeom prst="rect">
+            <a:avLst/>
+          </a:prstGeom>
+          <a:solidFill>
+            <a:srgbClr val="0D1933"/>
+          </a:solidFill>
+          <a:ln w="8890">
+            <a:solidFill>
+              <a:srgbClr val="58A6FF"/>
+            </a:solidFill>
+          </a:ln>
+          <a:effectLst/>
+        </p:spPr>
+        <p:style>
+          <a:lnRef idx="1">
+            <a:schemeClr val="accent1"/>
+          </a:lnRef>
+          <a:fillRef idx="3">
+            <a:schemeClr val="accent1"/>
+          </a:fillRef>
+          <a:effectRef idx="2">
+            <a:schemeClr val="accent1"/>
+          </a:effectRef>
+          <a:fontRef idx="minor">
+            <a:schemeClr val="lt1"/>
+          </a:fontRef>
+        </p:style>
+        <p:txBody>
+          <a:bodyPr rtlCol="0" anchor="ctr"/>
+          <a:lstStyle/>
+          <a:p>
+            <a:pPr algn="ctr"/>
+          </a:p>
+        </p:txBody>
+      </p:sp>
+      <p:sp>
+        <p:nvSpPr>
+          <p:cNvPr id="126" name="TextBox 125"/>
+          <p:cNvSpPr txBox="1"/>
+          <p:nvPr/>
+        </p:nvSpPr>
+        <p:spPr>
+          <a:xfrm>
+            <a:off x="5824728" y="6345936"/>
+            <a:ext cx="566928" cy="169164"/>
+          </a:xfrm>
+          <a:prstGeom prst="rect">
+            <a:avLst/>
+          </a:prstGeom>
+          <a:noFill/>
+        </p:spPr>
+        <p:txBody>
+          <a:bodyPr wrap="square">
+            <a:spAutoFit/>
+          </a:bodyPr>
+          <a:lstStyle/>
+          <a:p>
+            <a:pPr algn="ctr"/>
+            <a:r>
+              <a:rPr sz="800" b="0">
+                <a:solidFill>
+                  <a:srgbClr val="58A6FF"/>
+                </a:solidFill>
+              </a:rPr>
+              <a:t>데이터 기반</a:t>
+            </a:r>
+          </a:p>
+        </p:txBody>
+      </p:sp>
+      <p:sp>
+        <p:nvSpPr>
+          <p:cNvPr id="127" name="Rectangle 126"/>
+          <p:cNvSpPr/>
+          <p:nvPr/>
+        </p:nvSpPr>
+        <p:spPr>
+          <a:xfrm>
+            <a:off x="6537960" y="1078992"/>
+            <a:ext cx="5486400" cy="5440680"/>
+          </a:xfrm>
+          <a:prstGeom prst="rect">
+            <a:avLst/>
+          </a:prstGeom>
+          <a:solidFill>
+            <a:srgbClr val="161B22"/>
+          </a:solidFill>
+          <a:ln w="10160">
+            <a:solidFill>
+              <a:srgbClr val="8B949E"/>
+            </a:solidFill>
+          </a:ln>
+          <a:effectLst/>
+        </p:spPr>
+        <p:style>
+          <a:lnRef idx="1">
+            <a:schemeClr val="accent1"/>
+          </a:lnRef>
+          <a:fillRef idx="3">
+            <a:schemeClr val="accent1"/>
+          </a:fillRef>
+          <a:effectRef idx="2">
+            <a:schemeClr val="accent1"/>
+          </a:effectRef>
+          <a:fontRef idx="minor">
+            <a:schemeClr val="lt1"/>
+          </a:fontRef>
+        </p:style>
+        <p:txBody>
+          <a:bodyPr rtlCol="0" anchor="ctr"/>
+          <a:lstStyle/>
+          <a:p>
+            <a:pPr algn="ctr"/>
+          </a:p>
+        </p:txBody>
+      </p:sp>
+      <p:sp>
+        <p:nvSpPr>
+          <p:cNvPr id="128" name="TextBox 127"/>
+          <p:cNvSpPr txBox="1"/>
+          <p:nvPr/>
+        </p:nvSpPr>
+        <p:spPr>
+          <a:xfrm>
+            <a:off x="6583680" y="1124712"/>
+            <a:ext cx="5394960" cy="228600"/>
+          </a:xfrm>
+          <a:prstGeom prst="rect">
+            <a:avLst/>
+          </a:prstGeom>
+          <a:noFill/>
+        </p:spPr>
+        <p:txBody>
+          <a:bodyPr wrap="square">
+            <a:spAutoFit/>
+          </a:bodyPr>
+          <a:lstStyle/>
+          <a:p>
+            <a:pPr algn="l"/>
+            <a:r>
+              <a:rPr sz="1000" b="1">
+                <a:solidFill>
+                  <a:srgbClr val="58A6FF"/>
+                </a:solidFill>
+              </a:rPr>
+              <a:t>📊  데이터 기반 추천 — σ에 따라 달라지는 예시</a:t>
+            </a:r>
+          </a:p>
+        </p:txBody>
+      </p:sp>
+      <p:pic>
+        <p:nvPicPr>
+          <p:cNvPr id="129" name="Picture 128" descr="image.png"/>
+          <p:cNvPicPr>
+            <a:picLocks noChangeAspect="1"/>
+          </p:cNvPicPr>
+          <p:nvPr/>
+        </p:nvPicPr>
+        <p:blipFill>
+          <a:blip r:embed="rId2"/>
+          <a:stretch>
+            <a:fillRect/>
+          </a:stretch>
+        </p:blipFill>
+        <p:spPr>
+          <a:xfrm>
+            <a:off x="6583680" y="1371600"/>
+            <a:ext cx="5394960" cy="2377440"/>
+          </a:xfrm>
+          <a:prstGeom prst="rect">
+            <a:avLst/>
+          </a:prstGeom>
+        </p:spPr>
+      </p:pic>
+      <p:sp>
+        <p:nvSpPr>
+          <p:cNvPr id="130" name="Rectangle 129"/>
+          <p:cNvSpPr/>
+          <p:nvPr/>
+        </p:nvSpPr>
+        <p:spPr>
+          <a:xfrm>
+            <a:off x="6583680" y="3794760"/>
+            <a:ext cx="5394960" cy="475488"/>
+          </a:xfrm>
+          <a:prstGeom prst="rect">
+            <a:avLst/>
+          </a:prstGeom>
+          <a:solidFill>
+            <a:srgbClr val="0D1933"/>
+          </a:solidFill>
+          <a:ln w="10160">
+            <a:solidFill>
+              <a:srgbClr val="58A6FF"/>
+            </a:solidFill>
+          </a:ln>
+          <a:effectLst/>
+        </p:spPr>
+        <p:style>
+          <a:lnRef idx="1">
+            <a:schemeClr val="accent1"/>
+          </a:lnRef>
+          <a:fillRef idx="3">
+            <a:schemeClr val="accent1"/>
+          </a:fillRef>
+          <a:effectRef idx="2">
+            <a:schemeClr val="accent1"/>
+          </a:effectRef>
+          <a:fontRef idx="minor">
+            <a:schemeClr val="lt1"/>
+          </a:fontRef>
+        </p:style>
+        <p:txBody>
+          <a:bodyPr rtlCol="0" anchor="ctr"/>
+          <a:lstStyle/>
+          <a:p>
+            <a:pPr algn="ctr"/>
+          </a:p>
+        </p:txBody>
+      </p:sp>
+      <p:sp>
+        <p:nvSpPr>
+          <p:cNvPr id="131" name="TextBox 130"/>
+          <p:cNvSpPr txBox="1"/>
+          <p:nvPr/>
+        </p:nvSpPr>
+        <p:spPr>
+          <a:xfrm>
+            <a:off x="6675120" y="3822191"/>
+            <a:ext cx="5212080" cy="420624"/>
+          </a:xfrm>
+          <a:prstGeom prst="rect">
+            <a:avLst/>
+          </a:prstGeom>
+          <a:noFill/>
+        </p:spPr>
+        <p:txBody>
+          <a:bodyPr wrap="square">
+            <a:spAutoFit/>
+          </a:bodyPr>
+          <a:lstStyle/>
+          <a:p>
+            <a:pPr algn="l"/>
+            <a:r>
+              <a:rPr sz="1050" b="0">
+                <a:solidFill>
+                  <a:srgbClr val="58A6FF"/>
+                </a:solidFill>
+              </a:rPr>
+              <a:t>같은 공식(3σ)이라도 데이터 분포(σ)가 다르면 추천값이 달라짐 → 스케일 자동 적응</a:t>
+            </a:r>
+          </a:p>
+        </p:txBody>
+      </p:sp>
+      <p:sp>
+        <p:nvSpPr>
+          <p:cNvPr id="132" name="TextBox 131"/>
+          <p:cNvSpPr txBox="1"/>
+          <p:nvPr/>
+        </p:nvSpPr>
+        <p:spPr>
+          <a:xfrm>
+            <a:off x="6583680" y="4343400"/>
+            <a:ext cx="5394960" cy="228600"/>
+          </a:xfrm>
+          <a:prstGeom prst="rect">
+            <a:avLst/>
+          </a:prstGeom>
+          <a:noFill/>
+        </p:spPr>
+        <p:txBody>
+          <a:bodyPr wrap="square">
+            <a:spAutoFit/>
+          </a:bodyPr>
+          <a:lstStyle/>
+          <a:p>
+            <a:pPr algn="l"/>
+            <a:r>
+              <a:rPr sz="1000" b="1">
+                <a:solidFill>
+                  <a:srgbClr val="E3B341"/>
+                </a:solidFill>
+              </a:rPr>
+              <a:t>📊  이론 고정값 — 데이터가 달라도 항상 동일</a:t>
+            </a:r>
+          </a:p>
+        </p:txBody>
+      </p:sp>
+      <p:pic>
+        <p:nvPicPr>
+          <p:cNvPr id="133" name="Picture 132" descr="image.png"/>
+          <p:cNvPicPr>
+            <a:picLocks noChangeAspect="1"/>
+          </p:cNvPicPr>
+          <p:nvPr/>
+        </p:nvPicPr>
+        <p:blipFill>
+          <a:blip r:embed="rId3"/>
+          <a:stretch>
+            <a:fillRect/>
+          </a:stretch>
+        </p:blipFill>
+        <p:spPr>
+          <a:xfrm>
+            <a:off x="6583680" y="4590288"/>
+            <a:ext cx="5394960" cy="1828800"/>
+          </a:xfrm>
+          <a:prstGeom prst="rect">
+            <a:avLst/>
+          </a:prstGeom>
+        </p:spPr>
+      </p:pic>
+      <p:sp>
+        <p:nvSpPr>
+          <p:cNvPr id="134" name="Rectangle 133"/>
+          <p:cNvSpPr/>
+          <p:nvPr/>
+        </p:nvSpPr>
+        <p:spPr>
+          <a:xfrm>
+            <a:off x="6583680" y="6446520"/>
+            <a:ext cx="5394960" cy="292608"/>
+          </a:xfrm>
+          <a:prstGeom prst="rect">
+            <a:avLst/>
+          </a:prstGeom>
+          <a:solidFill>
+            <a:srgbClr val="1A1200"/>
+          </a:solidFill>
+          <a:ln w="10160">
+            <a:solidFill>
+              <a:srgbClr val="E3B341"/>
+            </a:solidFill>
+          </a:ln>
+          <a:effectLst/>
+        </p:spPr>
+        <p:style>
+          <a:lnRef idx="1">
+            <a:schemeClr val="accent1"/>
+          </a:lnRef>
+          <a:fillRef idx="3">
+            <a:schemeClr val="accent1"/>
+          </a:fillRef>
+          <a:effectRef idx="2">
+            <a:schemeClr val="accent1"/>
+          </a:effectRef>
+          <a:fontRef idx="minor">
+            <a:schemeClr val="lt1"/>
+          </a:fontRef>
+        </p:style>
+        <p:txBody>
+          <a:bodyPr rtlCol="0" anchor="ctr"/>
+          <a:lstStyle/>
+          <a:p>
+            <a:pPr algn="ctr"/>
+          </a:p>
+        </p:txBody>
+      </p:sp>
+      <p:sp>
+        <p:nvSpPr>
+          <p:cNvPr id="135" name="TextBox 134"/>
+          <p:cNvSpPr txBox="1"/>
+          <p:nvPr/>
+        </p:nvSpPr>
+        <p:spPr>
+          <a:xfrm>
+            <a:off x="6675120" y="6464808"/>
+            <a:ext cx="5212080" cy="256032"/>
+          </a:xfrm>
+          <a:prstGeom prst="rect">
+            <a:avLst/>
+          </a:prstGeom>
+          <a:noFill/>
+        </p:spPr>
+        <p:txBody>
+          <a:bodyPr wrap="square">
+            <a:spAutoFit/>
+          </a:bodyPr>
+          <a:lstStyle/>
+          <a:p>
+            <a:pPr algn="l"/>
+            <a:r>
+              <a:rPr sz="1000" b="0">
+                <a:solidFill>
+                  <a:srgbClr val="E3B341"/>
+                </a:solidFill>
+              </a:rPr>
+              <a:t>국제 SPC 표준/학술 기준값이므로 데이터 스케일과 무관하게 고정</a:t>
+            </a:r>
+          </a:p>
+        </p:txBody>
+      </p:sp>
+      <p:sp>
+        <p:nvSpPr>
+          <p:cNvPr id="136" name="Rectangle 135"/>
+          <p:cNvSpPr/>
+          <p:nvPr/>
+        </p:nvSpPr>
+        <p:spPr>
+          <a:xfrm>
+            <a:off x="0" y="6803136"/>
+            <a:ext cx="12188952" cy="54864"/>
+          </a:xfrm>
+          <a:prstGeom prst="rect">
+            <a:avLst/>
+          </a:prstGeom>
+          <a:solidFill>
+            <a:srgbClr val="58A6FF"/>
+          </a:solidFill>
+          <a:ln>
+            <a:noFill/>
+          </a:ln>
+          <a:effectLst/>
+        </p:spPr>
+        <p:style>
+          <a:lnRef idx="1">
+            <a:schemeClr val="accent1"/>
+          </a:lnRef>
+          <a:fillRef idx="3">
+            <a:schemeClr val="accent1"/>
+          </a:fillRef>
+          <a:effectRef idx="2">
+            <a:schemeClr val="accent1"/>
+          </a:effectRef>
+          <a:fontRef idx="minor">
+            <a:schemeClr val="lt1"/>
+          </a:fontRef>
+        </p:style>
+        <p:txBody>
+          <a:bodyPr rtlCol="0" anchor="ctr"/>
+          <a:lstStyle/>
+          <a:p>
+            <a:pPr algn="ctr"/>
+          </a:p>
+        </p:txBody>
+      </p:sp>
+      <p:sp>
+        <p:nvSpPr>
+          <p:cNvPr id="137" name="TextBox 136"/>
+          <p:cNvSpPr txBox="1"/>
+          <p:nvPr/>
+        </p:nvSpPr>
+        <p:spPr>
+          <a:xfrm>
+            <a:off x="10543032" y="6510528"/>
+            <a:ext cx="1371600" cy="256032"/>
+          </a:xfrm>
+          <a:prstGeom prst="rect">
+            <a:avLst/>
+          </a:prstGeom>
+          <a:noFill/>
+        </p:spPr>
+        <p:txBody>
+          <a:bodyPr wrap="square">
+            <a:spAutoFit/>
+          </a:bodyPr>
+          <a:lstStyle/>
+          <a:p>
+            <a:pPr algn="r"/>
+            <a:r>
+              <a:rPr sz="1000" b="0">
+                <a:solidFill>
+                  <a:srgbClr val="8B949E"/>
+                </a:solidFill>
+              </a:rPr>
+              <a:t>부록 2 / 2</a:t>
+            </a:r>
           </a:p>
         </p:txBody>
       </p:sp>
